--- a/public/downloads/praesentation/M06.pptx
+++ b/public/downloads/praesentation/M06.pptx
@@ -26,6 +26,11 @@
     <p:sldId id="274" r:id="rId25"/>
     <p:sldId id="275" r:id="rId26"/>
     <p:sldId id="276" r:id="rId27"/>
+    <p:sldId id="277" r:id="rId28"/>
+    <p:sldId id="278" r:id="rId29"/>
+    <p:sldId id="279" r:id="rId30"/>
+    <p:sldId id="280" r:id="rId31"/>
+    <p:sldId id="281" r:id="rId32"/>
   </p:sldIdLst>
   <p:sldSz cx="12188952" cy="6858000" type="screen4x3"/>
   <p:notesSz cx="6858000" cy="9144000"/>
@@ -3167,8 +3172,8 @@
         </p:nvSpPr>
         <p:spPr>
           <a:xfrm>
-            <a:off x="365760" y="365760"/>
-            <a:ext cx="11430000" cy="457200"/>
+            <a:off x="365760" y="320040"/>
+            <a:ext cx="11430000" cy="411480"/>
           </a:xfrm>
           <a:prstGeom prst="rect">
             <a:avLst/>
@@ -3183,13 +3188,13 @@
           <a:p>
             <a:pPr algn="l"/>
             <a:r>
-              <a:rPr sz="1100" b="0">
-                <a:solidFill>
-                  <a:srgbClr val="FFFFFF"/>
-                </a:solidFill>
-                <a:latin typeface="Arial"/>
-              </a:rPr>
-              <a:t>M06  ·  K-02 Branchenwissen  ·  Berater  ·  90–120 Min.</a:t>
+              <a:rPr sz="1100" b="0" i="0">
+                <a:solidFill>
+                  <a:srgbClr val="BBCCEE"/>
+                </a:solidFill>
+                <a:latin typeface="Arial"/>
+              </a:rPr>
+              <a:t>M06  ·  K-02 Branchenwissen  ·  Zielstufe: Berater  ·  90–120 Min.</a:t>
             </a:r>
           </a:p>
         </p:txBody>
@@ -3202,14 +3207,14 @@
         </p:nvSpPr>
         <p:spPr>
           <a:xfrm>
-            <a:off x="365760" y="868680"/>
-            <a:ext cx="7315200" cy="27432"/>
+            <a:off x="365760" y="804672"/>
+            <a:ext cx="8229600" cy="22860"/>
           </a:xfrm>
           <a:prstGeom prst="rect">
             <a:avLst/>
           </a:prstGeom>
           <a:solidFill>
-            <a:srgbClr val="FFFFFF"/>
+            <a:srgbClr val="335CC0"/>
           </a:solidFill>
           <a:ln>
             <a:noFill/>
@@ -3245,8 +3250,8 @@
         </p:nvSpPr>
         <p:spPr>
           <a:xfrm>
-            <a:off x="365760" y="1097280"/>
-            <a:ext cx="11430000" cy="2286000"/>
+            <a:off x="365760" y="1005840"/>
+            <a:ext cx="11430000" cy="2560320"/>
           </a:xfrm>
           <a:prstGeom prst="rect">
             <a:avLst/>
@@ -3261,7 +3266,7 @@
           <a:p>
             <a:pPr algn="l"/>
             <a:r>
-              <a:rPr sz="4000" b="1">
+              <a:rPr sz="4200" b="1" i="0">
                 <a:solidFill>
                   <a:srgbClr val="FFFFFF"/>
                 </a:solidFill>
@@ -3280,8 +3285,8 @@
         </p:nvSpPr>
         <p:spPr>
           <a:xfrm>
-            <a:off x="365760" y="3200400"/>
-            <a:ext cx="9144000" cy="914400"/>
+            <a:off x="365760" y="3383280"/>
+            <a:ext cx="10058400" cy="822960"/>
           </a:xfrm>
           <a:prstGeom prst="rect">
             <a:avLst/>
@@ -3296,7 +3301,7 @@
           <a:p>
             <a:pPr algn="l"/>
             <a:r>
-              <a:rPr sz="2000" b="0">
+              <a:rPr sz="2000" b="0" i="1">
                 <a:solidFill>
                   <a:srgbClr val="CCD6F0"/>
                 </a:solidFill>
@@ -3315,8 +3320,8 @@
         </p:nvSpPr>
         <p:spPr>
           <a:xfrm>
-            <a:off x="365760" y="6217920"/>
-            <a:ext cx="11430000" cy="457200"/>
+            <a:off x="365760" y="6309360"/>
+            <a:ext cx="11430000" cy="365760"/>
           </a:xfrm>
           <a:prstGeom prst="rect">
             <a:avLst/>
@@ -3331,9 +3336,9 @@
           <a:p>
             <a:pPr algn="l"/>
             <a:r>
-              <a:rPr sz="1000" b="0">
-                <a:solidFill>
-                  <a:srgbClr val="99AACC"/>
+              <a:rPr sz="900" b="0" i="0">
+                <a:solidFill>
+                  <a:srgbClr val="889ACC"/>
                 </a:solidFill>
                 <a:latin typeface="Arial"/>
               </a:rPr>
@@ -3419,8 +3424,8 @@
         </p:nvSpPr>
         <p:spPr>
           <a:xfrm>
-            <a:off x="365760" y="274320"/>
-            <a:ext cx="11430000" cy="822960"/>
+            <a:off x="228600" y="182880"/>
+            <a:ext cx="11430000" cy="320040"/>
           </a:xfrm>
           <a:prstGeom prst="rect">
             <a:avLst/>
@@ -3435,33 +3440,68 @@
           <a:p>
             <a:pPr algn="l"/>
             <a:r>
-              <a:rPr sz="2200" b="1">
+              <a:rPr sz="900" b="0" i="0">
+                <a:solidFill>
+                  <a:srgbClr val="556575"/>
+                </a:solidFill>
+                <a:latin typeface="Arial"/>
+              </a:rPr>
+              <a:t>M06 · Modulinhalte</a:t>
+            </a:r>
+          </a:p>
+        </p:txBody>
+      </p:sp>
+      <p:sp>
+        <p:nvSpPr>
+          <p:cNvPr id="4" name="TextBox 3"/>
+          <p:cNvSpPr txBox="1"/>
+          <p:nvPr/>
+        </p:nvSpPr>
+        <p:spPr>
+          <a:xfrm>
+            <a:off x="365760" y="274320"/>
+            <a:ext cx="11430000" cy="777240"/>
+          </a:xfrm>
+          <a:prstGeom prst="rect">
+            <a:avLst/>
+          </a:prstGeom>
+          <a:noFill/>
+        </p:spPr>
+        <p:txBody>
+          <a:bodyPr wrap="square">
+            <a:spAutoFit/>
+          </a:bodyPr>
+          <a:lstStyle/>
+          <a:p>
+            <a:pPr algn="l"/>
+            <a:r>
+              <a:rPr sz="2200" b="1" i="0">
                 <a:solidFill>
                   <a:srgbClr val="003DA5"/>
                 </a:solidFill>
                 <a:latin typeface="Arial"/>
               </a:rPr>
-              <a:t>Vier Branchenprofile für den Beratungsalltag</a:t>
-            </a:r>
-          </a:p>
-        </p:txBody>
-      </p:sp>
-      <p:sp>
-        <p:nvSpPr>
-          <p:cNvPr id="4" name="Rectangle 3"/>
+              <a:t>Die vier zentralen Risikofelder</a:t>
+            </a:r>
+          </a:p>
+        </p:txBody>
+      </p:sp>
+      <p:sp>
+        <p:nvSpPr>
+          <p:cNvPr id="5" name="Rectangle 4"/>
           <p:cNvSpPr/>
           <p:nvPr/>
         </p:nvSpPr>
         <p:spPr>
           <a:xfrm>
-            <a:off x="365760" y="1051560"/>
+            <a:off x="365760" y="1005840"/>
             <a:ext cx="11430000" cy="27432"/>
           </a:xfrm>
           <a:prstGeom prst="rect">
             <a:avLst/>
           </a:prstGeom>
           <a:solidFill>
-            <a:srgbClr val="E5E7EB"/>
+            <a:srgbClr val="D1D5DB"/>
           </a:solidFill>
           <a:ln>
             <a:noFill/>
@@ -3491,13 +3531,13 @@
       </p:sp>
       <p:sp>
         <p:nvSpPr>
-          <p:cNvPr id="5" name="TextBox 4"/>
+          <p:cNvPr id="6" name="TextBox 5"/>
           <p:cNvSpPr txBox="1"/>
           <p:nvPr/>
         </p:nvSpPr>
         <p:spPr>
           <a:xfrm>
-            <a:off x="365760" y="1234440"/>
+            <a:off x="365760" y="1143000"/>
             <a:ext cx="11430000" cy="5212080"/>
           </a:xfrm>
           <a:prstGeom prst="rect">
@@ -3513,7 +3553,7 @@
           <a:p>
             <a:pPr>
               <a:spcBef>
-                <a:spcPts val="400"/>
+                <a:spcPts val="500"/>
               </a:spcBef>
             </a:pPr>
             <a:r>
@@ -3526,19 +3566,28 @@
               <a:t>▪  </a:t>
             </a:r>
             <a:r>
+              <a:rPr sz="1700" b="1">
+                <a:solidFill>
+                  <a:srgbClr val="003DA5"/>
+                </a:solidFill>
+                <a:latin typeface="Arial"/>
+              </a:rPr>
+              <a:t>Risiko 1: Inhaberabhängigkeit / Schlüsselpersonenrisiko: </a:t>
+            </a:r>
+            <a:r>
               <a:rPr sz="1700">
                 <a:solidFill>
                   <a:srgbClr val="1A1A1A"/>
                 </a:solidFill>
                 <a:latin typeface="Arial"/>
               </a:rPr>
-              <a:t>Eigenkapitalquote: Ø 18–24 % (niedriger als Industrie, weil arbeitsintensiv und wenig Anlageintensität)</a:t>
+              <a:t>Bei inhabergeführten KMU ist die Unternehmerperson oft das wichtigste Asset – und gleichzeitig das größte Risiko. Wenn der Inhaber durch Krankheit, Unfall oder Tod ausfällt, steht…</a:t>
             </a:r>
           </a:p>
           <a:p>
             <a:pPr>
               <a:spcBef>
-                <a:spcPts val="400"/>
+                <a:spcPts val="500"/>
               </a:spcBef>
             </a:pPr>
             <a:r>
@@ -3551,19 +3600,28 @@
               <a:t>▪  </a:t>
             </a:r>
             <a:r>
+              <a:rPr sz="1700" b="1">
+                <a:solidFill>
+                  <a:srgbClr val="003DA5"/>
+                </a:solidFill>
+                <a:latin typeface="Arial"/>
+              </a:rPr>
+              <a:t>Risiko 2: Klumpenrisiko: </a:t>
+            </a:r>
+            <a:r>
               <a:rPr sz="1700">
                 <a:solidFill>
                   <a:srgbClr val="1A1A1A"/>
                 </a:solidFill>
                 <a:latin typeface="Arial"/>
               </a:rPr>
-              <a:t>Finanzierungsbedarf: Kontokorrentlinie für saisonale Spitzen und Materialvorfinanzierung, Investitionskredite für Fahrzeuge, Maschinen und Werkzeuge, gelegentlich Betriebsgebäude</a:t>
+              <a:t>Es ist in KMU-Bilanzen nicht ungewöhnlich, dass 1–3 Großkunden 60–80 % des Umsatzes ausmachen. Fällt einer dieser Kunden weg – durch Insolvenz, Lieferantenwechsel,…</a:t>
             </a:r>
           </a:p>
           <a:p>
             <a:pPr>
               <a:spcBef>
-                <a:spcPts val="400"/>
+                <a:spcPts val="500"/>
               </a:spcBef>
             </a:pPr>
             <a:r>
@@ -3576,19 +3634,28 @@
               <a:t>▪  </a:t>
             </a:r>
             <a:r>
+              <a:rPr sz="1700" b="1">
+                <a:solidFill>
+                  <a:srgbClr val="003DA5"/>
+                </a:solidFill>
+                <a:latin typeface="Arial"/>
+              </a:rPr>
+              <a:t>Risiko 3: Nachfolgerisiko: </a:t>
+            </a:r>
+            <a:r>
               <a:rPr sz="1700">
                 <a:solidFill>
                   <a:srgbClr val="1A1A1A"/>
                 </a:solidFill>
                 <a:latin typeface="Arial"/>
               </a:rPr>
-              <a:t>Typische Risiken: Fachkräftemangel, Materialkostenvolatilität (Holz, Stahl, Kupfer), Auftragsschwankungen durch Baukonjunktur</a:t>
+              <a:t>IfM Bonn (2024) schätzt, dass bis 2027 über</a:t>
             </a:r>
           </a:p>
           <a:p>
             <a:pPr>
               <a:spcBef>
-                <a:spcPts val="400"/>
+                <a:spcPts val="500"/>
               </a:spcBef>
             </a:pPr>
             <a:r>
@@ -3601,19 +3668,28 @@
               <a:t>▪  </a:t>
             </a:r>
             <a:r>
+              <a:rPr sz="1700" b="1">
+                <a:solidFill>
+                  <a:srgbClr val="003DA5"/>
+                </a:solidFill>
+                <a:latin typeface="Arial"/>
+              </a:rPr>
+              <a:t>600.000 KMU: </a:t>
+            </a:r>
+            <a:r>
               <a:rPr sz="1700">
                 <a:solidFill>
                   <a:srgbClr val="1A1A1A"/>
                 </a:solidFill>
                 <a:latin typeface="Arial"/>
               </a:rPr>
-              <a:t>Was frage ich als Berater: "Wie gut sind Sie mit Aufträgen ausgelastet – haben Sie eine Warteliste?" / "Haben Sie genug qualifiziertes Personal, um Ihre Aufträge abzuarbeiten?"</a:t>
+              <a:t>in Deutschland einen Nachfolger suchen. Viele Inhaber bereiten die Nachfolge zu spät und zu wenig professionell vor. Für die Hausbank bedeutet ein ungeplanter Inhaberwechsel: Neue…</a:t>
             </a:r>
           </a:p>
           <a:p>
             <a:pPr>
               <a:spcBef>
-                <a:spcPts val="400"/>
+                <a:spcPts val="500"/>
               </a:spcBef>
             </a:pPr>
             <a:r>
@@ -3626,73 +3702,22 @@
               <a:t>▪  </a:t>
             </a:r>
             <a:r>
+              <a:rPr sz="1700" b="1">
+                <a:solidFill>
+                  <a:srgbClr val="003DA5"/>
+                </a:solidFill>
+                <a:latin typeface="Arial"/>
+              </a:rPr>
+              <a:t>Risiko 4: Working-Capital-Risiko: </a:t>
+            </a:r>
+            <a:r>
               <a:rPr sz="1700">
                 <a:solidFill>
                   <a:srgbClr val="1A1A1A"/>
                 </a:solidFill>
                 <a:latin typeface="Arial"/>
               </a:rPr>
-              <a:t>Eigenkapitalquote: Ø 28–35 % (höher, weil hoher Anlagevermögensanteil)</a:t>
-            </a:r>
-          </a:p>
-          <a:p>
-            <a:pPr>
-              <a:spcBef>
-                <a:spcPts val="400"/>
-              </a:spcBef>
-            </a:pPr>
-            <a:r>
-              <a:rPr sz="1500">
-                <a:solidFill>
-                  <a:srgbClr val="003DA5"/>
-                </a:solidFill>
-                <a:latin typeface="Arial"/>
-              </a:rPr>
-              <a:t>▪  </a:t>
-            </a:r>
-            <a:r>
-              <a:rPr sz="1700">
-                <a:solidFill>
-                  <a:srgbClr val="1A1A1A"/>
-                </a:solidFill>
-                <a:latin typeface="Arial"/>
-              </a:rPr>
-              <a:t>Finanzierungsbedarf: Investitionskredite für Maschinen und Anlagen (oft langfristig, 7–15 Jahre), Exportfinanzierung, Anzahlungsfinanzierung bei Großaufträgen, Betriebsmittelkredite</a:t>
-            </a:r>
-          </a:p>
-        </p:txBody>
-      </p:sp>
-      <p:sp>
-        <p:nvSpPr>
-          <p:cNvPr id="6" name="TextBox 5"/>
-          <p:cNvSpPr txBox="1"/>
-          <p:nvPr/>
-        </p:nvSpPr>
-        <p:spPr>
-          <a:xfrm>
-            <a:off x="11704320" y="6492240"/>
-            <a:ext cx="365760" cy="274320"/>
-          </a:xfrm>
-          <a:prstGeom prst="rect">
-            <a:avLst/>
-          </a:prstGeom>
-          <a:noFill/>
-        </p:spPr>
-        <p:txBody>
-          <a:bodyPr wrap="square">
-            <a:spAutoFit/>
-          </a:bodyPr>
-          <a:lstStyle/>
-          <a:p>
-            <a:pPr algn="r"/>
-            <a:r>
-              <a:rPr sz="1000" b="0">
-                <a:solidFill>
-                  <a:srgbClr val="6B7280"/>
-                </a:solidFill>
-                <a:latin typeface="Arial"/>
-              </a:rPr>
-              <a:t>8</a:t>
+              <a:t>KMU – insbesondere im Handel und Handwerk – haben häufig ausgeprägte saisonale und auftragsbezogene Liquiditätszyklen. Lange Zahlungsziele (30–90 Tage), hohe Vorfinanzierung bei…</a:t>
             </a:r>
           </a:p>
         </p:txBody>
@@ -3774,8 +3799,8 @@
         </p:nvSpPr>
         <p:spPr>
           <a:xfrm>
-            <a:off x="365760" y="274320"/>
-            <a:ext cx="11430000" cy="822960"/>
+            <a:off x="228600" y="182880"/>
+            <a:ext cx="11430000" cy="320040"/>
           </a:xfrm>
           <a:prstGeom prst="rect">
             <a:avLst/>
@@ -3790,33 +3815,68 @@
           <a:p>
             <a:pPr algn="l"/>
             <a:r>
-              <a:rPr sz="2200" b="1">
+              <a:rPr sz="900" b="0" i="0">
+                <a:solidFill>
+                  <a:srgbClr val="556575"/>
+                </a:solidFill>
+                <a:latin typeface="Arial"/>
+              </a:rPr>
+              <a:t>M06 · Modulinhalte</a:t>
+            </a:r>
+          </a:p>
+        </p:txBody>
+      </p:sp>
+      <p:sp>
+        <p:nvSpPr>
+          <p:cNvPr id="4" name="TextBox 3"/>
+          <p:cNvSpPr txBox="1"/>
+          <p:nvPr/>
+        </p:nvSpPr>
+        <p:spPr>
+          <a:xfrm>
+            <a:off x="365760" y="274320"/>
+            <a:ext cx="11430000" cy="777240"/>
+          </a:xfrm>
+          <a:prstGeom prst="rect">
+            <a:avLst/>
+          </a:prstGeom>
+          <a:noFill/>
+        </p:spPr>
+        <p:txBody>
+          <a:bodyPr wrap="square">
+            <a:spAutoFit/>
+          </a:bodyPr>
+          <a:lstStyle/>
+          <a:p>
+            <a:pPr algn="l"/>
+            <a:r>
+              <a:rPr sz="2200" b="1" i="0">
                 <a:solidFill>
                   <a:srgbClr val="003DA5"/>
                 </a:solidFill>
                 <a:latin typeface="Arial"/>
               </a:rPr>
-              <a:t>Das 5-Fragen-Schema: Strukturierter Analyseeinstieg</a:t>
-            </a:r>
-          </a:p>
-        </p:txBody>
-      </p:sp>
-      <p:sp>
-        <p:nvSpPr>
-          <p:cNvPr id="4" name="Rectangle 3"/>
+              <a:t>Die vier zentralen Risikofelder</a:t>
+            </a:r>
+          </a:p>
+        </p:txBody>
+      </p:sp>
+      <p:sp>
+        <p:nvSpPr>
+          <p:cNvPr id="5" name="Rectangle 4"/>
           <p:cNvSpPr/>
           <p:nvPr/>
         </p:nvSpPr>
         <p:spPr>
           <a:xfrm>
-            <a:off x="365760" y="1051560"/>
+            <a:off x="365760" y="1005840"/>
             <a:ext cx="11430000" cy="27432"/>
           </a:xfrm>
           <a:prstGeom prst="rect">
             <a:avLst/>
           </a:prstGeom>
           <a:solidFill>
-            <a:srgbClr val="E5E7EB"/>
+            <a:srgbClr val="D1D5DB"/>
           </a:solidFill>
           <a:ln>
             <a:noFill/>
@@ -3846,13 +3906,13 @@
       </p:sp>
       <p:sp>
         <p:nvSpPr>
-          <p:cNvPr id="5" name="TextBox 4"/>
+          <p:cNvPr id="6" name="TextBox 5"/>
           <p:cNvSpPr txBox="1"/>
           <p:nvPr/>
         </p:nvSpPr>
         <p:spPr>
           <a:xfrm>
-            <a:off x="365760" y="1234440"/>
+            <a:off x="365760" y="1143000"/>
             <a:ext cx="11430000" cy="5212080"/>
           </a:xfrm>
           <a:prstGeom prst="rect">
@@ -3868,7 +3928,7 @@
           <a:p>
             <a:pPr>
               <a:spcBef>
-                <a:spcPts val="400"/>
+                <a:spcPts val="500"/>
               </a:spcBef>
             </a:pPr>
             <a:r>
@@ -3881,98 +3941,22 @@
               <a:t>▪  </a:t>
             </a:r>
             <a:r>
+              <a:rPr sz="1700" b="1">
+                <a:solidFill>
+                  <a:srgbClr val="003DA5"/>
+                </a:solidFill>
+                <a:latin typeface="Arial"/>
+              </a:rPr>
+              <a:t>Risiko 5: Lieferantenkonzentrationsrisiko: </a:t>
+            </a:r>
+            <a:r>
               <a:rPr sz="1700">
                 <a:solidFill>
                   <a:srgbClr val="1A1A1A"/>
                 </a:solidFill>
                 <a:latin typeface="Arial"/>
               </a:rPr>
-              <a:t>Für das Erstgespräch mit einem KMU-Kunden – oder für die Vorbereitung eines Bestandskundentermins – hat sich ein…</a:t>
-            </a:r>
-          </a:p>
-          <a:p>
-            <a:pPr>
-              <a:spcBef>
-                <a:spcPts val="400"/>
-              </a:spcBef>
-            </a:pPr>
-            <a:r>
-              <a:rPr sz="1500">
-                <a:solidFill>
-                  <a:srgbClr val="003DA5"/>
-                </a:solidFill>
-                <a:latin typeface="Arial"/>
-              </a:rPr>
-              <a:t>▪  </a:t>
-            </a:r>
-            <a:r>
-              <a:rPr sz="1700">
-                <a:solidFill>
-                  <a:srgbClr val="1A1A1A"/>
-                </a:solidFill>
-                <a:latin typeface="Arial"/>
-              </a:rPr>
-              <a:t>Gesprächshilfe für Frage 3 bei Bestandskunden: Bei Kunden, die seit Jahren in der Bank sind, kommt auf Frage 3 oft eine…</a:t>
-            </a:r>
-          </a:p>
-          <a:p>
-            <a:pPr>
-              <a:spcBef>
-                <a:spcPts val="400"/>
-              </a:spcBef>
-            </a:pPr>
-            <a:r>
-              <a:rPr sz="1500">
-                <a:solidFill>
-                  <a:srgbClr val="003DA5"/>
-                </a:solidFill>
-                <a:latin typeface="Arial"/>
-              </a:rPr>
-              <a:t>▪  </a:t>
-            </a:r>
-            <a:r>
-              <a:rPr sz="1700">
-                <a:solidFill>
-                  <a:srgbClr val="1A1A1A"/>
-                </a:solidFill>
-                <a:latin typeface="Arial"/>
-              </a:rPr>
-              <a:t>Diese fünf Fragen sind keine Checkliste zum Abarbeiten, sondern ein Gesprächseinstieg, der dem Kunden signalisiert:…</a:t>
-            </a:r>
-          </a:p>
-        </p:txBody>
-      </p:sp>
-      <p:sp>
-        <p:nvSpPr>
-          <p:cNvPr id="6" name="TextBox 5"/>
-          <p:cNvSpPr txBox="1"/>
-          <p:nvPr/>
-        </p:nvSpPr>
-        <p:spPr>
-          <a:xfrm>
-            <a:off x="11704320" y="6492240"/>
-            <a:ext cx="365760" cy="274320"/>
-          </a:xfrm>
-          <a:prstGeom prst="rect">
-            <a:avLst/>
-          </a:prstGeom>
-          <a:noFill/>
-        </p:spPr>
-        <p:txBody>
-          <a:bodyPr wrap="square">
-            <a:spAutoFit/>
-          </a:bodyPr>
-          <a:lstStyle/>
-          <a:p>
-            <a:pPr algn="r"/>
-            <a:r>
-              <a:rPr sz="1000" b="0">
-                <a:solidFill>
-                  <a:srgbClr val="6B7280"/>
-                </a:solidFill>
-                <a:latin typeface="Arial"/>
-              </a:rPr>
-              <a:t>9</a:t>
+              <a:t>Analog zum Klumpenrisiko auf der Kundenseite existiert ein spiegelbildliches Risiko auf der Beschaffungsseite: Viele KMU beziehen kritische Rohstoffe, Vorprodukte oder…</a:t>
             </a:r>
           </a:p>
         </p:txBody>
@@ -3991,7 +3975,7 @@
     <p:bg>
       <p:bgPr>
         <a:solidFill>
-          <a:srgbClr val="FFFFFF"/>
+          <a:srgbClr val="1A1A1A"/>
         </a:solidFill>
         <a:effectLst/>
       </p:bgPr>
@@ -4018,7 +4002,7 @@
             <a:avLst/>
           </a:prstGeom>
           <a:solidFill>
-            <a:srgbClr val="003DA5"/>
+            <a:srgbClr val="E05B00"/>
           </a:solidFill>
           <a:ln>
             <a:noFill/>
@@ -4054,8 +4038,8 @@
         </p:nvSpPr>
         <p:spPr>
           <a:xfrm>
-            <a:off x="365760" y="274320"/>
-            <a:ext cx="11430000" cy="822960"/>
+            <a:off x="365760" y="2011680"/>
+            <a:ext cx="11430000" cy="2011680"/>
           </a:xfrm>
           <a:prstGeom prst="rect">
             <a:avLst/>
@@ -4070,164 +4054,13 @@
           <a:p>
             <a:pPr algn="l"/>
             <a:r>
-              <a:rPr sz="2200" b="1">
-                <a:solidFill>
-                  <a:srgbClr val="003DA5"/>
-                </a:solidFill>
-                <a:latin typeface="Arial"/>
-              </a:rPr>
-              <a:t>Unternehmensporträt</a:t>
-            </a:r>
-          </a:p>
-        </p:txBody>
-      </p:sp>
-      <p:sp>
-        <p:nvSpPr>
-          <p:cNvPr id="4" name="Rectangle 3"/>
-          <p:cNvSpPr/>
-          <p:nvPr/>
-        </p:nvSpPr>
-        <p:spPr>
-          <a:xfrm>
-            <a:off x="365760" y="1051560"/>
-            <a:ext cx="11430000" cy="27432"/>
-          </a:xfrm>
-          <a:prstGeom prst="rect">
-            <a:avLst/>
-          </a:prstGeom>
-          <a:solidFill>
-            <a:srgbClr val="E5E7EB"/>
-          </a:solidFill>
-          <a:ln>
-            <a:noFill/>
-          </a:ln>
-        </p:spPr>
-        <p:style>
-          <a:lnRef idx="1">
-            <a:schemeClr val="accent1"/>
-          </a:lnRef>
-          <a:fillRef idx="3">
-            <a:schemeClr val="accent1"/>
-          </a:fillRef>
-          <a:effectRef idx="2">
-            <a:schemeClr val="accent1"/>
-          </a:effectRef>
-          <a:fontRef idx="minor">
-            <a:schemeClr val="lt1"/>
-          </a:fontRef>
-        </p:style>
-        <p:txBody>
-          <a:bodyPr rtlCol="0" anchor="ctr"/>
-          <a:lstStyle/>
-          <a:p>
-            <a:pPr algn="ctr"/>
-          </a:p>
-        </p:txBody>
-      </p:sp>
-      <p:sp>
-        <p:nvSpPr>
-          <p:cNvPr id="5" name="TextBox 4"/>
-          <p:cNvSpPr txBox="1"/>
-          <p:nvPr/>
-        </p:nvSpPr>
-        <p:spPr>
-          <a:xfrm>
-            <a:off x="365760" y="1234440"/>
-            <a:ext cx="11430000" cy="5212080"/>
-          </a:xfrm>
-          <a:prstGeom prst="rect">
-            <a:avLst/>
-          </a:prstGeom>
-          <a:noFill/>
-        </p:spPr>
-        <p:txBody>
-          <a:bodyPr wrap="square">
-            <a:spAutoFit/>
-          </a:bodyPr>
-          <a:lstStyle/>
-          <a:p>
-            <a:pPr>
-              <a:spcBef>
-                <a:spcPts val="400"/>
-              </a:spcBef>
-            </a:pPr>
-            <a:r>
-              <a:rPr sz="1500">
-                <a:solidFill>
-                  <a:srgbClr val="003DA5"/>
-                </a:solidFill>
-                <a:latin typeface="Arial"/>
-              </a:rPr>
-              <a:t>▪  </a:t>
-            </a:r>
-            <a:r>
-              <a:rPr sz="1700">
-                <a:solidFill>
-                  <a:srgbClr val="1A1A1A"/>
-                </a:solidFill>
-                <a:latin typeface="Arial"/>
-              </a:rPr>
-              <a:t>Die Bergmann Holzmanufaktur GmbH &amp; Co. KG, Ravensburg, ist seit 5 Jahren Kundin der VR-Bank Bodensee-Oberschwaben eG.…</a:t>
-            </a:r>
-          </a:p>
-          <a:p>
-            <a:pPr>
-              <a:spcBef>
-                <a:spcPts val="400"/>
-              </a:spcBef>
-            </a:pPr>
-            <a:r>
-              <a:rPr sz="1500">
-                <a:solidFill>
-                  <a:srgbClr val="003DA5"/>
-                </a:solidFill>
-                <a:latin typeface="Arial"/>
-              </a:rPr>
-              <a:t>▪  </a:t>
-            </a:r>
-            <a:r>
-              <a:rPr sz="1700">
-                <a:solidFill>
-                  <a:srgbClr val="1A1A1A"/>
-                </a:solidFill>
-                <a:latin typeface="Arial"/>
-              </a:rPr>
-              <a:t>Die Kundin kommt für ein Beratungsgespräch, weil sie eine neue CNC-Fräsmaschine anschaffen möchte (Investitionsvolumen:…</a:t>
-            </a:r>
-          </a:p>
-        </p:txBody>
-      </p:sp>
-      <p:sp>
-        <p:nvSpPr>
-          <p:cNvPr id="6" name="TextBox 5"/>
-          <p:cNvSpPr txBox="1"/>
-          <p:nvPr/>
-        </p:nvSpPr>
-        <p:spPr>
-          <a:xfrm>
-            <a:off x="11704320" y="6492240"/>
-            <a:ext cx="365760" cy="274320"/>
-          </a:xfrm>
-          <a:prstGeom prst="rect">
-            <a:avLst/>
-          </a:prstGeom>
-          <a:noFill/>
-        </p:spPr>
-        <p:txBody>
-          <a:bodyPr wrap="square">
-            <a:spAutoFit/>
-          </a:bodyPr>
-          <a:lstStyle/>
-          <a:p>
-            <a:pPr algn="r"/>
-            <a:r>
-              <a:rPr sz="1000" b="0">
-                <a:solidFill>
-                  <a:srgbClr val="6B7280"/>
-                </a:solidFill>
-                <a:latin typeface="Arial"/>
-              </a:rPr>
-              <a:t>10</a:t>
+              <a:rPr sz="3600" b="1" i="0">
+                <a:solidFill>
+                  <a:srgbClr val="FFFFFF"/>
+                </a:solidFill>
+                <a:latin typeface="Arial"/>
+              </a:rPr>
+              <a:t>4.3 Theorie-Input 3: Einstieg in die Branchenanalyse</a:t>
             </a:r>
           </a:p>
         </p:txBody>
@@ -4309,8 +4142,8 @@
         </p:nvSpPr>
         <p:spPr>
           <a:xfrm>
-            <a:off x="365760" y="274320"/>
-            <a:ext cx="11430000" cy="822960"/>
+            <a:off x="228600" y="182880"/>
+            <a:ext cx="11430000" cy="320040"/>
           </a:xfrm>
           <a:prstGeom prst="rect">
             <a:avLst/>
@@ -4325,33 +4158,68 @@
           <a:p>
             <a:pPr algn="l"/>
             <a:r>
-              <a:rPr sz="2200" b="1">
+              <a:rPr sz="900" b="0" i="0">
+                <a:solidFill>
+                  <a:srgbClr val="556575"/>
+                </a:solidFill>
+                <a:latin typeface="Arial"/>
+              </a:rPr>
+              <a:t>M06 · Modulinhalte</a:t>
+            </a:r>
+          </a:p>
+        </p:txBody>
+      </p:sp>
+      <p:sp>
+        <p:nvSpPr>
+          <p:cNvPr id="4" name="TextBox 3"/>
+          <p:cNvSpPr txBox="1"/>
+          <p:nvPr/>
+        </p:nvSpPr>
+        <p:spPr>
+          <a:xfrm>
+            <a:off x="365760" y="274320"/>
+            <a:ext cx="11430000" cy="777240"/>
+          </a:xfrm>
+          <a:prstGeom prst="rect">
+            <a:avLst/>
+          </a:prstGeom>
+          <a:noFill/>
+        </p:spPr>
+        <p:txBody>
+          <a:bodyPr wrap="square">
+            <a:spAutoFit/>
+          </a:bodyPr>
+          <a:lstStyle/>
+          <a:p>
+            <a:pPr algn="l"/>
+            <a:r>
+              <a:rPr sz="2200" b="1" i="0">
                 <a:solidFill>
                   <a:srgbClr val="003DA5"/>
                 </a:solidFill>
                 <a:latin typeface="Arial"/>
               </a:rPr>
-              <a:t>Finanzdaten (fiktiv, plausibel für Holzhandwerk)</a:t>
-            </a:r>
-          </a:p>
-        </p:txBody>
-      </p:sp>
-      <p:sp>
-        <p:nvSpPr>
-          <p:cNvPr id="4" name="Rectangle 3"/>
+              <a:t>Das Grundprinzip: Zahlen brauchen Kontext</a:t>
+            </a:r>
+          </a:p>
+        </p:txBody>
+      </p:sp>
+      <p:sp>
+        <p:nvSpPr>
+          <p:cNvPr id="5" name="Rectangle 4"/>
           <p:cNvSpPr/>
           <p:nvPr/>
         </p:nvSpPr>
         <p:spPr>
           <a:xfrm>
-            <a:off x="365760" y="1051560"/>
+            <a:off x="365760" y="1005840"/>
             <a:ext cx="11430000" cy="27432"/>
           </a:xfrm>
           <a:prstGeom prst="rect">
             <a:avLst/>
           </a:prstGeom>
           <a:solidFill>
-            <a:srgbClr val="E5E7EB"/>
+            <a:srgbClr val="D1D5DB"/>
           </a:solidFill>
           <a:ln>
             <a:noFill/>
@@ -4381,13 +4249,13 @@
       </p:sp>
       <p:sp>
         <p:nvSpPr>
-          <p:cNvPr id="5" name="TextBox 4"/>
+          <p:cNvPr id="6" name="TextBox 5"/>
           <p:cNvSpPr txBox="1"/>
           <p:nvPr/>
         </p:nvSpPr>
         <p:spPr>
           <a:xfrm>
-            <a:off x="365760" y="1234440"/>
+            <a:off x="365760" y="1143000"/>
             <a:ext cx="11430000" cy="5212080"/>
           </a:xfrm>
           <a:prstGeom prst="rect">
@@ -4403,7 +4271,7 @@
           <a:p>
             <a:pPr>
               <a:spcBef>
-                <a:spcPts val="400"/>
+                <a:spcPts val="500"/>
               </a:spcBef>
             </a:pPr>
             <a:r>
@@ -4422,42 +4290,57 @@
                 </a:solidFill>
                 <a:latin typeface="Arial"/>
               </a:rPr>
-              <a:t>*Branchenwerte Holzgewerbe / Tischlerhandwerk, Quelle: Deutsche Bundesbank, Unternehmensabschlussstatistik (Bundesbank,…</a:t>
-            </a:r>
-          </a:p>
-        </p:txBody>
-      </p:sp>
-      <p:sp>
-        <p:nvSpPr>
-          <p:cNvPr id="6" name="TextBox 5"/>
-          <p:cNvSpPr txBox="1"/>
-          <p:nvPr/>
-        </p:nvSpPr>
-        <p:spPr>
-          <a:xfrm>
-            <a:off x="11704320" y="6492240"/>
-            <a:ext cx="365760" cy="274320"/>
-          </a:xfrm>
-          <a:prstGeom prst="rect">
-            <a:avLst/>
-          </a:prstGeom>
-          <a:noFill/>
-        </p:spPr>
-        <p:txBody>
-          <a:bodyPr wrap="square">
-            <a:spAutoFit/>
-          </a:bodyPr>
-          <a:lstStyle/>
-          <a:p>
-            <a:pPr algn="r"/>
-            <a:r>
-              <a:rPr sz="1000" b="0">
-                <a:solidFill>
-                  <a:srgbClr val="6B7280"/>
-                </a:solidFill>
-                <a:latin typeface="Arial"/>
-              </a:rPr>
-              <a:t>11</a:t>
+              <a:t>Eine Eigenkapitalquote von 20 % sagt nichts, solange man nicht weiß, was in der jeweiligen Branche üblich ist. Der Handwerksbetrieb mit 20 % EK-Quote liegt…</a:t>
+            </a:r>
+          </a:p>
+          <a:p>
+            <a:pPr>
+              <a:spcBef>
+                <a:spcPts val="500"/>
+              </a:spcBef>
+            </a:pPr>
+            <a:r>
+              <a:rPr sz="1500">
+                <a:solidFill>
+                  <a:srgbClr val="003DA5"/>
+                </a:solidFill>
+                <a:latin typeface="Arial"/>
+              </a:rPr>
+              <a:t>▪  </a:t>
+            </a:r>
+            <a:r>
+              <a:rPr sz="1700">
+                <a:solidFill>
+                  <a:srgbClr val="1A1A1A"/>
+                </a:solidFill>
+                <a:latin typeface="Arial"/>
+              </a:rPr>
+              <a:t>Das wichtigste kostenfreie Instrument für Branchenvergleiche ist die Unternehmensabschlussstatistik der Deutschen Bundesbank (Bundesbank, laufend). Sie liefert…</a:t>
+            </a:r>
+          </a:p>
+          <a:p>
+            <a:pPr>
+              <a:spcBef>
+                <a:spcPts val="500"/>
+              </a:spcBef>
+            </a:pPr>
+            <a:r>
+              <a:rPr sz="1500">
+                <a:solidFill>
+                  <a:srgbClr val="003DA5"/>
+                </a:solidFill>
+                <a:latin typeface="Arial"/>
+              </a:rPr>
+              <a:t>▪  </a:t>
+            </a:r>
+            <a:r>
+              <a:rPr sz="1700">
+                <a:solidFill>
+                  <a:srgbClr val="1A1A1A"/>
+                </a:solidFill>
+                <a:latin typeface="Arial"/>
+              </a:rPr>
+              <a:t>Praxistipp: Die WZ-Klassifikation (Wirtschaftszweigklassifikation des Statistischen Bundesamts) ist das Navigationssystem. Ein Schreiner mit Möbelschwerpunkt…</a:t>
             </a:r>
           </a:p>
         </p:txBody>
@@ -4539,8 +4422,8 @@
         </p:nvSpPr>
         <p:spPr>
           <a:xfrm>
-            <a:off x="365760" y="274320"/>
-            <a:ext cx="11430000" cy="822960"/>
+            <a:off x="228600" y="182880"/>
+            <a:ext cx="11430000" cy="320040"/>
           </a:xfrm>
           <a:prstGeom prst="rect">
             <a:avLst/>
@@ -4555,33 +4438,68 @@
           <a:p>
             <a:pPr algn="l"/>
             <a:r>
-              <a:rPr sz="2200" b="1">
+              <a:rPr sz="900" b="0" i="0">
+                <a:solidFill>
+                  <a:srgbClr val="556575"/>
+                </a:solidFill>
+                <a:latin typeface="Arial"/>
+              </a:rPr>
+              <a:t>M06 · Modulinhalte</a:t>
+            </a:r>
+          </a:p>
+        </p:txBody>
+      </p:sp>
+      <p:sp>
+        <p:nvSpPr>
+          <p:cNvPr id="4" name="TextBox 3"/>
+          <p:cNvSpPr txBox="1"/>
+          <p:nvPr/>
+        </p:nvSpPr>
+        <p:spPr>
+          <a:xfrm>
+            <a:off x="365760" y="274320"/>
+            <a:ext cx="11430000" cy="777240"/>
+          </a:xfrm>
+          <a:prstGeom prst="rect">
+            <a:avLst/>
+          </a:prstGeom>
+          <a:noFill/>
+        </p:spPr>
+        <p:txBody>
+          <a:bodyPr wrap="square">
+            <a:spAutoFit/>
+          </a:bodyPr>
+          <a:lstStyle/>
+          <a:p>
+            <a:pPr algn="l"/>
+            <a:r>
+              <a:rPr sz="2200" b="1" i="0">
                 <a:solidFill>
                   <a:srgbClr val="003DA5"/>
                 </a:solidFill>
                 <a:latin typeface="Arial"/>
               </a:rPr>
-              <a:t>Aufgaben</a:t>
-            </a:r>
-          </a:p>
-        </p:txBody>
-      </p:sp>
-      <p:sp>
-        <p:nvSpPr>
-          <p:cNvPr id="4" name="Rectangle 3"/>
+              <a:t>Vier Branchenprofile für den Beratungsalltag</a:t>
+            </a:r>
+          </a:p>
+        </p:txBody>
+      </p:sp>
+      <p:sp>
+        <p:nvSpPr>
+          <p:cNvPr id="5" name="Rectangle 4"/>
           <p:cNvSpPr/>
           <p:nvPr/>
         </p:nvSpPr>
         <p:spPr>
           <a:xfrm>
-            <a:off x="365760" y="1051560"/>
+            <a:off x="365760" y="1005840"/>
             <a:ext cx="11430000" cy="27432"/>
           </a:xfrm>
           <a:prstGeom prst="rect">
             <a:avLst/>
           </a:prstGeom>
           <a:solidFill>
-            <a:srgbClr val="E5E7EB"/>
+            <a:srgbClr val="D1D5DB"/>
           </a:solidFill>
           <a:ln>
             <a:noFill/>
@@ -4611,13 +4529,13 @@
       </p:sp>
       <p:sp>
         <p:nvSpPr>
-          <p:cNvPr id="5" name="TextBox 4"/>
+          <p:cNvPr id="6" name="TextBox 5"/>
           <p:cNvSpPr txBox="1"/>
           <p:nvPr/>
         </p:nvSpPr>
         <p:spPr>
           <a:xfrm>
-            <a:off x="365760" y="1234440"/>
+            <a:off x="365760" y="1143000"/>
             <a:ext cx="11430000" cy="5212080"/>
           </a:xfrm>
           <a:prstGeom prst="rect">
@@ -4633,7 +4551,7 @@
           <a:p>
             <a:pPr>
               <a:spcBef>
-                <a:spcPts val="400"/>
+                <a:spcPts val="500"/>
               </a:spcBef>
             </a:pPr>
             <a:r>
@@ -4646,19 +4564,28 @@
               <a:t>▪  </a:t>
             </a:r>
             <a:r>
+              <a:rPr sz="1700" b="1">
+                <a:solidFill>
+                  <a:srgbClr val="003DA5"/>
+                </a:solidFill>
+                <a:latin typeface="Arial"/>
+              </a:rPr>
+              <a:t>Branchenprofil A – Handwerk (z.B. Schreiner, Maler, Sanitär, Bäcker): </a:t>
+            </a:r>
+            <a:r>
               <a:rPr sz="1700">
                 <a:solidFill>
                   <a:srgbClr val="1A1A1A"/>
                 </a:solidFill>
                 <a:latin typeface="Arial"/>
               </a:rPr>
-              <a:t>Aufgabe 1 – Klassifizierung (LZ-1): Prüfen Sie: Handelt es sich bei Bergmann Holzmanufaktur um ein KMU nach IfM-Bonn-…</a:t>
+              <a:t>Das Handwerk ist der typischste KMU-Sektor im süddeutschen VR-Kundenbestand. Charakteristisch:</a:t>
             </a:r>
           </a:p>
           <a:p>
             <a:pPr>
               <a:spcBef>
-                <a:spcPts val="400"/>
+                <a:spcPts val="500"/>
               </a:spcBef>
             </a:pPr>
             <a:r>
@@ -4671,19 +4598,28 @@
               <a:t>▪  </a:t>
             </a:r>
             <a:r>
+              <a:rPr sz="1700" b="1">
+                <a:solidFill>
+                  <a:srgbClr val="003DA5"/>
+                </a:solidFill>
+                <a:latin typeface="Arial"/>
+              </a:rPr>
+              <a:t>Eigenkapitalquote: </a:t>
+            </a:r>
+            <a:r>
               <a:rPr sz="1700">
                 <a:solidFill>
                   <a:srgbClr val="1A1A1A"/>
                 </a:solidFill>
                 <a:latin typeface="Arial"/>
               </a:rPr>
-              <a:t>Aufgabe 2 – Typologisierung und Risikofelder (LZ-2/LZ-3): Welchem der fünf Branchenprofile (A–E) entspricht Bergmann…</a:t>
+              <a:t>Ø 18–24 % (niedriger als Industrie, weil arbeitsintensiv und wenig Anlageintensität) -</a:t>
             </a:r>
           </a:p>
           <a:p>
             <a:pPr>
               <a:spcBef>
-                <a:spcPts val="400"/>
+                <a:spcPts val="500"/>
               </a:spcBef>
             </a:pPr>
             <a:r>
@@ -4696,19 +4632,28 @@
               <a:t>▪  </a:t>
             </a:r>
             <a:r>
+              <a:rPr sz="1700" b="1">
+                <a:solidFill>
+                  <a:srgbClr val="003DA5"/>
+                </a:solidFill>
+                <a:latin typeface="Arial"/>
+              </a:rPr>
+              <a:t>Finanzierungsbedarf: </a:t>
+            </a:r>
+            <a:r>
               <a:rPr sz="1700">
                 <a:solidFill>
                   <a:srgbClr val="1A1A1A"/>
                 </a:solidFill>
                 <a:latin typeface="Arial"/>
               </a:rPr>
-              <a:t>Aufgabe 3 – 5-Fragen-Schema anwenden (LZ-4): Formulieren Sie die 5 Einstiegsfragen für das Gespräch mit Sabine Bergmann…</a:t>
+              <a:t>Kontokorrentlinie für saisonale Spitzen und Materialvorfinanzierung, Investitionskredite für Fahrzeuge, Maschinen und Werkzeuge, gelegentlich Betriebsgebäude -</a:t>
             </a:r>
           </a:p>
           <a:p>
             <a:pPr>
               <a:spcBef>
-                <a:spcPts val="400"/>
+                <a:spcPts val="500"/>
               </a:spcBef>
             </a:pPr>
             <a:r>
@@ -4721,48 +4666,56 @@
               <a:t>▪  </a:t>
             </a:r>
             <a:r>
+              <a:rPr sz="1700" b="1">
+                <a:solidFill>
+                  <a:srgbClr val="003DA5"/>
+                </a:solidFill>
+                <a:latin typeface="Arial"/>
+              </a:rPr>
+              <a:t>Typische Risiken: </a:t>
+            </a:r>
+            <a:r>
               <a:rPr sz="1700">
                 <a:solidFill>
                   <a:srgbClr val="1A1A1A"/>
                 </a:solidFill>
                 <a:latin typeface="Arial"/>
               </a:rPr>
-              <a:t>Aufgabe 4 – Kreditvorbereitung: KK-Analyse (LZ-3): Die Kontokorrentlinie von Bergmann Holzmanufaktur ist aktuell zu 71…</a:t>
-            </a:r>
-          </a:p>
-        </p:txBody>
-      </p:sp>
-      <p:sp>
-        <p:nvSpPr>
-          <p:cNvPr id="6" name="TextBox 5"/>
-          <p:cNvSpPr txBox="1"/>
-          <p:nvPr/>
-        </p:nvSpPr>
-        <p:spPr>
-          <a:xfrm>
-            <a:off x="11704320" y="6492240"/>
-            <a:ext cx="365760" cy="274320"/>
-          </a:xfrm>
-          <a:prstGeom prst="rect">
-            <a:avLst/>
-          </a:prstGeom>
-          <a:noFill/>
-        </p:spPr>
-        <p:txBody>
-          <a:bodyPr wrap="square">
-            <a:spAutoFit/>
-          </a:bodyPr>
-          <a:lstStyle/>
-          <a:p>
-            <a:pPr algn="r"/>
-            <a:r>
-              <a:rPr sz="1000" b="0">
-                <a:solidFill>
-                  <a:srgbClr val="6B7280"/>
-                </a:solidFill>
-                <a:latin typeface="Arial"/>
-              </a:rPr>
-              <a:t>12</a:t>
+              <a:t>Fachkräftemangel, Materialkostenvolatilität (Holz, Stahl, Kupfer), Auftragsschwankungen durch Baukonjunktur -</a:t>
+            </a:r>
+          </a:p>
+          <a:p>
+            <a:pPr>
+              <a:spcBef>
+                <a:spcPts val="500"/>
+              </a:spcBef>
+            </a:pPr>
+            <a:r>
+              <a:rPr sz="1500">
+                <a:solidFill>
+                  <a:srgbClr val="003DA5"/>
+                </a:solidFill>
+                <a:latin typeface="Arial"/>
+              </a:rPr>
+              <a:t>▪  </a:t>
+            </a:r>
+            <a:r>
+              <a:rPr sz="1700" b="1">
+                <a:solidFill>
+                  <a:srgbClr val="003DA5"/>
+                </a:solidFill>
+                <a:latin typeface="Arial"/>
+              </a:rPr>
+              <a:t>Was frage ich als Berater: </a:t>
+            </a:r>
+            <a:r>
+              <a:rPr sz="1700">
+                <a:solidFill>
+                  <a:srgbClr val="1A1A1A"/>
+                </a:solidFill>
+                <a:latin typeface="Arial"/>
+              </a:rPr>
+              <a:t>"Wie gut sind Sie mit Aufträgen ausgelastet – haben Sie eine Warteliste?" / "Haben Sie genug qualifiziertes Personal, um Ihre Aufträge abzuarbeiten?"</a:t>
             </a:r>
           </a:p>
         </p:txBody>
@@ -4781,7 +4734,7 @@
     <p:bg>
       <p:bgPr>
         <a:solidFill>
-          <a:srgbClr val="1A1A1A"/>
+          <a:srgbClr val="FFFFFF"/>
         </a:solidFill>
         <a:effectLst/>
       </p:bgPr>
@@ -4808,7 +4761,7 @@
             <a:avLst/>
           </a:prstGeom>
           <a:solidFill>
-            <a:srgbClr val="E05B00"/>
+            <a:srgbClr val="003DA5"/>
           </a:solidFill>
           <a:ln>
             <a:noFill/>
@@ -4844,8 +4797,8 @@
         </p:nvSpPr>
         <p:spPr>
           <a:xfrm>
-            <a:off x="365760" y="2286000"/>
-            <a:ext cx="11430000" cy="1828800"/>
+            <a:off x="228600" y="182880"/>
+            <a:ext cx="11430000" cy="320040"/>
           </a:xfrm>
           <a:prstGeom prst="rect">
             <a:avLst/>
@@ -4860,13 +4813,284 @@
           <a:p>
             <a:pPr algn="l"/>
             <a:r>
-              <a:rPr sz="3600" b="1">
-                <a:solidFill>
-                  <a:srgbClr val="FFFFFF"/>
-                </a:solidFill>
-                <a:latin typeface="Arial"/>
-              </a:rPr>
-              <a:t>4.5 Reflexionsfragen</a:t>
+              <a:rPr sz="900" b="0" i="0">
+                <a:solidFill>
+                  <a:srgbClr val="556575"/>
+                </a:solidFill>
+                <a:latin typeface="Arial"/>
+              </a:rPr>
+              <a:t>M06 · Modulinhalte</a:t>
+            </a:r>
+          </a:p>
+        </p:txBody>
+      </p:sp>
+      <p:sp>
+        <p:nvSpPr>
+          <p:cNvPr id="4" name="TextBox 3"/>
+          <p:cNvSpPr txBox="1"/>
+          <p:nvPr/>
+        </p:nvSpPr>
+        <p:spPr>
+          <a:xfrm>
+            <a:off x="365760" y="274320"/>
+            <a:ext cx="11430000" cy="777240"/>
+          </a:xfrm>
+          <a:prstGeom prst="rect">
+            <a:avLst/>
+          </a:prstGeom>
+          <a:noFill/>
+        </p:spPr>
+        <p:txBody>
+          <a:bodyPr wrap="square">
+            <a:spAutoFit/>
+          </a:bodyPr>
+          <a:lstStyle/>
+          <a:p>
+            <a:pPr algn="l"/>
+            <a:r>
+              <a:rPr sz="2200" b="1" i="0">
+                <a:solidFill>
+                  <a:srgbClr val="003DA5"/>
+                </a:solidFill>
+                <a:latin typeface="Arial"/>
+              </a:rPr>
+              <a:t>Vier Branchenprofile für den Beratungsalltag</a:t>
+            </a:r>
+          </a:p>
+        </p:txBody>
+      </p:sp>
+      <p:sp>
+        <p:nvSpPr>
+          <p:cNvPr id="5" name="Rectangle 4"/>
+          <p:cNvSpPr/>
+          <p:nvPr/>
+        </p:nvSpPr>
+        <p:spPr>
+          <a:xfrm>
+            <a:off x="365760" y="1005840"/>
+            <a:ext cx="11430000" cy="27432"/>
+          </a:xfrm>
+          <a:prstGeom prst="rect">
+            <a:avLst/>
+          </a:prstGeom>
+          <a:solidFill>
+            <a:srgbClr val="D1D5DB"/>
+          </a:solidFill>
+          <a:ln>
+            <a:noFill/>
+          </a:ln>
+        </p:spPr>
+        <p:style>
+          <a:lnRef idx="1">
+            <a:schemeClr val="accent1"/>
+          </a:lnRef>
+          <a:fillRef idx="3">
+            <a:schemeClr val="accent1"/>
+          </a:fillRef>
+          <a:effectRef idx="2">
+            <a:schemeClr val="accent1"/>
+          </a:effectRef>
+          <a:fontRef idx="minor">
+            <a:schemeClr val="lt1"/>
+          </a:fontRef>
+        </p:style>
+        <p:txBody>
+          <a:bodyPr rtlCol="0" anchor="ctr"/>
+          <a:lstStyle/>
+          <a:p>
+            <a:pPr algn="ctr"/>
+          </a:p>
+        </p:txBody>
+      </p:sp>
+      <p:sp>
+        <p:nvSpPr>
+          <p:cNvPr id="6" name="TextBox 5"/>
+          <p:cNvSpPr txBox="1"/>
+          <p:nvPr/>
+        </p:nvSpPr>
+        <p:spPr>
+          <a:xfrm>
+            <a:off x="365760" y="1143000"/>
+            <a:ext cx="11430000" cy="5212080"/>
+          </a:xfrm>
+          <a:prstGeom prst="rect">
+            <a:avLst/>
+          </a:prstGeom>
+          <a:noFill/>
+        </p:spPr>
+        <p:txBody>
+          <a:bodyPr wrap="square">
+            <a:spAutoFit/>
+          </a:bodyPr>
+          <a:lstStyle/>
+          <a:p>
+            <a:pPr>
+              <a:spcBef>
+                <a:spcPts val="500"/>
+              </a:spcBef>
+            </a:pPr>
+            <a:r>
+              <a:rPr sz="1500">
+                <a:solidFill>
+                  <a:srgbClr val="003DA5"/>
+                </a:solidFill>
+                <a:latin typeface="Arial"/>
+              </a:rPr>
+              <a:t>▪  </a:t>
+            </a:r>
+            <a:r>
+              <a:rPr sz="1700" b="1">
+                <a:solidFill>
+                  <a:srgbClr val="003DA5"/>
+                </a:solidFill>
+                <a:latin typeface="Arial"/>
+              </a:rPr>
+              <a:t>Eigenkapitalquote: </a:t>
+            </a:r>
+            <a:r>
+              <a:rPr sz="1700">
+                <a:solidFill>
+                  <a:srgbClr val="1A1A1A"/>
+                </a:solidFill>
+                <a:latin typeface="Arial"/>
+              </a:rPr>
+              <a:t>Ø 28–35 % (höher, weil hoher Anlagevermögensanteil) -</a:t>
+            </a:r>
+          </a:p>
+          <a:p>
+            <a:pPr>
+              <a:spcBef>
+                <a:spcPts val="500"/>
+              </a:spcBef>
+            </a:pPr>
+            <a:r>
+              <a:rPr sz="1500">
+                <a:solidFill>
+                  <a:srgbClr val="003DA5"/>
+                </a:solidFill>
+                <a:latin typeface="Arial"/>
+              </a:rPr>
+              <a:t>▪  </a:t>
+            </a:r>
+            <a:r>
+              <a:rPr sz="1700" b="1">
+                <a:solidFill>
+                  <a:srgbClr val="003DA5"/>
+                </a:solidFill>
+                <a:latin typeface="Arial"/>
+              </a:rPr>
+              <a:t>Finanzierungsbedarf: </a:t>
+            </a:r>
+            <a:r>
+              <a:rPr sz="1700">
+                <a:solidFill>
+                  <a:srgbClr val="1A1A1A"/>
+                </a:solidFill>
+                <a:latin typeface="Arial"/>
+              </a:rPr>
+              <a:t>Investitionskredite für Maschinen und Anlagen (oft langfristig, 7–15 Jahre), Exportfinanzierung, Anzahlungsfinanzierung bei Großaufträgen, Betriebsmittelkredite -</a:t>
+            </a:r>
+          </a:p>
+          <a:p>
+            <a:pPr>
+              <a:spcBef>
+                <a:spcPts val="500"/>
+              </a:spcBef>
+            </a:pPr>
+            <a:r>
+              <a:rPr sz="1500">
+                <a:solidFill>
+                  <a:srgbClr val="003DA5"/>
+                </a:solidFill>
+                <a:latin typeface="Arial"/>
+              </a:rPr>
+              <a:t>▪  </a:t>
+            </a:r>
+            <a:r>
+              <a:rPr sz="1700" b="1">
+                <a:solidFill>
+                  <a:srgbClr val="003DA5"/>
+                </a:solidFill>
+                <a:latin typeface="Arial"/>
+              </a:rPr>
+              <a:t>Typische Risiken: </a:t>
+            </a:r>
+            <a:r>
+              <a:rPr sz="1700">
+                <a:solidFill>
+                  <a:srgbClr val="1A1A1A"/>
+                </a:solidFill>
+                <a:latin typeface="Arial"/>
+              </a:rPr>
+              <a:t>Exportabhängigkeit (Wechselkurs, geopolitische Risiken), Energiekostenentwicklung, Lieferkettenstörungen -</a:t>
+            </a:r>
+          </a:p>
+          <a:p>
+            <a:pPr>
+              <a:spcBef>
+                <a:spcPts val="500"/>
+              </a:spcBef>
+            </a:pPr>
+            <a:r>
+              <a:rPr sz="1500">
+                <a:solidFill>
+                  <a:srgbClr val="003DA5"/>
+                </a:solidFill>
+                <a:latin typeface="Arial"/>
+              </a:rPr>
+              <a:t>▪  </a:t>
+            </a:r>
+            <a:r>
+              <a:rPr sz="1700" b="1">
+                <a:solidFill>
+                  <a:srgbClr val="003DA5"/>
+                </a:solidFill>
+                <a:latin typeface="Arial"/>
+              </a:rPr>
+              <a:t>Was frage ich als Berater: </a:t>
+            </a:r>
+            <a:r>
+              <a:rPr sz="1700">
+                <a:solidFill>
+                  <a:srgbClr val="1A1A1A"/>
+                </a:solidFill>
+                <a:latin typeface="Arial"/>
+              </a:rPr>
+              <a:t>"Welchen Anteil macht Ihr Exportgeschäft aus?" / "Haben Sie Festpreisverträge über mehr als 12 Monate – und wie gehen Sie mit dem Kostensteigerungsrisiko um?"</a:t>
+            </a:r>
+          </a:p>
+          <a:p>
+            <a:pPr>
+              <a:spcBef>
+                <a:spcPts val="500"/>
+              </a:spcBef>
+            </a:pPr>
+            <a:r>
+              <a:rPr sz="1500">
+                <a:solidFill>
+                  <a:srgbClr val="003DA5"/>
+                </a:solidFill>
+                <a:latin typeface="Arial"/>
+              </a:rPr>
+              <a:t>▪  </a:t>
+            </a:r>
+            <a:r>
+              <a:rPr sz="1700" b="1">
+                <a:solidFill>
+                  <a:srgbClr val="003DA5"/>
+                </a:solidFill>
+                <a:latin typeface="Arial"/>
+              </a:rPr>
+              <a:t>Eigenkapitalquote: </a:t>
+            </a:r>
+            <a:r>
+              <a:rPr sz="1700">
+                <a:solidFill>
+                  <a:srgbClr val="1A1A1A"/>
+                </a:solidFill>
+                <a:latin typeface="Arial"/>
+              </a:rPr>
+              <a:t>Ø 15–22 % (niedrig, weil Lagerbindung und Working Capital dominant) -</a:t>
             </a:r>
           </a:p>
         </p:txBody>
@@ -4885,7 +5109,7 @@
     <p:bg>
       <p:bgPr>
         <a:solidFill>
-          <a:srgbClr val="1A1A1A"/>
+          <a:srgbClr val="FFFFFF"/>
         </a:solidFill>
         <a:effectLst/>
       </p:bgPr>
@@ -4912,7 +5136,7 @@
             <a:avLst/>
           </a:prstGeom>
           <a:solidFill>
-            <a:srgbClr val="E05B00"/>
+            <a:srgbClr val="003DA5"/>
           </a:solidFill>
           <a:ln>
             <a:noFill/>
@@ -4948,8 +5172,8 @@
         </p:nvSpPr>
         <p:spPr>
           <a:xfrm>
-            <a:off x="365760" y="2286000"/>
-            <a:ext cx="11430000" cy="1828800"/>
+            <a:off x="228600" y="182880"/>
+            <a:ext cx="11430000" cy="320040"/>
           </a:xfrm>
           <a:prstGeom prst="rect">
             <a:avLst/>
@@ -4964,13 +5188,284 @@
           <a:p>
             <a:pPr algn="l"/>
             <a:r>
-              <a:rPr sz="3600" b="1">
-                <a:solidFill>
-                  <a:srgbClr val="FFFFFF"/>
-                </a:solidFill>
-                <a:latin typeface="Arial"/>
-              </a:rPr>
-              <a:t>5.1 Transferaufgabe (4 Wochen)</a:t>
+              <a:rPr sz="900" b="0" i="0">
+                <a:solidFill>
+                  <a:srgbClr val="556575"/>
+                </a:solidFill>
+                <a:latin typeface="Arial"/>
+              </a:rPr>
+              <a:t>M06 · Modulinhalte</a:t>
+            </a:r>
+          </a:p>
+        </p:txBody>
+      </p:sp>
+      <p:sp>
+        <p:nvSpPr>
+          <p:cNvPr id="4" name="TextBox 3"/>
+          <p:cNvSpPr txBox="1"/>
+          <p:nvPr/>
+        </p:nvSpPr>
+        <p:spPr>
+          <a:xfrm>
+            <a:off x="365760" y="274320"/>
+            <a:ext cx="11430000" cy="777240"/>
+          </a:xfrm>
+          <a:prstGeom prst="rect">
+            <a:avLst/>
+          </a:prstGeom>
+          <a:noFill/>
+        </p:spPr>
+        <p:txBody>
+          <a:bodyPr wrap="square">
+            <a:spAutoFit/>
+          </a:bodyPr>
+          <a:lstStyle/>
+          <a:p>
+            <a:pPr algn="l"/>
+            <a:r>
+              <a:rPr sz="2200" b="1" i="0">
+                <a:solidFill>
+                  <a:srgbClr val="003DA5"/>
+                </a:solidFill>
+                <a:latin typeface="Arial"/>
+              </a:rPr>
+              <a:t>Vier Branchenprofile für den Beratungsalltag</a:t>
+            </a:r>
+          </a:p>
+        </p:txBody>
+      </p:sp>
+      <p:sp>
+        <p:nvSpPr>
+          <p:cNvPr id="5" name="Rectangle 4"/>
+          <p:cNvSpPr/>
+          <p:nvPr/>
+        </p:nvSpPr>
+        <p:spPr>
+          <a:xfrm>
+            <a:off x="365760" y="1005840"/>
+            <a:ext cx="11430000" cy="27432"/>
+          </a:xfrm>
+          <a:prstGeom prst="rect">
+            <a:avLst/>
+          </a:prstGeom>
+          <a:solidFill>
+            <a:srgbClr val="D1D5DB"/>
+          </a:solidFill>
+          <a:ln>
+            <a:noFill/>
+          </a:ln>
+        </p:spPr>
+        <p:style>
+          <a:lnRef idx="1">
+            <a:schemeClr val="accent1"/>
+          </a:lnRef>
+          <a:fillRef idx="3">
+            <a:schemeClr val="accent1"/>
+          </a:fillRef>
+          <a:effectRef idx="2">
+            <a:schemeClr val="accent1"/>
+          </a:effectRef>
+          <a:fontRef idx="minor">
+            <a:schemeClr val="lt1"/>
+          </a:fontRef>
+        </p:style>
+        <p:txBody>
+          <a:bodyPr rtlCol="0" anchor="ctr"/>
+          <a:lstStyle/>
+          <a:p>
+            <a:pPr algn="ctr"/>
+          </a:p>
+        </p:txBody>
+      </p:sp>
+      <p:sp>
+        <p:nvSpPr>
+          <p:cNvPr id="6" name="TextBox 5"/>
+          <p:cNvSpPr txBox="1"/>
+          <p:nvPr/>
+        </p:nvSpPr>
+        <p:spPr>
+          <a:xfrm>
+            <a:off x="365760" y="1143000"/>
+            <a:ext cx="11430000" cy="5212080"/>
+          </a:xfrm>
+          <a:prstGeom prst="rect">
+            <a:avLst/>
+          </a:prstGeom>
+          <a:noFill/>
+        </p:spPr>
+        <p:txBody>
+          <a:bodyPr wrap="square">
+            <a:spAutoFit/>
+          </a:bodyPr>
+          <a:lstStyle/>
+          <a:p>
+            <a:pPr>
+              <a:spcBef>
+                <a:spcPts val="500"/>
+              </a:spcBef>
+            </a:pPr>
+            <a:r>
+              <a:rPr sz="1500">
+                <a:solidFill>
+                  <a:srgbClr val="003DA5"/>
+                </a:solidFill>
+                <a:latin typeface="Arial"/>
+              </a:rPr>
+              <a:t>▪  </a:t>
+            </a:r>
+            <a:r>
+              <a:rPr sz="1700" b="1">
+                <a:solidFill>
+                  <a:srgbClr val="003DA5"/>
+                </a:solidFill>
+                <a:latin typeface="Arial"/>
+              </a:rPr>
+              <a:t>Finanzierungsbedarf: </a:t>
+            </a:r>
+            <a:r>
+              <a:rPr sz="1700">
+                <a:solidFill>
+                  <a:srgbClr val="1A1A1A"/>
+                </a:solidFill>
+                <a:latin typeface="Arial"/>
+              </a:rPr>
+              <a:t>Betriebsmittelkredit und Kontokorrentlinie für saisonale Spitzen (Weihnachten, Sommer), Investitionen in Ladenausstattung oder Lagerlogistik, Factoring -</a:t>
+            </a:r>
+          </a:p>
+          <a:p>
+            <a:pPr>
+              <a:spcBef>
+                <a:spcPts val="500"/>
+              </a:spcBef>
+            </a:pPr>
+            <a:r>
+              <a:rPr sz="1500">
+                <a:solidFill>
+                  <a:srgbClr val="003DA5"/>
+                </a:solidFill>
+                <a:latin typeface="Arial"/>
+              </a:rPr>
+              <a:t>▪  </a:t>
+            </a:r>
+            <a:r>
+              <a:rPr sz="1700" b="1">
+                <a:solidFill>
+                  <a:srgbClr val="003DA5"/>
+                </a:solidFill>
+                <a:latin typeface="Arial"/>
+              </a:rPr>
+              <a:t>Typische Risiken: </a:t>
+            </a:r>
+            <a:r>
+              <a:rPr sz="1700">
+                <a:solidFill>
+                  <a:srgbClr val="1A1A1A"/>
+                </a:solidFill>
+                <a:latin typeface="Arial"/>
+              </a:rPr>
+              <a:t>Strukturwandel durch E-Commerce, Mietpreisbelastung (innerstädtischer Fachhandel), Konsumstimmung und Kaufkraftentwicklung -</a:t>
+            </a:r>
+          </a:p>
+          <a:p>
+            <a:pPr>
+              <a:spcBef>
+                <a:spcPts val="500"/>
+              </a:spcBef>
+            </a:pPr>
+            <a:r>
+              <a:rPr sz="1500">
+                <a:solidFill>
+                  <a:srgbClr val="003DA5"/>
+                </a:solidFill>
+                <a:latin typeface="Arial"/>
+              </a:rPr>
+              <a:t>▪  </a:t>
+            </a:r>
+            <a:r>
+              <a:rPr sz="1700" b="1">
+                <a:solidFill>
+                  <a:srgbClr val="003DA5"/>
+                </a:solidFill>
+                <a:latin typeface="Arial"/>
+              </a:rPr>
+              <a:t>Was frage ich als Berater: </a:t>
+            </a:r>
+            <a:r>
+              <a:rPr sz="1700">
+                <a:solidFill>
+                  <a:srgbClr val="1A1A1A"/>
+                </a:solidFill>
+                <a:latin typeface="Arial"/>
+              </a:rPr>
+              <a:t>"Haben Sie bereits einen Online-Kanal – und wie entwickelt er sich?" / "Welche Produktkategorien wachsen bei Ihnen noch, welche schrumpfen?"</a:t>
+            </a:r>
+          </a:p>
+          <a:p>
+            <a:pPr>
+              <a:spcBef>
+                <a:spcPts val="500"/>
+              </a:spcBef>
+            </a:pPr>
+            <a:r>
+              <a:rPr sz="1500">
+                <a:solidFill>
+                  <a:srgbClr val="003DA5"/>
+                </a:solidFill>
+                <a:latin typeface="Arial"/>
+              </a:rPr>
+              <a:t>▪  </a:t>
+            </a:r>
+            <a:r>
+              <a:rPr sz="1700" b="1">
+                <a:solidFill>
+                  <a:srgbClr val="003DA5"/>
+                </a:solidFill>
+                <a:latin typeface="Arial"/>
+              </a:rPr>
+              <a:t>Eigenkapitalquote: </a:t>
+            </a:r>
+            <a:r>
+              <a:rPr sz="1700">
+                <a:solidFill>
+                  <a:srgbClr val="1A1A1A"/>
+                </a:solidFill>
+                <a:latin typeface="Arial"/>
+              </a:rPr>
+              <a:t>Ø 30–45 % (hoch, weil wenig Anlagevermögen und meist solide Ertragslage) -</a:t>
+            </a:r>
+          </a:p>
+          <a:p>
+            <a:pPr>
+              <a:spcBef>
+                <a:spcPts val="500"/>
+              </a:spcBef>
+            </a:pPr>
+            <a:r>
+              <a:rPr sz="1500">
+                <a:solidFill>
+                  <a:srgbClr val="003DA5"/>
+                </a:solidFill>
+                <a:latin typeface="Arial"/>
+              </a:rPr>
+              <a:t>▪  </a:t>
+            </a:r>
+            <a:r>
+              <a:rPr sz="1700" b="1">
+                <a:solidFill>
+                  <a:srgbClr val="003DA5"/>
+                </a:solidFill>
+                <a:latin typeface="Arial"/>
+              </a:rPr>
+              <a:t>Finanzierungsbedarf: </a:t>
+            </a:r>
+            <a:r>
+              <a:rPr sz="1700">
+                <a:solidFill>
+                  <a:srgbClr val="1A1A1A"/>
+                </a:solidFill>
+                <a:latin typeface="Arial"/>
+              </a:rPr>
+              <a:t>Praxisgründungs- oder -übernahmefinanzierung (oft 300 TEUR–1,5 Mio. EUR), Modernisierungsinvestitionen (med. Geräte, digitale Infrastruktur), Nachfolgefinanzierung für…</a:t>
             </a:r>
           </a:p>
         </p:txBody>
@@ -4989,7 +5484,7 @@
     <p:bg>
       <p:bgPr>
         <a:solidFill>
-          <a:srgbClr val="1A1A1A"/>
+          <a:srgbClr val="FFFFFF"/>
         </a:solidFill>
         <a:effectLst/>
       </p:bgPr>
@@ -5016,7 +5511,7 @@
             <a:avLst/>
           </a:prstGeom>
           <a:solidFill>
-            <a:srgbClr val="E05B00"/>
+            <a:srgbClr val="003DA5"/>
           </a:solidFill>
           <a:ln>
             <a:noFill/>
@@ -5052,8 +5547,8 @@
         </p:nvSpPr>
         <p:spPr>
           <a:xfrm>
-            <a:off x="365760" y="2286000"/>
-            <a:ext cx="11430000" cy="1828800"/>
+            <a:off x="228600" y="182880"/>
+            <a:ext cx="11430000" cy="320040"/>
           </a:xfrm>
           <a:prstGeom prst="rect">
             <a:avLst/>
@@ -5068,13 +5563,284 @@
           <a:p>
             <a:pPr algn="l"/>
             <a:r>
-              <a:rPr sz="3600" b="1">
-                <a:solidFill>
-                  <a:srgbClr val="FFFFFF"/>
-                </a:solidFill>
-                <a:latin typeface="Arial"/>
-              </a:rPr>
-              <a:t>5.2 Selbstcheck nach 4 Wochen</a:t>
+              <a:rPr sz="900" b="0" i="0">
+                <a:solidFill>
+                  <a:srgbClr val="556575"/>
+                </a:solidFill>
+                <a:latin typeface="Arial"/>
+              </a:rPr>
+              <a:t>M06 · Modulinhalte</a:t>
+            </a:r>
+          </a:p>
+        </p:txBody>
+      </p:sp>
+      <p:sp>
+        <p:nvSpPr>
+          <p:cNvPr id="4" name="TextBox 3"/>
+          <p:cNvSpPr txBox="1"/>
+          <p:nvPr/>
+        </p:nvSpPr>
+        <p:spPr>
+          <a:xfrm>
+            <a:off x="365760" y="274320"/>
+            <a:ext cx="11430000" cy="777240"/>
+          </a:xfrm>
+          <a:prstGeom prst="rect">
+            <a:avLst/>
+          </a:prstGeom>
+          <a:noFill/>
+        </p:spPr>
+        <p:txBody>
+          <a:bodyPr wrap="square">
+            <a:spAutoFit/>
+          </a:bodyPr>
+          <a:lstStyle/>
+          <a:p>
+            <a:pPr algn="l"/>
+            <a:r>
+              <a:rPr sz="2200" b="1" i="0">
+                <a:solidFill>
+                  <a:srgbClr val="003DA5"/>
+                </a:solidFill>
+                <a:latin typeface="Arial"/>
+              </a:rPr>
+              <a:t>Vier Branchenprofile für den Beratungsalltag</a:t>
+            </a:r>
+          </a:p>
+        </p:txBody>
+      </p:sp>
+      <p:sp>
+        <p:nvSpPr>
+          <p:cNvPr id="5" name="Rectangle 4"/>
+          <p:cNvSpPr/>
+          <p:nvPr/>
+        </p:nvSpPr>
+        <p:spPr>
+          <a:xfrm>
+            <a:off x="365760" y="1005840"/>
+            <a:ext cx="11430000" cy="27432"/>
+          </a:xfrm>
+          <a:prstGeom prst="rect">
+            <a:avLst/>
+          </a:prstGeom>
+          <a:solidFill>
+            <a:srgbClr val="D1D5DB"/>
+          </a:solidFill>
+          <a:ln>
+            <a:noFill/>
+          </a:ln>
+        </p:spPr>
+        <p:style>
+          <a:lnRef idx="1">
+            <a:schemeClr val="accent1"/>
+          </a:lnRef>
+          <a:fillRef idx="3">
+            <a:schemeClr val="accent1"/>
+          </a:fillRef>
+          <a:effectRef idx="2">
+            <a:schemeClr val="accent1"/>
+          </a:effectRef>
+          <a:fontRef idx="minor">
+            <a:schemeClr val="lt1"/>
+          </a:fontRef>
+        </p:style>
+        <p:txBody>
+          <a:bodyPr rtlCol="0" anchor="ctr"/>
+          <a:lstStyle/>
+          <a:p>
+            <a:pPr algn="ctr"/>
+          </a:p>
+        </p:txBody>
+      </p:sp>
+      <p:sp>
+        <p:nvSpPr>
+          <p:cNvPr id="6" name="TextBox 5"/>
+          <p:cNvSpPr txBox="1"/>
+          <p:nvPr/>
+        </p:nvSpPr>
+        <p:spPr>
+          <a:xfrm>
+            <a:off x="365760" y="1143000"/>
+            <a:ext cx="11430000" cy="5212080"/>
+          </a:xfrm>
+          <a:prstGeom prst="rect">
+            <a:avLst/>
+          </a:prstGeom>
+          <a:noFill/>
+        </p:spPr>
+        <p:txBody>
+          <a:bodyPr wrap="square">
+            <a:spAutoFit/>
+          </a:bodyPr>
+          <a:lstStyle/>
+          <a:p>
+            <a:pPr>
+              <a:spcBef>
+                <a:spcPts val="500"/>
+              </a:spcBef>
+            </a:pPr>
+            <a:r>
+              <a:rPr sz="1500">
+                <a:solidFill>
+                  <a:srgbClr val="003DA5"/>
+                </a:solidFill>
+                <a:latin typeface="Arial"/>
+              </a:rPr>
+              <a:t>▪  </a:t>
+            </a:r>
+            <a:r>
+              <a:rPr sz="1700" b="1">
+                <a:solidFill>
+                  <a:srgbClr val="003DA5"/>
+                </a:solidFill>
+                <a:latin typeface="Arial"/>
+              </a:rPr>
+              <a:t>Typische Risiken: </a:t>
+            </a:r>
+            <a:r>
+              <a:rPr sz="1700">
+                <a:solidFill>
+                  <a:srgbClr val="1A1A1A"/>
+                </a:solidFill>
+                <a:latin typeface="Arial"/>
+              </a:rPr>
+              <a:t>Zulassungsrechtliche Abhängigkeit (Kassenzulassung, Zulassungsausschuss), Schlüsselperson ist der Inhaber selbst (kein Vertretungskonzept), Nachfolge aufwendig und oft…</a:t>
+            </a:r>
+          </a:p>
+          <a:p>
+            <a:pPr>
+              <a:spcBef>
+                <a:spcPts val="500"/>
+              </a:spcBef>
+            </a:pPr>
+            <a:r>
+              <a:rPr sz="1500">
+                <a:solidFill>
+                  <a:srgbClr val="003DA5"/>
+                </a:solidFill>
+                <a:latin typeface="Arial"/>
+              </a:rPr>
+              <a:t>▪  </a:t>
+            </a:r>
+            <a:r>
+              <a:rPr sz="1700" b="1">
+                <a:solidFill>
+                  <a:srgbClr val="003DA5"/>
+                </a:solidFill>
+                <a:latin typeface="Arial"/>
+              </a:rPr>
+              <a:t>Was frage ich als Berater: </a:t>
+            </a:r>
+            <a:r>
+              <a:rPr sz="1700">
+                <a:solidFill>
+                  <a:srgbClr val="1A1A1A"/>
+                </a:solidFill>
+                <a:latin typeface="Arial"/>
+              </a:rPr>
+              <a:t>"Haben Sie eine Nachfolgeregelung – und wann wäre Ihr idealer Übergabezeitpunkt?" / "Wie ist Ihre Praxis gegen einen längeren Ausfall Ihrer Person abgesichert?"</a:t>
+            </a:r>
+          </a:p>
+          <a:p>
+            <a:pPr>
+              <a:spcBef>
+                <a:spcPts val="500"/>
+              </a:spcBef>
+            </a:pPr>
+            <a:r>
+              <a:rPr sz="1500">
+                <a:solidFill>
+                  <a:srgbClr val="003DA5"/>
+                </a:solidFill>
+                <a:latin typeface="Arial"/>
+              </a:rPr>
+              <a:t>▪  </a:t>
+            </a:r>
+            <a:r>
+              <a:rPr sz="1700" b="1">
+                <a:solidFill>
+                  <a:srgbClr val="003DA5"/>
+                </a:solidFill>
+                <a:latin typeface="Arial"/>
+              </a:rPr>
+              <a:t>Hinweis: </a:t>
+            </a:r>
+            <a:r>
+              <a:rPr sz="1700">
+                <a:solidFill>
+                  <a:srgbClr val="1A1A1A"/>
+                </a:solidFill>
+                <a:latin typeface="Arial"/>
+              </a:rPr>
+              <a:t>Profil E ist ein bewusstes</a:t>
+            </a:r>
+          </a:p>
+          <a:p>
+            <a:pPr>
+              <a:spcBef>
+                <a:spcPts val="500"/>
+              </a:spcBef>
+            </a:pPr>
+            <a:r>
+              <a:rPr sz="1500">
+                <a:solidFill>
+                  <a:srgbClr val="003DA5"/>
+                </a:solidFill>
+                <a:latin typeface="Arial"/>
+              </a:rPr>
+              <a:t>▪  </a:t>
+            </a:r>
+            <a:r>
+              <a:rPr sz="1700" b="1">
+                <a:solidFill>
+                  <a:srgbClr val="003DA5"/>
+                </a:solidFill>
+                <a:latin typeface="Arial"/>
+              </a:rPr>
+              <a:t>Auffangprofil: </a:t>
+            </a:r>
+            <a:r>
+              <a:rPr sz="1700">
+                <a:solidFill>
+                  <a:srgbClr val="1A1A1A"/>
+                </a:solidFill>
+                <a:latin typeface="Arial"/>
+              </a:rPr>
+              <a:t>für den ersten Überblick. IT-Dienstleister und Gebäudereiniger haben fundamental unterschiedliche Eigenkapitalstrukturen, Finanzierungsbedarfe und Risikoprofile. Für…</a:t>
+            </a:r>
+          </a:p>
+          <a:p>
+            <a:pPr>
+              <a:spcBef>
+                <a:spcPts val="500"/>
+              </a:spcBef>
+            </a:pPr>
+            <a:r>
+              <a:rPr sz="1500">
+                <a:solidFill>
+                  <a:srgbClr val="003DA5"/>
+                </a:solidFill>
+                <a:latin typeface="Arial"/>
+              </a:rPr>
+              <a:t>▪  </a:t>
+            </a:r>
+            <a:r>
+              <a:rPr sz="1700" b="1">
+                <a:solidFill>
+                  <a:srgbClr val="003DA5"/>
+                </a:solidFill>
+                <a:latin typeface="Arial"/>
+              </a:rPr>
+              <a:t>Eigenkapitalquote: </a:t>
+            </a:r>
+            <a:r>
+              <a:rPr sz="1700">
+                <a:solidFill>
+                  <a:srgbClr val="1A1A1A"/>
+                </a:solidFill>
+                <a:latin typeface="Arial"/>
+              </a:rPr>
+              <a:t>Ø 20–35 % (breite Spanne je nach Kapitalintensität; IT-Betriebe oft höher, Logistik oft niedriger wegen Fahrzeugfinanzierung) -</a:t>
             </a:r>
           </a:p>
         </p:txBody>
@@ -5093,7 +5859,7 @@
     <p:bg>
       <p:bgPr>
         <a:solidFill>
-          <a:srgbClr val="1A1A1A"/>
+          <a:srgbClr val="FFFFFF"/>
         </a:solidFill>
         <a:effectLst/>
       </p:bgPr>
@@ -5120,7 +5886,7 @@
             <a:avLst/>
           </a:prstGeom>
           <a:solidFill>
-            <a:srgbClr val="E05B00"/>
+            <a:srgbClr val="003DA5"/>
           </a:solidFill>
           <a:ln>
             <a:noFill/>
@@ -5156,8 +5922,8 @@
         </p:nvSpPr>
         <p:spPr>
           <a:xfrm>
-            <a:off x="365760" y="2286000"/>
-            <a:ext cx="11430000" cy="1828800"/>
+            <a:off x="228600" y="182880"/>
+            <a:ext cx="11430000" cy="320040"/>
           </a:xfrm>
           <a:prstGeom prst="rect">
             <a:avLst/>
@@ -5172,13 +5938,216 @@
           <a:p>
             <a:pPr algn="l"/>
             <a:r>
-              <a:rPr sz="3600" b="1">
-                <a:solidFill>
-                  <a:srgbClr val="FFFFFF"/>
-                </a:solidFill>
-                <a:latin typeface="Arial"/>
-              </a:rPr>
-              <a:t>Didaktik &amp; Kompetenzentwicklung</a:t>
+              <a:rPr sz="900" b="0" i="0">
+                <a:solidFill>
+                  <a:srgbClr val="556575"/>
+                </a:solidFill>
+                <a:latin typeface="Arial"/>
+              </a:rPr>
+              <a:t>M06 · Modulinhalte</a:t>
+            </a:r>
+          </a:p>
+        </p:txBody>
+      </p:sp>
+      <p:sp>
+        <p:nvSpPr>
+          <p:cNvPr id="4" name="TextBox 3"/>
+          <p:cNvSpPr txBox="1"/>
+          <p:nvPr/>
+        </p:nvSpPr>
+        <p:spPr>
+          <a:xfrm>
+            <a:off x="365760" y="274320"/>
+            <a:ext cx="11430000" cy="777240"/>
+          </a:xfrm>
+          <a:prstGeom prst="rect">
+            <a:avLst/>
+          </a:prstGeom>
+          <a:noFill/>
+        </p:spPr>
+        <p:txBody>
+          <a:bodyPr wrap="square">
+            <a:spAutoFit/>
+          </a:bodyPr>
+          <a:lstStyle/>
+          <a:p>
+            <a:pPr algn="l"/>
+            <a:r>
+              <a:rPr sz="2200" b="1" i="0">
+                <a:solidFill>
+                  <a:srgbClr val="003DA5"/>
+                </a:solidFill>
+                <a:latin typeface="Arial"/>
+              </a:rPr>
+              <a:t>Vier Branchenprofile für den Beratungsalltag</a:t>
+            </a:r>
+          </a:p>
+        </p:txBody>
+      </p:sp>
+      <p:sp>
+        <p:nvSpPr>
+          <p:cNvPr id="5" name="Rectangle 4"/>
+          <p:cNvSpPr/>
+          <p:nvPr/>
+        </p:nvSpPr>
+        <p:spPr>
+          <a:xfrm>
+            <a:off x="365760" y="1005840"/>
+            <a:ext cx="11430000" cy="27432"/>
+          </a:xfrm>
+          <a:prstGeom prst="rect">
+            <a:avLst/>
+          </a:prstGeom>
+          <a:solidFill>
+            <a:srgbClr val="D1D5DB"/>
+          </a:solidFill>
+          <a:ln>
+            <a:noFill/>
+          </a:ln>
+        </p:spPr>
+        <p:style>
+          <a:lnRef idx="1">
+            <a:schemeClr val="accent1"/>
+          </a:lnRef>
+          <a:fillRef idx="3">
+            <a:schemeClr val="accent1"/>
+          </a:fillRef>
+          <a:effectRef idx="2">
+            <a:schemeClr val="accent1"/>
+          </a:effectRef>
+          <a:fontRef idx="minor">
+            <a:schemeClr val="lt1"/>
+          </a:fontRef>
+        </p:style>
+        <p:txBody>
+          <a:bodyPr rtlCol="0" anchor="ctr"/>
+          <a:lstStyle/>
+          <a:p>
+            <a:pPr algn="ctr"/>
+          </a:p>
+        </p:txBody>
+      </p:sp>
+      <p:sp>
+        <p:nvSpPr>
+          <p:cNvPr id="6" name="TextBox 5"/>
+          <p:cNvSpPr txBox="1"/>
+          <p:nvPr/>
+        </p:nvSpPr>
+        <p:spPr>
+          <a:xfrm>
+            <a:off x="365760" y="1143000"/>
+            <a:ext cx="11430000" cy="5212080"/>
+          </a:xfrm>
+          <a:prstGeom prst="rect">
+            <a:avLst/>
+          </a:prstGeom>
+          <a:noFill/>
+        </p:spPr>
+        <p:txBody>
+          <a:bodyPr wrap="square">
+            <a:spAutoFit/>
+          </a:bodyPr>
+          <a:lstStyle/>
+          <a:p>
+            <a:pPr>
+              <a:spcBef>
+                <a:spcPts val="500"/>
+              </a:spcBef>
+            </a:pPr>
+            <a:r>
+              <a:rPr sz="1500">
+                <a:solidFill>
+                  <a:srgbClr val="003DA5"/>
+                </a:solidFill>
+                <a:latin typeface="Arial"/>
+              </a:rPr>
+              <a:t>▪  </a:t>
+            </a:r>
+            <a:r>
+              <a:rPr sz="1700" b="1">
+                <a:solidFill>
+                  <a:srgbClr val="003DA5"/>
+                </a:solidFill>
+                <a:latin typeface="Arial"/>
+              </a:rPr>
+              <a:t>Finanzierungsbedarf: </a:t>
+            </a:r>
+            <a:r>
+              <a:rPr sz="1700">
+                <a:solidFill>
+                  <a:srgbClr val="1A1A1A"/>
+                </a:solidFill>
+                <a:latin typeface="Arial"/>
+              </a:rPr>
+              <a:t>Betriebsmittelkredite für Personalkosten (Humankapital = Hauptkostentreiber), Fahrzeug- und Geräteflotten (Logistik, Gebäudeservice), Wachstumsfinanzierung bei skalierbaren…</a:t>
+            </a:r>
+          </a:p>
+          <a:p>
+            <a:pPr>
+              <a:spcBef>
+                <a:spcPts val="500"/>
+              </a:spcBef>
+            </a:pPr>
+            <a:r>
+              <a:rPr sz="1500">
+                <a:solidFill>
+                  <a:srgbClr val="003DA5"/>
+                </a:solidFill>
+                <a:latin typeface="Arial"/>
+              </a:rPr>
+              <a:t>▪  </a:t>
+            </a:r>
+            <a:r>
+              <a:rPr sz="1700" b="1">
+                <a:solidFill>
+                  <a:srgbClr val="003DA5"/>
+                </a:solidFill>
+                <a:latin typeface="Arial"/>
+              </a:rPr>
+              <a:t>Typische Risiken: </a:t>
+            </a:r>
+            <a:r>
+              <a:rPr sz="1700">
+                <a:solidFill>
+                  <a:srgbClr val="1A1A1A"/>
+                </a:solidFill>
+                <a:latin typeface="Arial"/>
+              </a:rPr>
+              <a:t>Mitarbeiterabhängigkeit (wenige Sachsicherheiten, Wissen sitzt in den Köpfen), kaum verwertbare Sicherheiten (kein Lager, oft keine Immobilien), hohe Skalierbarkeit aber…</a:t>
+            </a:r>
+          </a:p>
+          <a:p>
+            <a:pPr>
+              <a:spcBef>
+                <a:spcPts val="500"/>
+              </a:spcBef>
+            </a:pPr>
+            <a:r>
+              <a:rPr sz="1500">
+                <a:solidFill>
+                  <a:srgbClr val="003DA5"/>
+                </a:solidFill>
+                <a:latin typeface="Arial"/>
+              </a:rPr>
+              <a:t>▪  </a:t>
+            </a:r>
+            <a:r>
+              <a:rPr sz="1700" b="1">
+                <a:solidFill>
+                  <a:srgbClr val="003DA5"/>
+                </a:solidFill>
+                <a:latin typeface="Arial"/>
+              </a:rPr>
+              <a:t>Was frage ich als Berater: </a:t>
+            </a:r>
+            <a:r>
+              <a:rPr sz="1700">
+                <a:solidFill>
+                  <a:srgbClr val="1A1A1A"/>
+                </a:solidFill>
+                <a:latin typeface="Arial"/>
+              </a:rPr>
+              <a:t>"Was würde passieren, wenn Ihre drei besten Mitarbeiter morgen zur Konkurrenz wechseln würden?" / "Haben Sie Rahmenverträge mit Ihren Hauptkunden – oder laufen die Aufträge…</a:t>
             </a:r>
           </a:p>
         </p:txBody>
@@ -5197,7 +6166,7 @@
     <p:bg>
       <p:bgPr>
         <a:solidFill>
-          <a:srgbClr val="1A1A1A"/>
+          <a:srgbClr val="FFFFFF"/>
         </a:solidFill>
         <a:effectLst/>
       </p:bgPr>
@@ -5224,7 +6193,7 @@
             <a:avLst/>
           </a:prstGeom>
           <a:solidFill>
-            <a:srgbClr val="E05B00"/>
+            <a:srgbClr val="003DA5"/>
           </a:solidFill>
           <a:ln>
             <a:noFill/>
@@ -5260,8 +6229,8 @@
         </p:nvSpPr>
         <p:spPr>
           <a:xfrm>
-            <a:off x="365760" y="2286000"/>
-            <a:ext cx="11430000" cy="1828800"/>
+            <a:off x="228600" y="182880"/>
+            <a:ext cx="11430000" cy="320040"/>
           </a:xfrm>
           <a:prstGeom prst="rect">
             <a:avLst/>
@@ -5276,17 +6245,530 @@
           <a:p>
             <a:pPr algn="l"/>
             <a:r>
-              <a:rPr sz="3600" b="1">
-                <a:solidFill>
-                  <a:srgbClr val="FFFFFF"/>
-                </a:solidFill>
-                <a:latin typeface="Arial"/>
-              </a:rPr>
-              <a:t>Bankfachliche Quellen</a:t>
-            </a:r>
-          </a:p>
-        </p:txBody>
-      </p:sp>
+              <a:rPr sz="900" b="0" i="0">
+                <a:solidFill>
+                  <a:srgbClr val="556575"/>
+                </a:solidFill>
+                <a:latin typeface="Arial"/>
+              </a:rPr>
+              <a:t>M06 · Modulinhalte</a:t>
+            </a:r>
+          </a:p>
+        </p:txBody>
+      </p:sp>
+      <p:sp>
+        <p:nvSpPr>
+          <p:cNvPr id="4" name="TextBox 3"/>
+          <p:cNvSpPr txBox="1"/>
+          <p:nvPr/>
+        </p:nvSpPr>
+        <p:spPr>
+          <a:xfrm>
+            <a:off x="365760" y="274320"/>
+            <a:ext cx="11430000" cy="777240"/>
+          </a:xfrm>
+          <a:prstGeom prst="rect">
+            <a:avLst/>
+          </a:prstGeom>
+          <a:noFill/>
+        </p:spPr>
+        <p:txBody>
+          <a:bodyPr wrap="square">
+            <a:spAutoFit/>
+          </a:bodyPr>
+          <a:lstStyle/>
+          <a:p>
+            <a:pPr algn="l"/>
+            <a:r>
+              <a:rPr sz="2200" b="1" i="0">
+                <a:solidFill>
+                  <a:srgbClr val="003DA5"/>
+                </a:solidFill>
+                <a:latin typeface="Arial"/>
+              </a:rPr>
+              <a:t>Das 5-Fragen-Schema: Strukturierter Analyseeinstieg</a:t>
+            </a:r>
+          </a:p>
+        </p:txBody>
+      </p:sp>
+      <p:sp>
+        <p:nvSpPr>
+          <p:cNvPr id="5" name="Rectangle 4"/>
+          <p:cNvSpPr/>
+          <p:nvPr/>
+        </p:nvSpPr>
+        <p:spPr>
+          <a:xfrm>
+            <a:off x="365760" y="1005840"/>
+            <a:ext cx="11430000" cy="27432"/>
+          </a:xfrm>
+          <a:prstGeom prst="rect">
+            <a:avLst/>
+          </a:prstGeom>
+          <a:solidFill>
+            <a:srgbClr val="D1D5DB"/>
+          </a:solidFill>
+          <a:ln>
+            <a:noFill/>
+          </a:ln>
+        </p:spPr>
+        <p:style>
+          <a:lnRef idx="1">
+            <a:schemeClr val="accent1"/>
+          </a:lnRef>
+          <a:fillRef idx="3">
+            <a:schemeClr val="accent1"/>
+          </a:fillRef>
+          <a:effectRef idx="2">
+            <a:schemeClr val="accent1"/>
+          </a:effectRef>
+          <a:fontRef idx="minor">
+            <a:schemeClr val="lt1"/>
+          </a:fontRef>
+        </p:style>
+        <p:txBody>
+          <a:bodyPr rtlCol="0" anchor="ctr"/>
+          <a:lstStyle/>
+          <a:p>
+            <a:pPr algn="ctr"/>
+          </a:p>
+        </p:txBody>
+      </p:sp>
+      <p:graphicFrame>
+        <p:nvGraphicFramePr>
+          <p:cNvPr id="6" name="Table 5"/>
+          <p:cNvGraphicFramePr>
+            <a:graphicFrameLocks noGrp="1"/>
+          </p:cNvGraphicFramePr>
+          <p:nvPr/>
+        </p:nvGraphicFramePr>
+        <p:xfrm>
+          <a:off x="365760" y="1143000"/>
+          <a:ext cx="11430000" cy="2852928"/>
+        </p:xfrm>
+        <a:graphic>
+          <a:graphicData uri="http://schemas.openxmlformats.org/drawingml/2006/table">
+            <a:tbl>
+              <a:tblPr firstRow="1" bandRow="1">
+                <a:tableStyleId>{5C22544A-7EE6-4342-B048-85BDC9FD1C3A}</a:tableStyleId>
+              </a:tblPr>
+              <a:tblGrid>
+                <a:gridCol w="3810000"/>
+                <a:gridCol w="3810000"/>
+                <a:gridCol w="3810000"/>
+              </a:tblGrid>
+              <a:tr h="475488">
+                <a:tc>
+                  <a:txBody>
+                    <a:bodyPr wrap="square"/>
+                    <a:lstStyle/>
+                    <a:p>
+                      <a:r>
+                        <a:rPr sz="1100" b="1">
+                          <a:solidFill>
+                            <a:srgbClr val="FFFFFF"/>
+                          </a:solidFill>
+                          <a:latin typeface="Arial"/>
+                        </a:rPr>
+                        <a:t>Nr</a:t>
+                      </a:r>
+                    </a:p>
+                  </a:txBody>
+                  <a:tcPr>
+                    <a:solidFill>
+                      <a:srgbClr val="003DA5"/>
+                    </a:solidFill>
+                  </a:tcPr>
+                </a:tc>
+                <a:tc>
+                  <a:txBody>
+                    <a:bodyPr wrap="square"/>
+                    <a:lstStyle/>
+                    <a:p>
+                      <a:r>
+                        <a:rPr sz="1100" b="1">
+                          <a:solidFill>
+                            <a:srgbClr val="FFFFFF"/>
+                          </a:solidFill>
+                          <a:latin typeface="Arial"/>
+                        </a:rPr>
+                        <a:t>Frage</a:t>
+                      </a:r>
+                    </a:p>
+                  </a:txBody>
+                  <a:tcPr>
+                    <a:solidFill>
+                      <a:srgbClr val="003DA5"/>
+                    </a:solidFill>
+                  </a:tcPr>
+                </a:tc>
+                <a:tc>
+                  <a:txBody>
+                    <a:bodyPr wrap="square"/>
+                    <a:lstStyle/>
+                    <a:p>
+                      <a:r>
+                        <a:rPr sz="1100" b="1">
+                          <a:solidFill>
+                            <a:srgbClr val="FFFFFF"/>
+                          </a:solidFill>
+                          <a:latin typeface="Arial"/>
+                        </a:rPr>
+                        <a:t>Ziel</a:t>
+                      </a:r>
+                    </a:p>
+                  </a:txBody>
+                  <a:tcPr>
+                    <a:solidFill>
+                      <a:srgbClr val="003DA5"/>
+                    </a:solidFill>
+                  </a:tcPr>
+                </a:tc>
+              </a:tr>
+              <a:tr h="475488">
+                <a:tc>
+                  <a:txBody>
+                    <a:bodyPr wrap="square"/>
+                    <a:lstStyle/>
+                    <a:p>
+                      <a:r>
+                        <a:rPr sz="1100" b="0">
+                          <a:solidFill>
+                            <a:srgbClr val="1A1A1A"/>
+                          </a:solidFill>
+                          <a:latin typeface="Arial"/>
+                        </a:rPr>
+                        <a:t>1</a:t>
+                      </a:r>
+                    </a:p>
+                  </a:txBody>
+                  <a:tcPr>
+                    <a:solidFill>
+                      <a:srgbClr val="FFFFFF"/>
+                    </a:solidFill>
+                  </a:tcPr>
+                </a:tc>
+                <a:tc>
+                  <a:txBody>
+                    <a:bodyPr wrap="square"/>
+                    <a:lstStyle/>
+                    <a:p>
+                      <a:r>
+                        <a:rPr sz="1100" b="0">
+                          <a:solidFill>
+                            <a:srgbClr val="1A1A1A"/>
+                          </a:solidFill>
+                          <a:latin typeface="Arial"/>
+                        </a:rPr>
+                        <a:t>"Wie würden Sie Ihr Kerngeschäft in einem Satz beschreiben?"</a:t>
+                      </a:r>
+                    </a:p>
+                  </a:txBody>
+                  <a:tcPr>
+                    <a:solidFill>
+                      <a:srgbClr val="FFFFFF"/>
+                    </a:solidFill>
+                  </a:tcPr>
+                </a:tc>
+                <a:tc>
+                  <a:txBody>
+                    <a:bodyPr wrap="square"/>
+                    <a:lstStyle/>
+                    <a:p>
+                      <a:r>
+                        <a:rPr sz="1100" b="0">
+                          <a:solidFill>
+                            <a:srgbClr val="1A1A1A"/>
+                          </a:solidFill>
+                          <a:latin typeface="Arial"/>
+                        </a:rPr>
+                        <a:t>Geschäftsmodell, Positionierung</a:t>
+                      </a:r>
+                    </a:p>
+                  </a:txBody>
+                  <a:tcPr>
+                    <a:solidFill>
+                      <a:srgbClr val="FFFFFF"/>
+                    </a:solidFill>
+                  </a:tcPr>
+                </a:tc>
+              </a:tr>
+              <a:tr h="475488">
+                <a:tc>
+                  <a:txBody>
+                    <a:bodyPr wrap="square"/>
+                    <a:lstStyle/>
+                    <a:p>
+                      <a:r>
+                        <a:rPr sz="1100" b="0">
+                          <a:solidFill>
+                            <a:srgbClr val="1A1A1A"/>
+                          </a:solidFill>
+                          <a:latin typeface="Arial"/>
+                        </a:rPr>
+                        <a:t>2</a:t>
+                      </a:r>
+                    </a:p>
+                  </a:txBody>
+                  <a:tcPr>
+                    <a:solidFill>
+                      <a:srgbClr val="F4F6FA"/>
+                    </a:solidFill>
+                  </a:tcPr>
+                </a:tc>
+                <a:tc>
+                  <a:txBody>
+                    <a:bodyPr wrap="square"/>
+                    <a:lstStyle/>
+                    <a:p>
+                      <a:r>
+                        <a:rPr sz="1100" b="0">
+                          <a:solidFill>
+                            <a:srgbClr val="1A1A1A"/>
+                          </a:solidFill>
+                          <a:latin typeface="Arial"/>
+                        </a:rPr>
+                        <a:t>"Wer sind Ihre drei wichtigsten Kunden – wie viel Umsatz machen diese aus?"</a:t>
+                      </a:r>
+                    </a:p>
+                  </a:txBody>
+                  <a:tcPr>
+                    <a:solidFill>
+                      <a:srgbClr val="F4F6FA"/>
+                    </a:solidFill>
+                  </a:tcPr>
+                </a:tc>
+                <a:tc>
+                  <a:txBody>
+                    <a:bodyPr wrap="square"/>
+                    <a:lstStyle/>
+                    <a:p>
+                      <a:r>
+                        <a:rPr sz="1100" b="0">
+                          <a:solidFill>
+                            <a:srgbClr val="1A1A1A"/>
+                          </a:solidFill>
+                          <a:latin typeface="Arial"/>
+                        </a:rPr>
+                        <a:t>Klumpenrisiko</a:t>
+                      </a:r>
+                    </a:p>
+                  </a:txBody>
+                  <a:tcPr>
+                    <a:solidFill>
+                      <a:srgbClr val="F4F6FA"/>
+                    </a:solidFill>
+                  </a:tcPr>
+                </a:tc>
+              </a:tr>
+              <a:tr h="475488">
+                <a:tc>
+                  <a:txBody>
+                    <a:bodyPr wrap="square"/>
+                    <a:lstStyle/>
+                    <a:p>
+                      <a:r>
+                        <a:rPr sz="1100" b="0">
+                          <a:solidFill>
+                            <a:srgbClr val="1A1A1A"/>
+                          </a:solidFill>
+                          <a:latin typeface="Arial"/>
+                        </a:rPr>
+                        <a:t>3</a:t>
+                      </a:r>
+                    </a:p>
+                  </a:txBody>
+                  <a:tcPr>
+                    <a:solidFill>
+                      <a:srgbClr val="FFFFFF"/>
+                    </a:solidFill>
+                  </a:tcPr>
+                </a:tc>
+                <a:tc>
+                  <a:txBody>
+                    <a:bodyPr wrap="square"/>
+                    <a:lstStyle/>
+                    <a:p>
+                      <a:r>
+                        <a:rPr sz="1100" b="0">
+                          <a:solidFill>
+                            <a:srgbClr val="1A1A1A"/>
+                          </a:solidFill>
+                          <a:latin typeface="Arial"/>
+                        </a:rPr>
+                        <a:t>"Was ist Ihre größte unternehmerische Herausforderung in den nächsten 12 Monaten?"</a:t>
+                      </a:r>
+                    </a:p>
+                  </a:txBody>
+                  <a:tcPr>
+                    <a:solidFill>
+                      <a:srgbClr val="FFFFFF"/>
+                    </a:solidFill>
+                  </a:tcPr>
+                </a:tc>
+                <a:tc>
+                  <a:txBody>
+                    <a:bodyPr wrap="square"/>
+                    <a:lstStyle/>
+                    <a:p>
+                      <a:r>
+                        <a:rPr sz="1100" b="0">
+                          <a:solidFill>
+                            <a:srgbClr val="1A1A1A"/>
+                          </a:solidFill>
+                          <a:latin typeface="Arial"/>
+                        </a:rPr>
+                        <a:t>Forward-looking, Zukunftsplanung</a:t>
+                      </a:r>
+                    </a:p>
+                  </a:txBody>
+                  <a:tcPr>
+                    <a:solidFill>
+                      <a:srgbClr val="FFFFFF"/>
+                    </a:solidFill>
+                  </a:tcPr>
+                </a:tc>
+              </a:tr>
+              <a:tr h="475488">
+                <a:tc>
+                  <a:txBody>
+                    <a:bodyPr wrap="square"/>
+                    <a:lstStyle/>
+                    <a:p>
+                      <a:r>
+                        <a:rPr sz="1100" b="0">
+                          <a:solidFill>
+                            <a:srgbClr val="1A1A1A"/>
+                          </a:solidFill>
+                          <a:latin typeface="Arial"/>
+                        </a:rPr>
+                        <a:t>4</a:t>
+                      </a:r>
+                    </a:p>
+                  </a:txBody>
+                  <a:tcPr>
+                    <a:solidFill>
+                      <a:srgbClr val="F4F6FA"/>
+                    </a:solidFill>
+                  </a:tcPr>
+                </a:tc>
+                <a:tc>
+                  <a:txBody>
+                    <a:bodyPr wrap="square"/>
+                    <a:lstStyle/>
+                    <a:p>
+                      <a:r>
+                        <a:rPr sz="1100" b="0">
+                          <a:solidFill>
+                            <a:srgbClr val="1A1A1A"/>
+                          </a:solidFill>
+                          <a:latin typeface="Arial"/>
+                        </a:rPr>
+                        <a:t>"Wie finanzieren Sie Wachstum oder Investitionen typischerweise?"</a:t>
+                      </a:r>
+                    </a:p>
+                  </a:txBody>
+                  <a:tcPr>
+                    <a:solidFill>
+                      <a:srgbClr val="F4F6FA"/>
+                    </a:solidFill>
+                  </a:tcPr>
+                </a:tc>
+                <a:tc>
+                  <a:txBody>
+                    <a:bodyPr wrap="square"/>
+                    <a:lstStyle/>
+                    <a:p>
+                      <a:r>
+                        <a:rPr sz="1100" b="0">
+                          <a:solidFill>
+                            <a:srgbClr val="1A1A1A"/>
+                          </a:solidFill>
+                          <a:latin typeface="Arial"/>
+                        </a:rPr>
+                        <a:t>Finanzierungskultur, Offenheit für Bankprodukte</a:t>
+                      </a:r>
+                    </a:p>
+                  </a:txBody>
+                  <a:tcPr>
+                    <a:solidFill>
+                      <a:srgbClr val="F4F6FA"/>
+                    </a:solidFill>
+                  </a:tcPr>
+                </a:tc>
+              </a:tr>
+              <a:tr h="475488">
+                <a:tc>
+                  <a:txBody>
+                    <a:bodyPr wrap="square"/>
+                    <a:lstStyle/>
+                    <a:p>
+                      <a:r>
+                        <a:rPr sz="1100" b="0">
+                          <a:solidFill>
+                            <a:srgbClr val="1A1A1A"/>
+                          </a:solidFill>
+                          <a:latin typeface="Arial"/>
+                        </a:rPr>
+                        <a:t>5</a:t>
+                      </a:r>
+                    </a:p>
+                  </a:txBody>
+                  <a:tcPr>
+                    <a:solidFill>
+                      <a:srgbClr val="FFFFFF"/>
+                    </a:solidFill>
+                  </a:tcPr>
+                </a:tc>
+                <a:tc>
+                  <a:txBody>
+                    <a:bodyPr wrap="square"/>
+                    <a:lstStyle/>
+                    <a:p>
+                      <a:r>
+                        <a:rPr sz="1100" b="0">
+                          <a:solidFill>
+                            <a:srgbClr val="1A1A1A"/>
+                          </a:solidFill>
+                          <a:latin typeface="Arial"/>
+                        </a:rPr>
+                        <a:t>"Was würde passieren, wenn Sie 6 Monate durch Krankheit oder Unfall ausfallen würden?"</a:t>
+                      </a:r>
+                    </a:p>
+                  </a:txBody>
+                  <a:tcPr>
+                    <a:solidFill>
+                      <a:srgbClr val="FFFFFF"/>
+                    </a:solidFill>
+                  </a:tcPr>
+                </a:tc>
+                <a:tc>
+                  <a:txBody>
+                    <a:bodyPr wrap="square"/>
+                    <a:lstStyle/>
+                    <a:p>
+                      <a:r>
+                        <a:rPr sz="1100" b="0">
+                          <a:solidFill>
+                            <a:srgbClr val="1A1A1A"/>
+                          </a:solidFill>
+                          <a:latin typeface="Arial"/>
+                        </a:rPr>
+                        <a:t>Schlüsselpersonenrisiko, Absicherungsbedarf</a:t>
+                      </a:r>
+                    </a:p>
+                  </a:txBody>
+                  <a:tcPr>
+                    <a:solidFill>
+                      <a:srgbClr val="FFFFFF"/>
+                    </a:solidFill>
+                  </a:tcPr>
+                </a:tc>
+              </a:tr>
+            </a:tbl>
+          </a:graphicData>
+        </a:graphic>
+      </p:graphicFrame>
     </p:spTree>
   </p:cSld>
   <p:clrMapOvr>
@@ -5301,7 +6783,7 @@
     <p:bg>
       <p:bgPr>
         <a:solidFill>
-          <a:srgbClr val="F5F7FA"/>
+          <a:srgbClr val="F4F6FA"/>
         </a:solidFill>
         <a:effectLst/>
       </p:bgPr>
@@ -5364,14 +6846,14 @@
         </p:nvSpPr>
         <p:spPr>
           <a:xfrm>
-            <a:off x="365760" y="868680"/>
-            <a:ext cx="7315200" cy="27432"/>
+            <a:off x="228600" y="804672"/>
+            <a:ext cx="11612880" cy="22860"/>
           </a:xfrm>
           <a:prstGeom prst="rect">
             <a:avLst/>
           </a:prstGeom>
           <a:solidFill>
-            <a:srgbClr val="E5E7EB"/>
+            <a:srgbClr val="D1D5DB"/>
           </a:solidFill>
           <a:ln>
             <a:noFill/>
@@ -5408,7 +6890,7 @@
         <p:spPr>
           <a:xfrm>
             <a:off x="365760" y="320040"/>
-            <a:ext cx="3657600" cy="365760"/>
+            <a:ext cx="4572000" cy="347472"/>
           </a:xfrm>
           <a:prstGeom prst="rect">
             <a:avLst/>
@@ -5423,7 +6905,7 @@
           <a:p>
             <a:pPr algn="l"/>
             <a:r>
-              <a:rPr sz="1000" b="1">
+              <a:rPr sz="900" b="1" i="0">
                 <a:solidFill>
                   <a:srgbClr val="003DA5"/>
                 </a:solidFill>
@@ -5443,7 +6925,7 @@
         <p:spPr>
           <a:xfrm>
             <a:off x="365760" y="502920"/>
-            <a:ext cx="9144000" cy="548640"/>
+            <a:ext cx="10058400" cy="640080"/>
           </a:xfrm>
           <a:prstGeom prst="rect">
             <a:avLst/>
@@ -5458,7 +6940,7 @@
           <a:p>
             <a:pPr algn="l"/>
             <a:r>
-              <a:rPr sz="2200" b="1">
+              <a:rPr sz="2400" b="1" i="0">
                 <a:solidFill>
                   <a:srgbClr val="1A1A1A"/>
                 </a:solidFill>
@@ -5477,7 +6959,7 @@
         </p:nvSpPr>
         <p:spPr>
           <a:xfrm>
-            <a:off x="365760" y="1188720"/>
+            <a:off x="365760" y="1234440"/>
             <a:ext cx="11430000" cy="5303520"/>
           </a:xfrm>
           <a:prstGeom prst="rect">
@@ -5493,11 +6975,11 @@
           <a:p>
             <a:pPr>
               <a:spcBef>
-                <a:spcPts val="400"/>
+                <a:spcPts val="500"/>
               </a:spcBef>
             </a:pPr>
             <a:r>
-              <a:rPr sz="1400">
+              <a:rPr sz="1500">
                 <a:solidFill>
                   <a:srgbClr val="003DA5"/>
                 </a:solidFill>
@@ -5506,7 +6988,7 @@
               <a:t>▪  </a:t>
             </a:r>
             <a:r>
-              <a:rPr sz="1600">
+              <a:rPr sz="1700">
                 <a:solidFill>
                   <a:srgbClr val="1A1A1A"/>
                 </a:solidFill>
@@ -5518,11 +7000,11 @@
           <a:p>
             <a:pPr>
               <a:spcBef>
-                <a:spcPts val="400"/>
+                <a:spcPts val="500"/>
               </a:spcBef>
             </a:pPr>
             <a:r>
-              <a:rPr sz="1400">
+              <a:rPr sz="1500">
                 <a:solidFill>
                   <a:srgbClr val="003DA5"/>
                 </a:solidFill>
@@ -5531,7 +7013,7 @@
               <a:t>▪  </a:t>
             </a:r>
             <a:r>
-              <a:rPr sz="1600">
+              <a:rPr sz="1700">
                 <a:solidFill>
                   <a:srgbClr val="1A1A1A"/>
                 </a:solidFill>
@@ -5543,11 +7025,11 @@
           <a:p>
             <a:pPr>
               <a:spcBef>
-                <a:spcPts val="400"/>
+                <a:spcPts val="500"/>
               </a:spcBef>
             </a:pPr>
             <a:r>
-              <a:rPr sz="1400">
+              <a:rPr sz="1500">
                 <a:solidFill>
                   <a:srgbClr val="003DA5"/>
                 </a:solidFill>
@@ -5556,7 +7038,7 @@
               <a:t>▪  </a:t>
             </a:r>
             <a:r>
-              <a:rPr sz="1600">
+              <a:rPr sz="1700">
                 <a:solidFill>
                   <a:srgbClr val="1A1A1A"/>
                 </a:solidFill>
@@ -5568,11 +7050,11 @@
           <a:p>
             <a:pPr>
               <a:spcBef>
-                <a:spcPts val="400"/>
+                <a:spcPts val="500"/>
               </a:spcBef>
             </a:pPr>
             <a:r>
-              <a:rPr sz="1400">
+              <a:rPr sz="1500">
                 <a:solidFill>
                   <a:srgbClr val="003DA5"/>
                 </a:solidFill>
@@ -5581,7 +7063,7 @@
               <a:t>▪  </a:t>
             </a:r>
             <a:r>
-              <a:rPr sz="1600">
+              <a:rPr sz="1700">
                 <a:solidFill>
                   <a:srgbClr val="1A1A1A"/>
                 </a:solidFill>
@@ -5669,8 +7151,8 @@
         </p:nvSpPr>
         <p:spPr>
           <a:xfrm>
-            <a:off x="365760" y="2286000"/>
-            <a:ext cx="11430000" cy="1828800"/>
+            <a:off x="365760" y="2011680"/>
+            <a:ext cx="11430000" cy="2011680"/>
           </a:xfrm>
           <a:prstGeom prst="rect">
             <a:avLst/>
@@ -5685,13 +7167,13 @@
           <a:p>
             <a:pPr algn="l"/>
             <a:r>
-              <a:rPr sz="3600" b="1">
+              <a:rPr sz="3600" b="1" i="0">
                 <a:solidFill>
                   <a:srgbClr val="FFFFFF"/>
                 </a:solidFill>
                 <a:latin typeface="Arial"/>
               </a:rPr>
-              <a:t>Regulatorische und amtliche Quellen</a:t>
+              <a:t>4.4 Praxiscase: Bergmann Holzmanufaktur GmbH &amp; Co. KG</a:t>
             </a:r>
           </a:p>
         </p:txBody>
@@ -5705,6 +7187,1844 @@
 </file>
 
 <file path=ppt/slides/slide21.xml><?xml version="1.0" encoding="utf-8"?>
+<p:sld xmlns:a="http://schemas.openxmlformats.org/drawingml/2006/main" xmlns:p="http://schemas.openxmlformats.org/presentationml/2006/main" xmlns:r="http://schemas.openxmlformats.org/officeDocument/2006/relationships">
+  <p:cSld>
+    <p:bg>
+      <p:bgPr>
+        <a:solidFill>
+          <a:srgbClr val="FFFFFF"/>
+        </a:solidFill>
+        <a:effectLst/>
+      </p:bgPr>
+    </p:bg>
+    <p:spTree>
+      <p:nvGrpSpPr>
+        <p:cNvPr id="1" name=""/>
+        <p:cNvGrpSpPr/>
+        <p:nvPr/>
+      </p:nvGrpSpPr>
+      <p:grpSpPr/>
+      <p:sp>
+        <p:nvSpPr>
+          <p:cNvPr id="2" name="Rectangle 1"/>
+          <p:cNvSpPr/>
+          <p:nvPr/>
+        </p:nvSpPr>
+        <p:spPr>
+          <a:xfrm>
+            <a:off x="0" y="0"/>
+            <a:ext cx="73152" cy="6858000"/>
+          </a:xfrm>
+          <a:prstGeom prst="rect">
+            <a:avLst/>
+          </a:prstGeom>
+          <a:solidFill>
+            <a:srgbClr val="003DA5"/>
+          </a:solidFill>
+          <a:ln>
+            <a:noFill/>
+          </a:ln>
+        </p:spPr>
+        <p:style>
+          <a:lnRef idx="1">
+            <a:schemeClr val="accent1"/>
+          </a:lnRef>
+          <a:fillRef idx="3">
+            <a:schemeClr val="accent1"/>
+          </a:fillRef>
+          <a:effectRef idx="2">
+            <a:schemeClr val="accent1"/>
+          </a:effectRef>
+          <a:fontRef idx="minor">
+            <a:schemeClr val="lt1"/>
+          </a:fontRef>
+        </p:style>
+        <p:txBody>
+          <a:bodyPr rtlCol="0" anchor="ctr"/>
+          <a:lstStyle/>
+          <a:p>
+            <a:pPr algn="ctr"/>
+          </a:p>
+        </p:txBody>
+      </p:sp>
+      <p:sp>
+        <p:nvSpPr>
+          <p:cNvPr id="3" name="TextBox 2"/>
+          <p:cNvSpPr txBox="1"/>
+          <p:nvPr/>
+        </p:nvSpPr>
+        <p:spPr>
+          <a:xfrm>
+            <a:off x="228600" y="182880"/>
+            <a:ext cx="11430000" cy="320040"/>
+          </a:xfrm>
+          <a:prstGeom prst="rect">
+            <a:avLst/>
+          </a:prstGeom>
+          <a:noFill/>
+        </p:spPr>
+        <p:txBody>
+          <a:bodyPr wrap="square">
+            <a:spAutoFit/>
+          </a:bodyPr>
+          <a:lstStyle/>
+          <a:p>
+            <a:pPr algn="l"/>
+            <a:r>
+              <a:rPr sz="900" b="0" i="0">
+                <a:solidFill>
+                  <a:srgbClr val="556575"/>
+                </a:solidFill>
+                <a:latin typeface="Arial"/>
+              </a:rPr>
+              <a:t>M06 · Modulinhalte</a:t>
+            </a:r>
+          </a:p>
+        </p:txBody>
+      </p:sp>
+      <p:sp>
+        <p:nvSpPr>
+          <p:cNvPr id="4" name="TextBox 3"/>
+          <p:cNvSpPr txBox="1"/>
+          <p:nvPr/>
+        </p:nvSpPr>
+        <p:spPr>
+          <a:xfrm>
+            <a:off x="365760" y="274320"/>
+            <a:ext cx="11430000" cy="777240"/>
+          </a:xfrm>
+          <a:prstGeom prst="rect">
+            <a:avLst/>
+          </a:prstGeom>
+          <a:noFill/>
+        </p:spPr>
+        <p:txBody>
+          <a:bodyPr wrap="square">
+            <a:spAutoFit/>
+          </a:bodyPr>
+          <a:lstStyle/>
+          <a:p>
+            <a:pPr algn="l"/>
+            <a:r>
+              <a:rPr sz="2200" b="1" i="0">
+                <a:solidFill>
+                  <a:srgbClr val="003DA5"/>
+                </a:solidFill>
+                <a:latin typeface="Arial"/>
+              </a:rPr>
+              <a:t>Unternehmensporträt</a:t>
+            </a:r>
+          </a:p>
+        </p:txBody>
+      </p:sp>
+      <p:sp>
+        <p:nvSpPr>
+          <p:cNvPr id="5" name="Rectangle 4"/>
+          <p:cNvSpPr/>
+          <p:nvPr/>
+        </p:nvSpPr>
+        <p:spPr>
+          <a:xfrm>
+            <a:off x="365760" y="1005840"/>
+            <a:ext cx="11430000" cy="27432"/>
+          </a:xfrm>
+          <a:prstGeom prst="rect">
+            <a:avLst/>
+          </a:prstGeom>
+          <a:solidFill>
+            <a:srgbClr val="D1D5DB"/>
+          </a:solidFill>
+          <a:ln>
+            <a:noFill/>
+          </a:ln>
+        </p:spPr>
+        <p:style>
+          <a:lnRef idx="1">
+            <a:schemeClr val="accent1"/>
+          </a:lnRef>
+          <a:fillRef idx="3">
+            <a:schemeClr val="accent1"/>
+          </a:fillRef>
+          <a:effectRef idx="2">
+            <a:schemeClr val="accent1"/>
+          </a:effectRef>
+          <a:fontRef idx="minor">
+            <a:schemeClr val="lt1"/>
+          </a:fontRef>
+        </p:style>
+        <p:txBody>
+          <a:bodyPr rtlCol="0" anchor="ctr"/>
+          <a:lstStyle/>
+          <a:p>
+            <a:pPr algn="ctr"/>
+          </a:p>
+        </p:txBody>
+      </p:sp>
+      <p:sp>
+        <p:nvSpPr>
+          <p:cNvPr id="6" name="TextBox 5"/>
+          <p:cNvSpPr txBox="1"/>
+          <p:nvPr/>
+        </p:nvSpPr>
+        <p:spPr>
+          <a:xfrm>
+            <a:off x="365760" y="1143000"/>
+            <a:ext cx="11430000" cy="5212080"/>
+          </a:xfrm>
+          <a:prstGeom prst="rect">
+            <a:avLst/>
+          </a:prstGeom>
+          <a:noFill/>
+        </p:spPr>
+        <p:txBody>
+          <a:bodyPr wrap="square">
+            <a:spAutoFit/>
+          </a:bodyPr>
+          <a:lstStyle/>
+          <a:p>
+            <a:pPr>
+              <a:spcBef>
+                <a:spcPts val="500"/>
+              </a:spcBef>
+            </a:pPr>
+            <a:r>
+              <a:rPr sz="1500">
+                <a:solidFill>
+                  <a:srgbClr val="003DA5"/>
+                </a:solidFill>
+                <a:latin typeface="Arial"/>
+              </a:rPr>
+              <a:t>▪  </a:t>
+            </a:r>
+            <a:r>
+              <a:rPr sz="1700">
+                <a:solidFill>
+                  <a:srgbClr val="1A1A1A"/>
+                </a:solidFill>
+                <a:latin typeface="Arial"/>
+              </a:rPr>
+              <a:t>Die Bergmann Holzmanufaktur GmbH &amp; Co. KG, Ravensburg, ist seit 5 Jahren Kundin der VR-Bank Bodensee-Oberschwaben eG. Das Unternehmen wurde vor 28 Jahren von…</a:t>
+            </a:r>
+          </a:p>
+          <a:p>
+            <a:pPr>
+              <a:spcBef>
+                <a:spcPts val="500"/>
+              </a:spcBef>
+            </a:pPr>
+            <a:r>
+              <a:rPr sz="1500">
+                <a:solidFill>
+                  <a:srgbClr val="003DA5"/>
+                </a:solidFill>
+                <a:latin typeface="Arial"/>
+              </a:rPr>
+              <a:t>▪  </a:t>
+            </a:r>
+            <a:r>
+              <a:rPr sz="1700">
+                <a:solidFill>
+                  <a:srgbClr val="1A1A1A"/>
+                </a:solidFill>
+                <a:latin typeface="Arial"/>
+              </a:rPr>
+              <a:t>Die Kundin kommt für ein Beratungsgespräch, weil sie eine neue CNC-Fräsmaschine anschaffen möchte (Investitionsvolumen: ca. 120.000 EUR). Sie fragt nach einem…</a:t>
+            </a:r>
+          </a:p>
+        </p:txBody>
+      </p:sp>
+    </p:spTree>
+  </p:cSld>
+  <p:clrMapOvr>
+    <a:masterClrMapping/>
+  </p:clrMapOvr>
+</p:sld>
+</file>
+
+<file path=ppt/slides/slide22.xml><?xml version="1.0" encoding="utf-8"?>
+<p:sld xmlns:a="http://schemas.openxmlformats.org/drawingml/2006/main" xmlns:p="http://schemas.openxmlformats.org/presentationml/2006/main" xmlns:r="http://schemas.openxmlformats.org/officeDocument/2006/relationships">
+  <p:cSld>
+    <p:bg>
+      <p:bgPr>
+        <a:solidFill>
+          <a:srgbClr val="FFFFFF"/>
+        </a:solidFill>
+        <a:effectLst/>
+      </p:bgPr>
+    </p:bg>
+    <p:spTree>
+      <p:nvGrpSpPr>
+        <p:cNvPr id="1" name=""/>
+        <p:cNvGrpSpPr/>
+        <p:nvPr/>
+      </p:nvGrpSpPr>
+      <p:grpSpPr/>
+      <p:sp>
+        <p:nvSpPr>
+          <p:cNvPr id="2" name="Rectangle 1"/>
+          <p:cNvSpPr/>
+          <p:nvPr/>
+        </p:nvSpPr>
+        <p:spPr>
+          <a:xfrm>
+            <a:off x="0" y="0"/>
+            <a:ext cx="73152" cy="6858000"/>
+          </a:xfrm>
+          <a:prstGeom prst="rect">
+            <a:avLst/>
+          </a:prstGeom>
+          <a:solidFill>
+            <a:srgbClr val="003DA5"/>
+          </a:solidFill>
+          <a:ln>
+            <a:noFill/>
+          </a:ln>
+        </p:spPr>
+        <p:style>
+          <a:lnRef idx="1">
+            <a:schemeClr val="accent1"/>
+          </a:lnRef>
+          <a:fillRef idx="3">
+            <a:schemeClr val="accent1"/>
+          </a:fillRef>
+          <a:effectRef idx="2">
+            <a:schemeClr val="accent1"/>
+          </a:effectRef>
+          <a:fontRef idx="minor">
+            <a:schemeClr val="lt1"/>
+          </a:fontRef>
+        </p:style>
+        <p:txBody>
+          <a:bodyPr rtlCol="0" anchor="ctr"/>
+          <a:lstStyle/>
+          <a:p>
+            <a:pPr algn="ctr"/>
+          </a:p>
+        </p:txBody>
+      </p:sp>
+      <p:sp>
+        <p:nvSpPr>
+          <p:cNvPr id="3" name="TextBox 2"/>
+          <p:cNvSpPr txBox="1"/>
+          <p:nvPr/>
+        </p:nvSpPr>
+        <p:spPr>
+          <a:xfrm>
+            <a:off x="228600" y="182880"/>
+            <a:ext cx="11430000" cy="320040"/>
+          </a:xfrm>
+          <a:prstGeom prst="rect">
+            <a:avLst/>
+          </a:prstGeom>
+          <a:noFill/>
+        </p:spPr>
+        <p:txBody>
+          <a:bodyPr wrap="square">
+            <a:spAutoFit/>
+          </a:bodyPr>
+          <a:lstStyle/>
+          <a:p>
+            <a:pPr algn="l"/>
+            <a:r>
+              <a:rPr sz="900" b="0" i="0">
+                <a:solidFill>
+                  <a:srgbClr val="556575"/>
+                </a:solidFill>
+                <a:latin typeface="Arial"/>
+              </a:rPr>
+              <a:t>M06 · Modulinhalte</a:t>
+            </a:r>
+          </a:p>
+        </p:txBody>
+      </p:sp>
+      <p:sp>
+        <p:nvSpPr>
+          <p:cNvPr id="4" name="TextBox 3"/>
+          <p:cNvSpPr txBox="1"/>
+          <p:nvPr/>
+        </p:nvSpPr>
+        <p:spPr>
+          <a:xfrm>
+            <a:off x="365760" y="274320"/>
+            <a:ext cx="11430000" cy="777240"/>
+          </a:xfrm>
+          <a:prstGeom prst="rect">
+            <a:avLst/>
+          </a:prstGeom>
+          <a:noFill/>
+        </p:spPr>
+        <p:txBody>
+          <a:bodyPr wrap="square">
+            <a:spAutoFit/>
+          </a:bodyPr>
+          <a:lstStyle/>
+          <a:p>
+            <a:pPr algn="l"/>
+            <a:r>
+              <a:rPr sz="2200" b="1" i="0">
+                <a:solidFill>
+                  <a:srgbClr val="003DA5"/>
+                </a:solidFill>
+                <a:latin typeface="Arial"/>
+              </a:rPr>
+              <a:t>Finanzdaten (fiktiv, plausibel für Holzhandwerk)</a:t>
+            </a:r>
+          </a:p>
+        </p:txBody>
+      </p:sp>
+      <p:sp>
+        <p:nvSpPr>
+          <p:cNvPr id="5" name="Rectangle 4"/>
+          <p:cNvSpPr/>
+          <p:nvPr/>
+        </p:nvSpPr>
+        <p:spPr>
+          <a:xfrm>
+            <a:off x="365760" y="1005840"/>
+            <a:ext cx="11430000" cy="27432"/>
+          </a:xfrm>
+          <a:prstGeom prst="rect">
+            <a:avLst/>
+          </a:prstGeom>
+          <a:solidFill>
+            <a:srgbClr val="D1D5DB"/>
+          </a:solidFill>
+          <a:ln>
+            <a:noFill/>
+          </a:ln>
+        </p:spPr>
+        <p:style>
+          <a:lnRef idx="1">
+            <a:schemeClr val="accent1"/>
+          </a:lnRef>
+          <a:fillRef idx="3">
+            <a:schemeClr val="accent1"/>
+          </a:fillRef>
+          <a:effectRef idx="2">
+            <a:schemeClr val="accent1"/>
+          </a:effectRef>
+          <a:fontRef idx="minor">
+            <a:schemeClr val="lt1"/>
+          </a:fontRef>
+        </p:style>
+        <p:txBody>
+          <a:bodyPr rtlCol="0" anchor="ctr"/>
+          <a:lstStyle/>
+          <a:p>
+            <a:pPr algn="ctr"/>
+          </a:p>
+        </p:txBody>
+      </p:sp>
+      <p:graphicFrame>
+        <p:nvGraphicFramePr>
+          <p:cNvPr id="6" name="Table 5"/>
+          <p:cNvGraphicFramePr>
+            <a:graphicFrameLocks noGrp="1"/>
+          </p:cNvGraphicFramePr>
+          <p:nvPr/>
+        </p:nvGraphicFramePr>
+        <p:xfrm>
+          <a:off x="365760" y="1143000"/>
+          <a:ext cx="11430000" cy="2852928"/>
+        </p:xfrm>
+        <a:graphic>
+          <a:graphicData uri="http://schemas.openxmlformats.org/drawingml/2006/table">
+            <a:tbl>
+              <a:tblPr firstRow="1" bandRow="1">
+                <a:tableStyleId>{5C22544A-7EE6-4342-B048-85BDC9FD1C3A}</a:tableStyleId>
+              </a:tblPr>
+              <a:tblGrid>
+                <a:gridCol w="3810000"/>
+                <a:gridCol w="3810000"/>
+                <a:gridCol w="3810000"/>
+              </a:tblGrid>
+              <a:tr h="475488">
+                <a:tc>
+                  <a:txBody>
+                    <a:bodyPr wrap="square"/>
+                    <a:lstStyle/>
+                    <a:p>
+                      <a:r>
+                        <a:rPr sz="1100" b="1">
+                          <a:solidFill>
+                            <a:srgbClr val="FFFFFF"/>
+                          </a:solidFill>
+                          <a:latin typeface="Arial"/>
+                        </a:rPr>
+                        <a:t>Kennzahl</a:t>
+                      </a:r>
+                    </a:p>
+                  </a:txBody>
+                  <a:tcPr>
+                    <a:solidFill>
+                      <a:srgbClr val="003DA5"/>
+                    </a:solidFill>
+                  </a:tcPr>
+                </a:tc>
+                <a:tc>
+                  <a:txBody>
+                    <a:bodyPr wrap="square"/>
+                    <a:lstStyle/>
+                    <a:p>
+                      <a:r>
+                        <a:rPr sz="1100" b="1">
+                          <a:solidFill>
+                            <a:srgbClr val="FFFFFF"/>
+                          </a:solidFill>
+                          <a:latin typeface="Arial"/>
+                        </a:rPr>
+                        <a:t>Wert 2025</a:t>
+                      </a:r>
+                    </a:p>
+                  </a:txBody>
+                  <a:tcPr>
+                    <a:solidFill>
+                      <a:srgbClr val="003DA5"/>
+                    </a:solidFill>
+                  </a:tcPr>
+                </a:tc>
+                <a:tc>
+                  <a:txBody>
+                    <a:bodyPr wrap="square"/>
+                    <a:lstStyle/>
+                    <a:p>
+                      <a:r>
+                        <a:rPr sz="1100" b="1">
+                          <a:solidFill>
+                            <a:srgbClr val="FFFFFF"/>
+                          </a:solidFill>
+                          <a:latin typeface="Arial"/>
+                        </a:rPr>
+                        <a:t>Branchenwert*</a:t>
+                      </a:r>
+                    </a:p>
+                  </a:txBody>
+                  <a:tcPr>
+                    <a:solidFill>
+                      <a:srgbClr val="003DA5"/>
+                    </a:solidFill>
+                  </a:tcPr>
+                </a:tc>
+              </a:tr>
+              <a:tr h="475488">
+                <a:tc>
+                  <a:txBody>
+                    <a:bodyPr wrap="square"/>
+                    <a:lstStyle/>
+                    <a:p>
+                      <a:r>
+                        <a:rPr sz="1100" b="0">
+                          <a:solidFill>
+                            <a:srgbClr val="1A1A1A"/>
+                          </a:solidFill>
+                          <a:latin typeface="Arial"/>
+                        </a:rPr>
+                        <a:t>Eigenkapitalquote</a:t>
+                      </a:r>
+                    </a:p>
+                  </a:txBody>
+                  <a:tcPr>
+                    <a:solidFill>
+                      <a:srgbClr val="FFFFFF"/>
+                    </a:solidFill>
+                  </a:tcPr>
+                </a:tc>
+                <a:tc>
+                  <a:txBody>
+                    <a:bodyPr wrap="square"/>
+                    <a:lstStyle/>
+                    <a:p>
+                      <a:r>
+                        <a:rPr sz="1100" b="0">
+                          <a:solidFill>
+                            <a:srgbClr val="1A1A1A"/>
+                          </a:solidFill>
+                          <a:latin typeface="Arial"/>
+                        </a:rPr>
+                        <a:t>21 %</a:t>
+                      </a:r>
+                    </a:p>
+                  </a:txBody>
+                  <a:tcPr>
+                    <a:solidFill>
+                      <a:srgbClr val="FFFFFF"/>
+                    </a:solidFill>
+                  </a:tcPr>
+                </a:tc>
+                <a:tc>
+                  <a:txBody>
+                    <a:bodyPr wrap="square"/>
+                    <a:lstStyle/>
+                    <a:p>
+                      <a:r>
+                        <a:rPr sz="1100" b="0">
+                          <a:solidFill>
+                            <a:srgbClr val="1A1A1A"/>
+                          </a:solidFill>
+                          <a:latin typeface="Arial"/>
+                        </a:rPr>
+                        <a:t>Ø 18–24 %</a:t>
+                      </a:r>
+                    </a:p>
+                  </a:txBody>
+                  <a:tcPr>
+                    <a:solidFill>
+                      <a:srgbClr val="FFFFFF"/>
+                    </a:solidFill>
+                  </a:tcPr>
+                </a:tc>
+              </a:tr>
+              <a:tr h="475488">
+                <a:tc>
+                  <a:txBody>
+                    <a:bodyPr wrap="square"/>
+                    <a:lstStyle/>
+                    <a:p>
+                      <a:r>
+                        <a:rPr sz="1100" b="0">
+                          <a:solidFill>
+                            <a:srgbClr val="1A1A1A"/>
+                          </a:solidFill>
+                          <a:latin typeface="Arial"/>
+                        </a:rPr>
+                        <a:t>Jahresumsatz</a:t>
+                      </a:r>
+                    </a:p>
+                  </a:txBody>
+                  <a:tcPr>
+                    <a:solidFill>
+                      <a:srgbClr val="F4F6FA"/>
+                    </a:solidFill>
+                  </a:tcPr>
+                </a:tc>
+                <a:tc>
+                  <a:txBody>
+                    <a:bodyPr wrap="square"/>
+                    <a:lstStyle/>
+                    <a:p>
+                      <a:r>
+                        <a:rPr sz="1100" b="0">
+                          <a:solidFill>
+                            <a:srgbClr val="1A1A1A"/>
+                          </a:solidFill>
+                          <a:latin typeface="Arial"/>
+                        </a:rPr>
+                        <a:t>1,8 Mio. EUR</a:t>
+                      </a:r>
+                    </a:p>
+                  </a:txBody>
+                  <a:tcPr>
+                    <a:solidFill>
+                      <a:srgbClr val="F4F6FA"/>
+                    </a:solidFill>
+                  </a:tcPr>
+                </a:tc>
+                <a:tc>
+                  <a:txBody>
+                    <a:bodyPr wrap="square"/>
+                    <a:lstStyle/>
+                    <a:p>
+                      <a:r>
+                        <a:rPr sz="1100" b="0">
+                          <a:solidFill>
+                            <a:srgbClr val="1A1A1A"/>
+                          </a:solidFill>
+                          <a:latin typeface="Arial"/>
+                        </a:rPr>
+                        <a:t>–</a:t>
+                      </a:r>
+                    </a:p>
+                  </a:txBody>
+                  <a:tcPr>
+                    <a:solidFill>
+                      <a:srgbClr val="F4F6FA"/>
+                    </a:solidFill>
+                  </a:tcPr>
+                </a:tc>
+              </a:tr>
+              <a:tr h="475488">
+                <a:tc>
+                  <a:txBody>
+                    <a:bodyPr wrap="square"/>
+                    <a:lstStyle/>
+                    <a:p>
+                      <a:r>
+                        <a:rPr sz="1100" b="0">
+                          <a:solidFill>
+                            <a:srgbClr val="1A1A1A"/>
+                          </a:solidFill>
+                          <a:latin typeface="Arial"/>
+                        </a:rPr>
+                        <a:t>Beschäftigte</a:t>
+                      </a:r>
+                    </a:p>
+                  </a:txBody>
+                  <a:tcPr>
+                    <a:solidFill>
+                      <a:srgbClr val="FFFFFF"/>
+                    </a:solidFill>
+                  </a:tcPr>
+                </a:tc>
+                <a:tc>
+                  <a:txBody>
+                    <a:bodyPr wrap="square"/>
+                    <a:lstStyle/>
+                    <a:p>
+                      <a:r>
+                        <a:rPr sz="1100" b="0">
+                          <a:solidFill>
+                            <a:srgbClr val="1A1A1A"/>
+                          </a:solidFill>
+                          <a:latin typeface="Arial"/>
+                        </a:rPr>
+                        <a:t>8</a:t>
+                      </a:r>
+                    </a:p>
+                  </a:txBody>
+                  <a:tcPr>
+                    <a:solidFill>
+                      <a:srgbClr val="FFFFFF"/>
+                    </a:solidFill>
+                  </a:tcPr>
+                </a:tc>
+                <a:tc>
+                  <a:txBody>
+                    <a:bodyPr wrap="square"/>
+                    <a:lstStyle/>
+                    <a:p>
+                      <a:r>
+                        <a:rPr sz="1100" b="0">
+                          <a:solidFill>
+                            <a:srgbClr val="1A1A1A"/>
+                          </a:solidFill>
+                          <a:latin typeface="Arial"/>
+                        </a:rPr>
+                        <a:t>–</a:t>
+                      </a:r>
+                    </a:p>
+                  </a:txBody>
+                  <a:tcPr>
+                    <a:solidFill>
+                      <a:srgbClr val="FFFFFF"/>
+                    </a:solidFill>
+                  </a:tcPr>
+                </a:tc>
+              </a:tr>
+              <a:tr h="475488">
+                <a:tc>
+                  <a:txBody>
+                    <a:bodyPr wrap="square"/>
+                    <a:lstStyle/>
+                    <a:p>
+                      <a:r>
+                        <a:rPr sz="1100" b="0">
+                          <a:solidFill>
+                            <a:srgbClr val="1A1A1A"/>
+                          </a:solidFill>
+                          <a:latin typeface="Arial"/>
+                        </a:rPr>
+                        <a:t>Umsatzrendite (vor Steuern)</a:t>
+                      </a:r>
+                    </a:p>
+                  </a:txBody>
+                  <a:tcPr>
+                    <a:solidFill>
+                      <a:srgbClr val="F4F6FA"/>
+                    </a:solidFill>
+                  </a:tcPr>
+                </a:tc>
+                <a:tc>
+                  <a:txBody>
+                    <a:bodyPr wrap="square"/>
+                    <a:lstStyle/>
+                    <a:p>
+                      <a:r>
+                        <a:rPr sz="1100" b="0">
+                          <a:solidFill>
+                            <a:srgbClr val="1A1A1A"/>
+                          </a:solidFill>
+                          <a:latin typeface="Arial"/>
+                        </a:rPr>
+                        <a:t>5,2 %</a:t>
+                      </a:r>
+                    </a:p>
+                  </a:txBody>
+                  <a:tcPr>
+                    <a:solidFill>
+                      <a:srgbClr val="F4F6FA"/>
+                    </a:solidFill>
+                  </a:tcPr>
+                </a:tc>
+                <a:tc>
+                  <a:txBody>
+                    <a:bodyPr wrap="square"/>
+                    <a:lstStyle/>
+                    <a:p>
+                      <a:r>
+                        <a:rPr sz="1100" b="0">
+                          <a:solidFill>
+                            <a:srgbClr val="1A1A1A"/>
+                          </a:solidFill>
+                          <a:latin typeface="Arial"/>
+                        </a:rPr>
+                        <a:t>Ø 4–7 %</a:t>
+                      </a:r>
+                    </a:p>
+                  </a:txBody>
+                  <a:tcPr>
+                    <a:solidFill>
+                      <a:srgbClr val="F4F6FA"/>
+                    </a:solidFill>
+                  </a:tcPr>
+                </a:tc>
+              </a:tr>
+              <a:tr h="475488">
+                <a:tc>
+                  <a:txBody>
+                    <a:bodyPr wrap="square"/>
+                    <a:lstStyle/>
+                    <a:p>
+                      <a:r>
+                        <a:rPr sz="1100" b="0">
+                          <a:solidFill>
+                            <a:srgbClr val="1A1A1A"/>
+                          </a:solidFill>
+                          <a:latin typeface="Arial"/>
+                        </a:rPr>
+                        <a:t>Fremdkapitalquote</a:t>
+                      </a:r>
+                    </a:p>
+                  </a:txBody>
+                  <a:tcPr>
+                    <a:solidFill>
+                      <a:srgbClr val="FFFFFF"/>
+                    </a:solidFill>
+                  </a:tcPr>
+                </a:tc>
+                <a:tc>
+                  <a:txBody>
+                    <a:bodyPr wrap="square"/>
+                    <a:lstStyle/>
+                    <a:p>
+                      <a:r>
+                        <a:rPr sz="1100" b="0">
+                          <a:solidFill>
+                            <a:srgbClr val="1A1A1A"/>
+                          </a:solidFill>
+                          <a:latin typeface="Arial"/>
+                        </a:rPr>
+                        <a:t>79 %</a:t>
+                      </a:r>
+                    </a:p>
+                  </a:txBody>
+                  <a:tcPr>
+                    <a:solidFill>
+                      <a:srgbClr val="FFFFFF"/>
+                    </a:solidFill>
+                  </a:tcPr>
+                </a:tc>
+                <a:tc>
+                  <a:txBody>
+                    <a:bodyPr wrap="square"/>
+                    <a:lstStyle/>
+                    <a:p>
+                      <a:r>
+                        <a:rPr sz="1100" b="0">
+                          <a:solidFill>
+                            <a:srgbClr val="1A1A1A"/>
+                          </a:solidFill>
+                          <a:latin typeface="Arial"/>
+                        </a:rPr>
+                        <a:t>Ø 76–82 %</a:t>
+                      </a:r>
+                    </a:p>
+                  </a:txBody>
+                  <a:tcPr>
+                    <a:solidFill>
+                      <a:srgbClr val="FFFFFF"/>
+                    </a:solidFill>
+                  </a:tcPr>
+                </a:tc>
+              </a:tr>
+            </a:tbl>
+          </a:graphicData>
+        </a:graphic>
+      </p:graphicFrame>
+    </p:spTree>
+  </p:cSld>
+  <p:clrMapOvr>
+    <a:masterClrMapping/>
+  </p:clrMapOvr>
+</p:sld>
+</file>
+
+<file path=ppt/slides/slide23.xml><?xml version="1.0" encoding="utf-8"?>
+<p:sld xmlns:a="http://schemas.openxmlformats.org/drawingml/2006/main" xmlns:p="http://schemas.openxmlformats.org/presentationml/2006/main" xmlns:r="http://schemas.openxmlformats.org/officeDocument/2006/relationships">
+  <p:cSld>
+    <p:bg>
+      <p:bgPr>
+        <a:solidFill>
+          <a:srgbClr val="FFFFFF"/>
+        </a:solidFill>
+        <a:effectLst/>
+      </p:bgPr>
+    </p:bg>
+    <p:spTree>
+      <p:nvGrpSpPr>
+        <p:cNvPr id="1" name=""/>
+        <p:cNvGrpSpPr/>
+        <p:nvPr/>
+      </p:nvGrpSpPr>
+      <p:grpSpPr/>
+      <p:sp>
+        <p:nvSpPr>
+          <p:cNvPr id="2" name="Rectangle 1"/>
+          <p:cNvSpPr/>
+          <p:nvPr/>
+        </p:nvSpPr>
+        <p:spPr>
+          <a:xfrm>
+            <a:off x="0" y="0"/>
+            <a:ext cx="73152" cy="6858000"/>
+          </a:xfrm>
+          <a:prstGeom prst="rect">
+            <a:avLst/>
+          </a:prstGeom>
+          <a:solidFill>
+            <a:srgbClr val="003DA5"/>
+          </a:solidFill>
+          <a:ln>
+            <a:noFill/>
+          </a:ln>
+        </p:spPr>
+        <p:style>
+          <a:lnRef idx="1">
+            <a:schemeClr val="accent1"/>
+          </a:lnRef>
+          <a:fillRef idx="3">
+            <a:schemeClr val="accent1"/>
+          </a:fillRef>
+          <a:effectRef idx="2">
+            <a:schemeClr val="accent1"/>
+          </a:effectRef>
+          <a:fontRef idx="minor">
+            <a:schemeClr val="lt1"/>
+          </a:fontRef>
+        </p:style>
+        <p:txBody>
+          <a:bodyPr rtlCol="0" anchor="ctr"/>
+          <a:lstStyle/>
+          <a:p>
+            <a:pPr algn="ctr"/>
+          </a:p>
+        </p:txBody>
+      </p:sp>
+      <p:sp>
+        <p:nvSpPr>
+          <p:cNvPr id="3" name="TextBox 2"/>
+          <p:cNvSpPr txBox="1"/>
+          <p:nvPr/>
+        </p:nvSpPr>
+        <p:spPr>
+          <a:xfrm>
+            <a:off x="228600" y="182880"/>
+            <a:ext cx="11430000" cy="320040"/>
+          </a:xfrm>
+          <a:prstGeom prst="rect">
+            <a:avLst/>
+          </a:prstGeom>
+          <a:noFill/>
+        </p:spPr>
+        <p:txBody>
+          <a:bodyPr wrap="square">
+            <a:spAutoFit/>
+          </a:bodyPr>
+          <a:lstStyle/>
+          <a:p>
+            <a:pPr algn="l"/>
+            <a:r>
+              <a:rPr sz="900" b="0" i="0">
+                <a:solidFill>
+                  <a:srgbClr val="556575"/>
+                </a:solidFill>
+                <a:latin typeface="Arial"/>
+              </a:rPr>
+              <a:t>M06 · Modulinhalte</a:t>
+            </a:r>
+          </a:p>
+        </p:txBody>
+      </p:sp>
+      <p:sp>
+        <p:nvSpPr>
+          <p:cNvPr id="4" name="TextBox 3"/>
+          <p:cNvSpPr txBox="1"/>
+          <p:nvPr/>
+        </p:nvSpPr>
+        <p:spPr>
+          <a:xfrm>
+            <a:off x="365760" y="274320"/>
+            <a:ext cx="11430000" cy="777240"/>
+          </a:xfrm>
+          <a:prstGeom prst="rect">
+            <a:avLst/>
+          </a:prstGeom>
+          <a:noFill/>
+        </p:spPr>
+        <p:txBody>
+          <a:bodyPr wrap="square">
+            <a:spAutoFit/>
+          </a:bodyPr>
+          <a:lstStyle/>
+          <a:p>
+            <a:pPr algn="l"/>
+            <a:r>
+              <a:rPr sz="2200" b="1" i="0">
+                <a:solidFill>
+                  <a:srgbClr val="003DA5"/>
+                </a:solidFill>
+                <a:latin typeface="Arial"/>
+              </a:rPr>
+              <a:t>Aufgaben</a:t>
+            </a:r>
+          </a:p>
+        </p:txBody>
+      </p:sp>
+      <p:sp>
+        <p:nvSpPr>
+          <p:cNvPr id="5" name="Rectangle 4"/>
+          <p:cNvSpPr/>
+          <p:nvPr/>
+        </p:nvSpPr>
+        <p:spPr>
+          <a:xfrm>
+            <a:off x="365760" y="1005840"/>
+            <a:ext cx="11430000" cy="27432"/>
+          </a:xfrm>
+          <a:prstGeom prst="rect">
+            <a:avLst/>
+          </a:prstGeom>
+          <a:solidFill>
+            <a:srgbClr val="D1D5DB"/>
+          </a:solidFill>
+          <a:ln>
+            <a:noFill/>
+          </a:ln>
+        </p:spPr>
+        <p:style>
+          <a:lnRef idx="1">
+            <a:schemeClr val="accent1"/>
+          </a:lnRef>
+          <a:fillRef idx="3">
+            <a:schemeClr val="accent1"/>
+          </a:fillRef>
+          <a:effectRef idx="2">
+            <a:schemeClr val="accent1"/>
+          </a:effectRef>
+          <a:fontRef idx="minor">
+            <a:schemeClr val="lt1"/>
+          </a:fontRef>
+        </p:style>
+        <p:txBody>
+          <a:bodyPr rtlCol="0" anchor="ctr"/>
+          <a:lstStyle/>
+          <a:p>
+            <a:pPr algn="ctr"/>
+          </a:p>
+        </p:txBody>
+      </p:sp>
+      <p:sp>
+        <p:nvSpPr>
+          <p:cNvPr id="6" name="TextBox 5"/>
+          <p:cNvSpPr txBox="1"/>
+          <p:nvPr/>
+        </p:nvSpPr>
+        <p:spPr>
+          <a:xfrm>
+            <a:off x="365760" y="1143000"/>
+            <a:ext cx="11430000" cy="5212080"/>
+          </a:xfrm>
+          <a:prstGeom prst="rect">
+            <a:avLst/>
+          </a:prstGeom>
+          <a:noFill/>
+        </p:spPr>
+        <p:txBody>
+          <a:bodyPr wrap="square">
+            <a:spAutoFit/>
+          </a:bodyPr>
+          <a:lstStyle/>
+          <a:p>
+            <a:pPr>
+              <a:spcBef>
+                <a:spcPts val="500"/>
+              </a:spcBef>
+            </a:pPr>
+            <a:r>
+              <a:rPr sz="1500">
+                <a:solidFill>
+                  <a:srgbClr val="003DA5"/>
+                </a:solidFill>
+                <a:latin typeface="Arial"/>
+              </a:rPr>
+              <a:t>▪  </a:t>
+            </a:r>
+            <a:r>
+              <a:rPr sz="1700" b="1">
+                <a:solidFill>
+                  <a:srgbClr val="003DA5"/>
+                </a:solidFill>
+                <a:latin typeface="Arial"/>
+              </a:rPr>
+              <a:t>Aufgabe 1 – Klassifizierung (LZ-1): </a:t>
+            </a:r>
+            <a:r>
+              <a:rPr sz="1700">
+                <a:solidFill>
+                  <a:srgbClr val="1A1A1A"/>
+                </a:solidFill>
+                <a:latin typeface="Arial"/>
+              </a:rPr>
+              <a:t>Prüfen Sie: Handelt es sich bei Bergmann Holzmanufaktur um ein KMU nach IfM-Bonn-Definition? Um welche Kategorie handelt es sich nach EU-Definition (Kleinstunternehmen /…</a:t>
+            </a:r>
+          </a:p>
+          <a:p>
+            <a:pPr>
+              <a:spcBef>
+                <a:spcPts val="500"/>
+              </a:spcBef>
+            </a:pPr>
+            <a:r>
+              <a:rPr sz="1500">
+                <a:solidFill>
+                  <a:srgbClr val="003DA5"/>
+                </a:solidFill>
+                <a:latin typeface="Arial"/>
+              </a:rPr>
+              <a:t>▪  </a:t>
+            </a:r>
+            <a:r>
+              <a:rPr sz="1700" b="1">
+                <a:solidFill>
+                  <a:srgbClr val="003DA5"/>
+                </a:solidFill>
+                <a:latin typeface="Arial"/>
+              </a:rPr>
+              <a:t>Aufgabe 2 – Typologisierung und Risikofelder (LZ-2/LZ-3): </a:t>
+            </a:r>
+            <a:r>
+              <a:rPr sz="1700">
+                <a:solidFill>
+                  <a:srgbClr val="1A1A1A"/>
+                </a:solidFill>
+                <a:latin typeface="Arial"/>
+              </a:rPr>
+              <a:t>Welchem der fünf Branchenprofile (A–E) entspricht Bergmann Holzmanufaktur am ehesten? Welche typischen Risikofelder sind für diesen Betrieb zu erwarten? Nennen Sie mindestens 3…</a:t>
+            </a:r>
+          </a:p>
+          <a:p>
+            <a:pPr>
+              <a:spcBef>
+                <a:spcPts val="500"/>
+              </a:spcBef>
+            </a:pPr>
+            <a:r>
+              <a:rPr sz="1500">
+                <a:solidFill>
+                  <a:srgbClr val="003DA5"/>
+                </a:solidFill>
+                <a:latin typeface="Arial"/>
+              </a:rPr>
+              <a:t>▪  </a:t>
+            </a:r>
+            <a:r>
+              <a:rPr sz="1700" b="1">
+                <a:solidFill>
+                  <a:srgbClr val="003DA5"/>
+                </a:solidFill>
+                <a:latin typeface="Arial"/>
+              </a:rPr>
+              <a:t>Aufgabe 3 – 5-Fragen-Schema anwenden (LZ-4): </a:t>
+            </a:r>
+            <a:r>
+              <a:rPr sz="1700">
+                <a:solidFill>
+                  <a:srgbClr val="1A1A1A"/>
+                </a:solidFill>
+                <a:latin typeface="Arial"/>
+              </a:rPr>
+              <a:t>Formulieren Sie die 5 Einstiegsfragen für das Gespräch mit Sabine Bergmann konkret auf diesen Betrieb zugeschnitten (nicht die generischen Musterfragen, sondern angepasste…</a:t>
+            </a:r>
+          </a:p>
+          <a:p>
+            <a:pPr>
+              <a:spcBef>
+                <a:spcPts val="500"/>
+              </a:spcBef>
+            </a:pPr>
+            <a:r>
+              <a:rPr sz="1500">
+                <a:solidFill>
+                  <a:srgbClr val="003DA5"/>
+                </a:solidFill>
+                <a:latin typeface="Arial"/>
+              </a:rPr>
+              <a:t>▪  </a:t>
+            </a:r>
+            <a:r>
+              <a:rPr sz="1700" b="1">
+                <a:solidFill>
+                  <a:srgbClr val="003DA5"/>
+                </a:solidFill>
+                <a:latin typeface="Arial"/>
+              </a:rPr>
+              <a:t>Aufgabe 4 – Kreditvorbereitung: KK-Analyse (LZ-3): </a:t>
+            </a:r>
+            <a:r>
+              <a:rPr sz="1700">
+                <a:solidFill>
+                  <a:srgbClr val="1A1A1A"/>
+                </a:solidFill>
+                <a:latin typeface="Arial"/>
+              </a:rPr>
+              <a:t>Die Kontokorrentlinie von Bergmann Holzmanufaktur ist aktuell zu 71 % ausgeschöpft (56.800 EUR von 80.000 EUR). Die Kundin beantragt zusätzlich einen Investitionskredit über…</a:t>
+            </a:r>
+          </a:p>
+        </p:txBody>
+      </p:sp>
+    </p:spTree>
+  </p:cSld>
+  <p:clrMapOvr>
+    <a:masterClrMapping/>
+  </p:clrMapOvr>
+</p:sld>
+</file>
+
+<file path=ppt/slides/slide24.xml><?xml version="1.0" encoding="utf-8"?>
+<p:sld xmlns:a="http://schemas.openxmlformats.org/drawingml/2006/main" xmlns:p="http://schemas.openxmlformats.org/presentationml/2006/main" xmlns:r="http://schemas.openxmlformats.org/officeDocument/2006/relationships">
+  <p:cSld>
+    <p:bg>
+      <p:bgPr>
+        <a:solidFill>
+          <a:srgbClr val="1A1A1A"/>
+        </a:solidFill>
+        <a:effectLst/>
+      </p:bgPr>
+    </p:bg>
+    <p:spTree>
+      <p:nvGrpSpPr>
+        <p:cNvPr id="1" name=""/>
+        <p:cNvGrpSpPr/>
+        <p:nvPr/>
+      </p:nvGrpSpPr>
+      <p:grpSpPr/>
+      <p:sp>
+        <p:nvSpPr>
+          <p:cNvPr id="2" name="Rectangle 1"/>
+          <p:cNvSpPr/>
+          <p:nvPr/>
+        </p:nvSpPr>
+        <p:spPr>
+          <a:xfrm>
+            <a:off x="0" y="0"/>
+            <a:ext cx="73152" cy="6858000"/>
+          </a:xfrm>
+          <a:prstGeom prst="rect">
+            <a:avLst/>
+          </a:prstGeom>
+          <a:solidFill>
+            <a:srgbClr val="E05B00"/>
+          </a:solidFill>
+          <a:ln>
+            <a:noFill/>
+          </a:ln>
+        </p:spPr>
+        <p:style>
+          <a:lnRef idx="1">
+            <a:schemeClr val="accent1"/>
+          </a:lnRef>
+          <a:fillRef idx="3">
+            <a:schemeClr val="accent1"/>
+          </a:fillRef>
+          <a:effectRef idx="2">
+            <a:schemeClr val="accent1"/>
+          </a:effectRef>
+          <a:fontRef idx="minor">
+            <a:schemeClr val="lt1"/>
+          </a:fontRef>
+        </p:style>
+        <p:txBody>
+          <a:bodyPr rtlCol="0" anchor="ctr"/>
+          <a:lstStyle/>
+          <a:p>
+            <a:pPr algn="ctr"/>
+          </a:p>
+        </p:txBody>
+      </p:sp>
+      <p:sp>
+        <p:nvSpPr>
+          <p:cNvPr id="3" name="TextBox 2"/>
+          <p:cNvSpPr txBox="1"/>
+          <p:nvPr/>
+        </p:nvSpPr>
+        <p:spPr>
+          <a:xfrm>
+            <a:off x="365760" y="2011680"/>
+            <a:ext cx="11430000" cy="2011680"/>
+          </a:xfrm>
+          <a:prstGeom prst="rect">
+            <a:avLst/>
+          </a:prstGeom>
+          <a:noFill/>
+        </p:spPr>
+        <p:txBody>
+          <a:bodyPr wrap="square">
+            <a:spAutoFit/>
+          </a:bodyPr>
+          <a:lstStyle/>
+          <a:p>
+            <a:pPr algn="l"/>
+            <a:r>
+              <a:rPr sz="3600" b="1" i="0">
+                <a:solidFill>
+                  <a:srgbClr val="FFFFFF"/>
+                </a:solidFill>
+                <a:latin typeface="Arial"/>
+              </a:rPr>
+              <a:t>4.5 Reflexionsfragen</a:t>
+            </a:r>
+          </a:p>
+        </p:txBody>
+      </p:sp>
+    </p:spTree>
+  </p:cSld>
+  <p:clrMapOvr>
+    <a:masterClrMapping/>
+  </p:clrMapOvr>
+</p:sld>
+</file>
+
+<file path=ppt/slides/slide25.xml><?xml version="1.0" encoding="utf-8"?>
+<p:sld xmlns:a="http://schemas.openxmlformats.org/drawingml/2006/main" xmlns:p="http://schemas.openxmlformats.org/presentationml/2006/main" xmlns:r="http://schemas.openxmlformats.org/officeDocument/2006/relationships">
+  <p:cSld>
+    <p:bg>
+      <p:bgPr>
+        <a:solidFill>
+          <a:srgbClr val="FFFFFF"/>
+        </a:solidFill>
+        <a:effectLst/>
+      </p:bgPr>
+    </p:bg>
+    <p:spTree>
+      <p:nvGrpSpPr>
+        <p:cNvPr id="1" name=""/>
+        <p:cNvGrpSpPr/>
+        <p:nvPr/>
+      </p:nvGrpSpPr>
+      <p:grpSpPr/>
+      <p:sp>
+        <p:nvSpPr>
+          <p:cNvPr id="2" name="Rectangle 1"/>
+          <p:cNvSpPr/>
+          <p:nvPr/>
+        </p:nvSpPr>
+        <p:spPr>
+          <a:xfrm>
+            <a:off x="0" y="0"/>
+            <a:ext cx="73152" cy="6858000"/>
+          </a:xfrm>
+          <a:prstGeom prst="rect">
+            <a:avLst/>
+          </a:prstGeom>
+          <a:solidFill>
+            <a:srgbClr val="003DA5"/>
+          </a:solidFill>
+          <a:ln>
+            <a:noFill/>
+          </a:ln>
+        </p:spPr>
+        <p:style>
+          <a:lnRef idx="1">
+            <a:schemeClr val="accent1"/>
+          </a:lnRef>
+          <a:fillRef idx="3">
+            <a:schemeClr val="accent1"/>
+          </a:fillRef>
+          <a:effectRef idx="2">
+            <a:schemeClr val="accent1"/>
+          </a:effectRef>
+          <a:fontRef idx="minor">
+            <a:schemeClr val="lt1"/>
+          </a:fontRef>
+        </p:style>
+        <p:txBody>
+          <a:bodyPr rtlCol="0" anchor="ctr"/>
+          <a:lstStyle/>
+          <a:p>
+            <a:pPr algn="ctr"/>
+          </a:p>
+        </p:txBody>
+      </p:sp>
+      <p:sp>
+        <p:nvSpPr>
+          <p:cNvPr id="3" name="TextBox 2"/>
+          <p:cNvSpPr txBox="1"/>
+          <p:nvPr/>
+        </p:nvSpPr>
+        <p:spPr>
+          <a:xfrm>
+            <a:off x="228600" y="182880"/>
+            <a:ext cx="11430000" cy="320040"/>
+          </a:xfrm>
+          <a:prstGeom prst="rect">
+            <a:avLst/>
+          </a:prstGeom>
+          <a:noFill/>
+        </p:spPr>
+        <p:txBody>
+          <a:bodyPr wrap="square">
+            <a:spAutoFit/>
+          </a:bodyPr>
+          <a:lstStyle/>
+          <a:p>
+            <a:pPr algn="l"/>
+            <a:r>
+              <a:rPr sz="900" b="0" i="0">
+                <a:solidFill>
+                  <a:srgbClr val="556575"/>
+                </a:solidFill>
+                <a:latin typeface="Arial"/>
+              </a:rPr>
+              <a:t>M06 · Modulinhalte</a:t>
+            </a:r>
+          </a:p>
+        </p:txBody>
+      </p:sp>
+      <p:sp>
+        <p:nvSpPr>
+          <p:cNvPr id="4" name="TextBox 3"/>
+          <p:cNvSpPr txBox="1"/>
+          <p:nvPr/>
+        </p:nvSpPr>
+        <p:spPr>
+          <a:xfrm>
+            <a:off x="365760" y="274320"/>
+            <a:ext cx="11430000" cy="777240"/>
+          </a:xfrm>
+          <a:prstGeom prst="rect">
+            <a:avLst/>
+          </a:prstGeom>
+          <a:noFill/>
+        </p:spPr>
+        <p:txBody>
+          <a:bodyPr wrap="square">
+            <a:spAutoFit/>
+          </a:bodyPr>
+          <a:lstStyle/>
+          <a:p>
+            <a:pPr algn="l"/>
+            <a:r>
+              <a:rPr sz="2200" b="1" i="0">
+                <a:solidFill>
+                  <a:srgbClr val="003DA5"/>
+                </a:solidFill>
+                <a:latin typeface="Arial"/>
+              </a:rPr>
+              <a:t>4.5 Reflexionsfragen</a:t>
+            </a:r>
+          </a:p>
+        </p:txBody>
+      </p:sp>
+      <p:sp>
+        <p:nvSpPr>
+          <p:cNvPr id="5" name="Rectangle 4"/>
+          <p:cNvSpPr/>
+          <p:nvPr/>
+        </p:nvSpPr>
+        <p:spPr>
+          <a:xfrm>
+            <a:off x="365760" y="1005840"/>
+            <a:ext cx="11430000" cy="27432"/>
+          </a:xfrm>
+          <a:prstGeom prst="rect">
+            <a:avLst/>
+          </a:prstGeom>
+          <a:solidFill>
+            <a:srgbClr val="D1D5DB"/>
+          </a:solidFill>
+          <a:ln>
+            <a:noFill/>
+          </a:ln>
+        </p:spPr>
+        <p:style>
+          <a:lnRef idx="1">
+            <a:schemeClr val="accent1"/>
+          </a:lnRef>
+          <a:fillRef idx="3">
+            <a:schemeClr val="accent1"/>
+          </a:fillRef>
+          <a:effectRef idx="2">
+            <a:schemeClr val="accent1"/>
+          </a:effectRef>
+          <a:fontRef idx="minor">
+            <a:schemeClr val="lt1"/>
+          </a:fontRef>
+        </p:style>
+        <p:txBody>
+          <a:bodyPr rtlCol="0" anchor="ctr"/>
+          <a:lstStyle/>
+          <a:p>
+            <a:pPr algn="ctr"/>
+          </a:p>
+        </p:txBody>
+      </p:sp>
+      <p:sp>
+        <p:nvSpPr>
+          <p:cNvPr id="6" name="Rectangle 5"/>
+          <p:cNvSpPr/>
+          <p:nvPr/>
+        </p:nvSpPr>
+        <p:spPr>
+          <a:xfrm>
+            <a:off x="365760" y="1188720"/>
+            <a:ext cx="457200" cy="411480"/>
+          </a:xfrm>
+          <a:prstGeom prst="rect">
+            <a:avLst/>
+          </a:prstGeom>
+          <a:solidFill>
+            <a:srgbClr val="003DA5"/>
+          </a:solidFill>
+          <a:ln>
+            <a:noFill/>
+          </a:ln>
+        </p:spPr>
+        <p:style>
+          <a:lnRef idx="1">
+            <a:schemeClr val="accent1"/>
+          </a:lnRef>
+          <a:fillRef idx="3">
+            <a:schemeClr val="accent1"/>
+          </a:fillRef>
+          <a:effectRef idx="2">
+            <a:schemeClr val="accent1"/>
+          </a:effectRef>
+          <a:fontRef idx="minor">
+            <a:schemeClr val="lt1"/>
+          </a:fontRef>
+        </p:style>
+        <p:txBody>
+          <a:bodyPr rtlCol="0" anchor="ctr"/>
+          <a:lstStyle/>
+          <a:p>
+            <a:pPr algn="ctr"/>
+          </a:p>
+        </p:txBody>
+      </p:sp>
+      <p:sp>
+        <p:nvSpPr>
+          <p:cNvPr id="7" name="TextBox 6"/>
+          <p:cNvSpPr txBox="1"/>
+          <p:nvPr/>
+        </p:nvSpPr>
+        <p:spPr>
+          <a:xfrm>
+            <a:off x="365760" y="1188720"/>
+            <a:ext cx="457200" cy="411480"/>
+          </a:xfrm>
+          <a:prstGeom prst="rect">
+            <a:avLst/>
+          </a:prstGeom>
+          <a:noFill/>
+        </p:spPr>
+        <p:txBody>
+          <a:bodyPr wrap="square">
+            <a:spAutoFit/>
+          </a:bodyPr>
+          <a:lstStyle/>
+          <a:p>
+            <a:pPr algn="ctr"/>
+            <a:r>
+              <a:rPr sz="1400" b="1" i="0">
+                <a:solidFill>
+                  <a:srgbClr val="FFFFFF"/>
+                </a:solidFill>
+                <a:latin typeface="Arial"/>
+              </a:rPr>
+              <a:t>1</a:t>
+            </a:r>
+          </a:p>
+        </p:txBody>
+      </p:sp>
+      <p:sp>
+        <p:nvSpPr>
+          <p:cNvPr id="8" name="TextBox 7"/>
+          <p:cNvSpPr txBox="1"/>
+          <p:nvPr/>
+        </p:nvSpPr>
+        <p:spPr>
+          <a:xfrm>
+            <a:off x="960120" y="1188720"/>
+            <a:ext cx="10698480" cy="502920"/>
+          </a:xfrm>
+          <a:prstGeom prst="rect">
+            <a:avLst/>
+          </a:prstGeom>
+          <a:noFill/>
+        </p:spPr>
+        <p:txBody>
+          <a:bodyPr wrap="square">
+            <a:spAutoFit/>
+          </a:bodyPr>
+          <a:lstStyle/>
+          <a:p>
+            <a:pPr algn="l"/>
+            <a:r>
+              <a:rPr sz="1500" b="0" i="0">
+                <a:solidFill>
+                  <a:srgbClr val="1A1A1A"/>
+                </a:solidFill>
+                <a:latin typeface="Arial"/>
+              </a:rPr>
+              <a:t>**Verstehen (Bloom 2)**: Warum ist die Inhaberabhängigkeit bei einem Handwerksbetrieb mit 8 Mitarbeitern ein strukturell höheres Risiko als bei einem Produktionsbetrieb mit 80 Mitarbeitern – was verändert sich mit zunehmender Betriebsgröße strukturell?</a:t>
+            </a:r>
+          </a:p>
+        </p:txBody>
+      </p:sp>
+      <p:sp>
+        <p:nvSpPr>
+          <p:cNvPr id="9" name="Rectangle 8"/>
+          <p:cNvSpPr/>
+          <p:nvPr/>
+        </p:nvSpPr>
+        <p:spPr>
+          <a:xfrm>
+            <a:off x="365760" y="1920240"/>
+            <a:ext cx="457200" cy="411480"/>
+          </a:xfrm>
+          <a:prstGeom prst="rect">
+            <a:avLst/>
+          </a:prstGeom>
+          <a:solidFill>
+            <a:srgbClr val="003DA5"/>
+          </a:solidFill>
+          <a:ln>
+            <a:noFill/>
+          </a:ln>
+        </p:spPr>
+        <p:style>
+          <a:lnRef idx="1">
+            <a:schemeClr val="accent1"/>
+          </a:lnRef>
+          <a:fillRef idx="3">
+            <a:schemeClr val="accent1"/>
+          </a:fillRef>
+          <a:effectRef idx="2">
+            <a:schemeClr val="accent1"/>
+          </a:effectRef>
+          <a:fontRef idx="minor">
+            <a:schemeClr val="lt1"/>
+          </a:fontRef>
+        </p:style>
+        <p:txBody>
+          <a:bodyPr rtlCol="0" anchor="ctr"/>
+          <a:lstStyle/>
+          <a:p>
+            <a:pPr algn="ctr"/>
+          </a:p>
+        </p:txBody>
+      </p:sp>
+      <p:sp>
+        <p:nvSpPr>
+          <p:cNvPr id="10" name="TextBox 9"/>
+          <p:cNvSpPr txBox="1"/>
+          <p:nvPr/>
+        </p:nvSpPr>
+        <p:spPr>
+          <a:xfrm>
+            <a:off x="365760" y="1920240"/>
+            <a:ext cx="457200" cy="411480"/>
+          </a:xfrm>
+          <a:prstGeom prst="rect">
+            <a:avLst/>
+          </a:prstGeom>
+          <a:noFill/>
+        </p:spPr>
+        <p:txBody>
+          <a:bodyPr wrap="square">
+            <a:spAutoFit/>
+          </a:bodyPr>
+          <a:lstStyle/>
+          <a:p>
+            <a:pPr algn="ctr"/>
+            <a:r>
+              <a:rPr sz="1400" b="1" i="0">
+                <a:solidFill>
+                  <a:srgbClr val="FFFFFF"/>
+                </a:solidFill>
+                <a:latin typeface="Arial"/>
+              </a:rPr>
+              <a:t>2</a:t>
+            </a:r>
+          </a:p>
+        </p:txBody>
+      </p:sp>
+      <p:sp>
+        <p:nvSpPr>
+          <p:cNvPr id="11" name="TextBox 10"/>
+          <p:cNvSpPr txBox="1"/>
+          <p:nvPr/>
+        </p:nvSpPr>
+        <p:spPr>
+          <a:xfrm>
+            <a:off x="960120" y="1920240"/>
+            <a:ext cx="10698480" cy="502920"/>
+          </a:xfrm>
+          <a:prstGeom prst="rect">
+            <a:avLst/>
+          </a:prstGeom>
+          <a:noFill/>
+        </p:spPr>
+        <p:txBody>
+          <a:bodyPr wrap="square">
+            <a:spAutoFit/>
+          </a:bodyPr>
+          <a:lstStyle/>
+          <a:p>
+            <a:pPr algn="l"/>
+            <a:r>
+              <a:rPr sz="1500" b="0" i="0">
+                <a:solidFill>
+                  <a:srgbClr val="1A1A1A"/>
+                </a:solidFill>
+                <a:latin typeface="Arial"/>
+              </a:rPr>
+              <a:t>**Anwenden (Bloom 3)**: Ein Kunde sagt Ihnen: "Wir sind kein KMU, wir sind ein mittelständisches Unternehmen." Wie reagieren Sie – was ist der begriffliche Unterschied, und was sagt das über die Selbstwahrnehmung des Inhabers?</a:t>
+            </a:r>
+          </a:p>
+        </p:txBody>
+      </p:sp>
+      <p:sp>
+        <p:nvSpPr>
+          <p:cNvPr id="12" name="Rectangle 11"/>
+          <p:cNvSpPr/>
+          <p:nvPr/>
+        </p:nvSpPr>
+        <p:spPr>
+          <a:xfrm>
+            <a:off x="365760" y="2651760"/>
+            <a:ext cx="457200" cy="411480"/>
+          </a:xfrm>
+          <a:prstGeom prst="rect">
+            <a:avLst/>
+          </a:prstGeom>
+          <a:solidFill>
+            <a:srgbClr val="003DA5"/>
+          </a:solidFill>
+          <a:ln>
+            <a:noFill/>
+          </a:ln>
+        </p:spPr>
+        <p:style>
+          <a:lnRef idx="1">
+            <a:schemeClr val="accent1"/>
+          </a:lnRef>
+          <a:fillRef idx="3">
+            <a:schemeClr val="accent1"/>
+          </a:fillRef>
+          <a:effectRef idx="2">
+            <a:schemeClr val="accent1"/>
+          </a:effectRef>
+          <a:fontRef idx="minor">
+            <a:schemeClr val="lt1"/>
+          </a:fontRef>
+        </p:style>
+        <p:txBody>
+          <a:bodyPr rtlCol="0" anchor="ctr"/>
+          <a:lstStyle/>
+          <a:p>
+            <a:pPr algn="ctr"/>
+          </a:p>
+        </p:txBody>
+      </p:sp>
+      <p:sp>
+        <p:nvSpPr>
+          <p:cNvPr id="13" name="TextBox 12"/>
+          <p:cNvSpPr txBox="1"/>
+          <p:nvPr/>
+        </p:nvSpPr>
+        <p:spPr>
+          <a:xfrm>
+            <a:off x="365760" y="2651760"/>
+            <a:ext cx="457200" cy="411480"/>
+          </a:xfrm>
+          <a:prstGeom prst="rect">
+            <a:avLst/>
+          </a:prstGeom>
+          <a:noFill/>
+        </p:spPr>
+        <p:txBody>
+          <a:bodyPr wrap="square">
+            <a:spAutoFit/>
+          </a:bodyPr>
+          <a:lstStyle/>
+          <a:p>
+            <a:pPr algn="ctr"/>
+            <a:r>
+              <a:rPr sz="1400" b="1" i="0">
+                <a:solidFill>
+                  <a:srgbClr val="FFFFFF"/>
+                </a:solidFill>
+                <a:latin typeface="Arial"/>
+              </a:rPr>
+              <a:t>3</a:t>
+            </a:r>
+          </a:p>
+        </p:txBody>
+      </p:sp>
+      <p:sp>
+        <p:nvSpPr>
+          <p:cNvPr id="14" name="TextBox 13"/>
+          <p:cNvSpPr txBox="1"/>
+          <p:nvPr/>
+        </p:nvSpPr>
+        <p:spPr>
+          <a:xfrm>
+            <a:off x="960120" y="2651760"/>
+            <a:ext cx="10698480" cy="502920"/>
+          </a:xfrm>
+          <a:prstGeom prst="rect">
+            <a:avLst/>
+          </a:prstGeom>
+          <a:noFill/>
+        </p:spPr>
+        <p:txBody>
+          <a:bodyPr wrap="square">
+            <a:spAutoFit/>
+          </a:bodyPr>
+          <a:lstStyle/>
+          <a:p>
+            <a:pPr algn="l"/>
+            <a:r>
+              <a:rPr sz="1500" b="0" i="0">
+                <a:solidFill>
+                  <a:srgbClr val="1A1A1A"/>
+                </a:solidFill>
+                <a:latin typeface="Arial"/>
+              </a:rPr>
+              <a:t>**Anwenden (Bloom 3)**: Bergmann Holzmanufaktur hat eine EK-Quote von 21 % – genau im Branchenmittel. Ein Kollege sagt: "Das ist unauffällig, kein Handlungsbedarf." Welche Informationen fehlen für eine vollständige Einschätzung? Was würden Sie als nächstes klären?</a:t>
+            </a:r>
+          </a:p>
+        </p:txBody>
+      </p:sp>
+    </p:spTree>
+  </p:cSld>
+  <p:clrMapOvr>
+    <a:masterClrMapping/>
+  </p:clrMapOvr>
+</p:sld>
+</file>
+
+<file path=ppt/slides/slide26.xml><?xml version="1.0" encoding="utf-8"?>
 <p:sld xmlns:a="http://schemas.openxmlformats.org/drawingml/2006/main" xmlns:p="http://schemas.openxmlformats.org/presentationml/2006/main" xmlns:r="http://schemas.openxmlformats.org/officeDocument/2006/relationships">
   <p:cSld>
     <p:bg>
@@ -5773,8 +9093,8 @@
         </p:nvSpPr>
         <p:spPr>
           <a:xfrm>
-            <a:off x="365760" y="365760"/>
-            <a:ext cx="5486400" cy="365760"/>
+            <a:off x="365760" y="347472"/>
+            <a:ext cx="7315200" cy="384048"/>
           </a:xfrm>
           <a:prstGeom prst="rect">
             <a:avLst/>
@@ -5789,62 +9109,27 @@
           <a:p>
             <a:pPr algn="l"/>
             <a:r>
-              <a:rPr sz="1000" b="1">
+              <a:rPr sz="900" b="1" i="0">
                 <a:solidFill>
                   <a:srgbClr val="CCD6F0"/>
                 </a:solidFill>
                 <a:latin typeface="Arial"/>
               </a:rPr>
-              <a:t>PRAXISTRANSFER</a:t>
-            </a:r>
-          </a:p>
-        </p:txBody>
-      </p:sp>
-      <p:sp>
-        <p:nvSpPr>
-          <p:cNvPr id="4" name="TextBox 3"/>
-          <p:cNvSpPr txBox="1"/>
-          <p:nvPr/>
-        </p:nvSpPr>
-        <p:spPr>
-          <a:xfrm>
-            <a:off x="365760" y="640080"/>
-            <a:ext cx="9144000" cy="914400"/>
-          </a:xfrm>
-          <a:prstGeom prst="rect">
-            <a:avLst/>
-          </a:prstGeom>
-          <a:noFill/>
-        </p:spPr>
-        <p:txBody>
-          <a:bodyPr wrap="square">
-            <a:spAutoFit/>
-          </a:bodyPr>
-          <a:lstStyle/>
-          <a:p>
-            <a:pPr algn="l"/>
-            <a:r>
-              <a:rPr sz="2800" b="1">
-                <a:solidFill>
-                  <a:srgbClr val="FFFFFF"/>
-                </a:solidFill>
-                <a:latin typeface="Arial"/>
-              </a:rPr>
-              <a:t>Was nehmen Sie mit?</a:t>
-            </a:r>
-          </a:p>
-        </p:txBody>
-      </p:sp>
-      <p:sp>
-        <p:nvSpPr>
-          <p:cNvPr id="5" name="Rectangle 4"/>
+              <a:t>PRAXISTRANSFER &amp; NÄCHSTE SCHRITTE</a:t>
+            </a:r>
+          </a:p>
+        </p:txBody>
+      </p:sp>
+      <p:sp>
+        <p:nvSpPr>
+          <p:cNvPr id="4" name="Rectangle 3"/>
           <p:cNvSpPr/>
           <p:nvPr/>
         </p:nvSpPr>
         <p:spPr>
           <a:xfrm>
-            <a:off x="365760" y="1463040"/>
-            <a:ext cx="7315200" cy="27432"/>
+            <a:off x="365760" y="804672"/>
+            <a:ext cx="8229600" cy="22860"/>
           </a:xfrm>
           <a:prstGeom prst="rect">
             <a:avLst/>
@@ -5880,14 +9165,14 @@
       </p:sp>
       <p:sp>
         <p:nvSpPr>
-          <p:cNvPr id="6" name="TextBox 5"/>
+          <p:cNvPr id="5" name="TextBox 4"/>
           <p:cNvSpPr txBox="1"/>
           <p:nvPr/>
         </p:nvSpPr>
         <p:spPr>
           <a:xfrm>
-            <a:off x="365760" y="1645920"/>
-            <a:ext cx="11430000" cy="4114800"/>
+            <a:off x="365760" y="960120"/>
+            <a:ext cx="9144000" cy="914400"/>
           </a:xfrm>
           <a:prstGeom prst="rect">
             <a:avLst/>
@@ -5900,67 +9185,29 @@
           </a:bodyPr>
           <a:lstStyle/>
           <a:p>
-            <a:pPr>
-              <a:spcBef>
-                <a:spcPts val="400"/>
-              </a:spcBef>
-            </a:pPr>
-            <a:r>
-              <a:rPr sz="1600">
-                <a:solidFill>
-                  <a:srgbClr val="E05B00"/>
-                </a:solidFill>
-                <a:latin typeface="Arial"/>
-              </a:rPr>
-              <a:t>▪  </a:t>
-            </a:r>
-            <a:r>
-              <a:rPr sz="1800">
+            <a:pPr algn="l"/>
+            <a:r>
+              <a:rPr sz="3000" b="1" i="0">
                 <a:solidFill>
                   <a:srgbClr val="FFFFFF"/>
                 </a:solidFill>
                 <a:latin typeface="Arial"/>
               </a:rPr>
-              <a:t>Transferaufgabe: Wenden Sie das Gelernte in den nächsten 14 Tagen bei einem konkreten Kunden an.</a:t>
-            </a:r>
-          </a:p>
-          <a:p>
-            <a:pPr>
-              <a:spcBef>
-                <a:spcPts val="400"/>
-              </a:spcBef>
-            </a:pPr>
-            <a:r>
-              <a:rPr sz="1600">
-                <a:solidFill>
-                  <a:srgbClr val="E05B00"/>
-                </a:solidFill>
-                <a:latin typeface="Arial"/>
-              </a:rPr>
-              <a:t>▪  </a:t>
-            </a:r>
-            <a:r>
-              <a:rPr sz="1800">
-                <a:solidFill>
-                  <a:srgbClr val="FFFFFF"/>
-                </a:solidFill>
-                <a:latin typeface="Arial"/>
-              </a:rPr>
-              <a:t>Selbstcheck nach 4 Wochen: Was hat sich verändert?</a:t>
-            </a:r>
-          </a:p>
-        </p:txBody>
-      </p:sp>
-      <p:sp>
-        <p:nvSpPr>
-          <p:cNvPr id="7" name="TextBox 6"/>
+              <a:t>Was nehmen Sie mit?</a:t>
+            </a:r>
+          </a:p>
+        </p:txBody>
+      </p:sp>
+      <p:sp>
+        <p:nvSpPr>
+          <p:cNvPr id="6" name="TextBox 5"/>
           <p:cNvSpPr txBox="1"/>
           <p:nvPr/>
         </p:nvSpPr>
         <p:spPr>
           <a:xfrm>
-            <a:off x="365760" y="6309360"/>
-            <a:ext cx="11430000" cy="365760"/>
+            <a:off x="365760" y="2103120"/>
+            <a:ext cx="11430000" cy="4114800"/>
           </a:xfrm>
           <a:prstGeom prst="rect">
             <a:avLst/>
@@ -5973,11 +9220,109 @@
           </a:bodyPr>
           <a:lstStyle/>
           <a:p>
+            <a:pPr>
+              <a:spcBef>
+                <a:spcPts val="500"/>
+              </a:spcBef>
+            </a:pPr>
+            <a:r>
+              <a:rPr sz="1600">
+                <a:solidFill>
+                  <a:srgbClr val="E05B00"/>
+                </a:solidFill>
+                <a:latin typeface="Arial"/>
+              </a:rPr>
+              <a:t>▪  </a:t>
+            </a:r>
+            <a:r>
+              <a:rPr sz="1800">
+                <a:solidFill>
+                  <a:srgbClr val="FFFFFF"/>
+                </a:solidFill>
+                <a:latin typeface="Arial"/>
+              </a:rPr>
+              <a:t>Transferaufgabe: Wenden Sie das Gelernte in den nächsten 14 Tagen bei einem konkreten Kunden an.</a:t>
+            </a:r>
+          </a:p>
+          <a:p>
+            <a:pPr>
+              <a:spcBef>
+                <a:spcPts val="500"/>
+              </a:spcBef>
+            </a:pPr>
+            <a:r>
+              <a:rPr sz="1600">
+                <a:solidFill>
+                  <a:srgbClr val="E05B00"/>
+                </a:solidFill>
+                <a:latin typeface="Arial"/>
+              </a:rPr>
+              <a:t>▪  </a:t>
+            </a:r>
+            <a:r>
+              <a:rPr sz="1800">
+                <a:solidFill>
+                  <a:srgbClr val="FFFFFF"/>
+                </a:solidFill>
+                <a:latin typeface="Arial"/>
+              </a:rPr>
+              <a:t>Selbstcheck nach 4 Wochen: Bewerten Sie Ihre Fortschritte ehrlich.</a:t>
+            </a:r>
+          </a:p>
+          <a:p>
+            <a:pPr>
+              <a:spcBef>
+                <a:spcPts val="500"/>
+              </a:spcBef>
+            </a:pPr>
+            <a:r>
+              <a:rPr sz="1600">
+                <a:solidFill>
+                  <a:srgbClr val="E05B00"/>
+                </a:solidFill>
+                <a:latin typeface="Arial"/>
+              </a:rPr>
+              <a:t>▪  </a:t>
+            </a:r>
+            <a:r>
+              <a:rPr sz="1800">
+                <a:solidFill>
+                  <a:srgbClr val="FFFFFF"/>
+                </a:solidFill>
+                <a:latin typeface="Arial"/>
+              </a:rPr>
+              <a:t>Nächste Module: M07, M08, M21</a:t>
+            </a:r>
+          </a:p>
+        </p:txBody>
+      </p:sp>
+      <p:sp>
+        <p:nvSpPr>
+          <p:cNvPr id="7" name="TextBox 6"/>
+          <p:cNvSpPr txBox="1"/>
+          <p:nvPr/>
+        </p:nvSpPr>
+        <p:spPr>
+          <a:xfrm>
+            <a:off x="365760" y="6309360"/>
+            <a:ext cx="11430000" cy="365760"/>
+          </a:xfrm>
+          <a:prstGeom prst="rect">
+            <a:avLst/>
+          </a:prstGeom>
+          <a:noFill/>
+        </p:spPr>
+        <p:txBody>
+          <a:bodyPr wrap="square">
+            <a:spAutoFit/>
+          </a:bodyPr>
+          <a:lstStyle/>
+          <a:p>
             <a:pPr algn="l"/>
             <a:r>
-              <a:rPr sz="900" b="0">
-                <a:solidFill>
-                  <a:srgbClr val="99AACC"/>
+              <a:rPr sz="900" b="0" i="0">
+                <a:solidFill>
+                  <a:srgbClr val="889ACC"/>
                 </a:solidFill>
                 <a:latin typeface="Arial"/>
               </a:rPr>
@@ -6000,7 +9345,7 @@
     <p:bg>
       <p:bgPr>
         <a:solidFill>
-          <a:srgbClr val="FFFFFF"/>
+          <a:srgbClr val="1A1A1A"/>
         </a:solidFill>
         <a:effectLst/>
       </p:bgPr>
@@ -6027,7 +9372,7 @@
             <a:avLst/>
           </a:prstGeom>
           <a:solidFill>
-            <a:srgbClr val="003DA5"/>
+            <a:srgbClr val="E05B00"/>
           </a:solidFill>
           <a:ln>
             <a:noFill/>
@@ -6063,8 +9408,8 @@
         </p:nvSpPr>
         <p:spPr>
           <a:xfrm>
-            <a:off x="365760" y="274320"/>
-            <a:ext cx="11430000" cy="822960"/>
+            <a:off x="365760" y="2011680"/>
+            <a:ext cx="11430000" cy="2011680"/>
           </a:xfrm>
           <a:prstGeom prst="rect">
             <a:avLst/>
@@ -6079,264 +9424,13 @@
           <a:p>
             <a:pPr algn="l"/>
             <a:r>
-              <a:rPr sz="2200" b="1">
-                <a:solidFill>
-                  <a:srgbClr val="003DA5"/>
-                </a:solidFill>
-                <a:latin typeface="Arial"/>
-              </a:rPr>
-              <a:t>Die zwei zentralen KMU-Definitionen</a:t>
-            </a:r>
-          </a:p>
-        </p:txBody>
-      </p:sp>
-      <p:sp>
-        <p:nvSpPr>
-          <p:cNvPr id="4" name="Rectangle 3"/>
-          <p:cNvSpPr/>
-          <p:nvPr/>
-        </p:nvSpPr>
-        <p:spPr>
-          <a:xfrm>
-            <a:off x="365760" y="1051560"/>
-            <a:ext cx="11430000" cy="27432"/>
-          </a:xfrm>
-          <a:prstGeom prst="rect">
-            <a:avLst/>
-          </a:prstGeom>
-          <a:solidFill>
-            <a:srgbClr val="E5E7EB"/>
-          </a:solidFill>
-          <a:ln>
-            <a:noFill/>
-          </a:ln>
-        </p:spPr>
-        <p:style>
-          <a:lnRef idx="1">
-            <a:schemeClr val="accent1"/>
-          </a:lnRef>
-          <a:fillRef idx="3">
-            <a:schemeClr val="accent1"/>
-          </a:fillRef>
-          <a:effectRef idx="2">
-            <a:schemeClr val="accent1"/>
-          </a:effectRef>
-          <a:fontRef idx="minor">
-            <a:schemeClr val="lt1"/>
-          </a:fontRef>
-        </p:style>
-        <p:txBody>
-          <a:bodyPr rtlCol="0" anchor="ctr"/>
-          <a:lstStyle/>
-          <a:p>
-            <a:pPr algn="ctr"/>
-          </a:p>
-        </p:txBody>
-      </p:sp>
-      <p:sp>
-        <p:nvSpPr>
-          <p:cNvPr id="5" name="TextBox 4"/>
-          <p:cNvSpPr txBox="1"/>
-          <p:nvPr/>
-        </p:nvSpPr>
-        <p:spPr>
-          <a:xfrm>
-            <a:off x="365760" y="1234440"/>
-            <a:ext cx="11430000" cy="5212080"/>
-          </a:xfrm>
-          <a:prstGeom prst="rect">
-            <a:avLst/>
-          </a:prstGeom>
-          <a:noFill/>
-        </p:spPr>
-        <p:txBody>
-          <a:bodyPr wrap="square">
-            <a:spAutoFit/>
-          </a:bodyPr>
-          <a:lstStyle/>
-          <a:p>
-            <a:pPr>
-              <a:spcBef>
-                <a:spcPts val="400"/>
-              </a:spcBef>
-            </a:pPr>
-            <a:r>
-              <a:rPr sz="1500">
-                <a:solidFill>
-                  <a:srgbClr val="003DA5"/>
-                </a:solidFill>
-                <a:latin typeface="Arial"/>
-              </a:rPr>
-              <a:t>▪  </a:t>
-            </a:r>
-            <a:r>
-              <a:rPr sz="1700">
-                <a:solidFill>
-                  <a:srgbClr val="1A1A1A"/>
-                </a:solidFill>
-                <a:latin typeface="Arial"/>
-              </a:rPr>
-              <a:t>In der deutschen Bankpraxis begegnen Berater zwei unterschiedlichen KMU-Definitionen, die für unterschiedliche Zwecke…</a:t>
-            </a:r>
-          </a:p>
-          <a:p>
-            <a:pPr>
-              <a:spcBef>
-                <a:spcPts val="400"/>
-              </a:spcBef>
-            </a:pPr>
-            <a:r>
-              <a:rPr sz="1500">
-                <a:solidFill>
-                  <a:srgbClr val="003DA5"/>
-                </a:solidFill>
-                <a:latin typeface="Arial"/>
-              </a:rPr>
-              <a:t>▪  </a:t>
-            </a:r>
-            <a:r>
-              <a:rPr sz="1700">
-                <a:solidFill>
-                  <a:srgbClr val="1A1A1A"/>
-                </a:solidFill>
-                <a:latin typeface="Arial"/>
-              </a:rPr>
-              <a:t>Die IfM-Bonn-Definition</a:t>
-            </a:r>
-          </a:p>
-          <a:p>
-            <a:pPr>
-              <a:spcBef>
-                <a:spcPts val="400"/>
-              </a:spcBef>
-            </a:pPr>
-            <a:r>
-              <a:rPr sz="1500">
-                <a:solidFill>
-                  <a:srgbClr val="003DA5"/>
-                </a:solidFill>
-                <a:latin typeface="Arial"/>
-              </a:rPr>
-              <a:t>▪  </a:t>
-            </a:r>
-            <a:r>
-              <a:rPr sz="1700">
-                <a:solidFill>
-                  <a:srgbClr val="1A1A1A"/>
-                </a:solidFill>
-                <a:latin typeface="Arial"/>
-              </a:rPr>
-              <a:t>Das Institut für Mittelstandsforschung Bonn (IfM Bonn) definiert KMU quantitativ und qualitativ (IfM Bonn, 2024). Die…</a:t>
-            </a:r>
-          </a:p>
-          <a:p>
-            <a:pPr>
-              <a:spcBef>
-                <a:spcPts val="400"/>
-              </a:spcBef>
-            </a:pPr>
-            <a:r>
-              <a:rPr sz="1500">
-                <a:solidFill>
-                  <a:srgbClr val="003DA5"/>
-                </a:solidFill>
-                <a:latin typeface="Arial"/>
-              </a:rPr>
-              <a:t>▪  </a:t>
-            </a:r>
-            <a:r>
-              <a:rPr sz="1700">
-                <a:solidFill>
-                  <a:srgbClr val="1A1A1A"/>
-                </a:solidFill>
-                <a:latin typeface="Arial"/>
-              </a:rPr>
-              <a:t>(Es müssen Mitarbeiterzahl UND Umsatz die Schwellenwerte erfüllen; IfM Bonn, 2024)</a:t>
-            </a:r>
-          </a:p>
-          <a:p>
-            <a:pPr>
-              <a:spcBef>
-                <a:spcPts val="400"/>
-              </a:spcBef>
-            </a:pPr>
-            <a:r>
-              <a:rPr sz="1500">
-                <a:solidFill>
-                  <a:srgbClr val="003DA5"/>
-                </a:solidFill>
-                <a:latin typeface="Arial"/>
-              </a:rPr>
-              <a:t>▪  </a:t>
-            </a:r>
-            <a:r>
-              <a:rPr sz="1700">
-                <a:solidFill>
-                  <a:srgbClr val="1A1A1A"/>
-                </a:solidFill>
-                <a:latin typeface="Arial"/>
-              </a:rPr>
-              <a:t>Entscheidend ist das qualitative Kriterium, das viele andere Definitionen nicht berücksichtigen: die Einheit von…</a:t>
-            </a:r>
-          </a:p>
-          <a:p>
-            <a:pPr>
-              <a:spcBef>
-                <a:spcPts val="400"/>
-              </a:spcBef>
-            </a:pPr>
-            <a:r>
-              <a:rPr sz="1500">
-                <a:solidFill>
-                  <a:srgbClr val="003DA5"/>
-                </a:solidFill>
-                <a:latin typeface="Arial"/>
-              </a:rPr>
-              <a:t>▪  </a:t>
-            </a:r>
-            <a:r>
-              <a:rPr sz="1700">
-                <a:solidFill>
-                  <a:srgbClr val="1A1A1A"/>
-                </a:solidFill>
-                <a:latin typeface="Arial"/>
-              </a:rPr>
-              <a:t>Die EU-Definition</a:t>
-            </a:r>
-          </a:p>
-        </p:txBody>
-      </p:sp>
-      <p:sp>
-        <p:nvSpPr>
-          <p:cNvPr id="6" name="TextBox 5"/>
-          <p:cNvSpPr txBox="1"/>
-          <p:nvPr/>
-        </p:nvSpPr>
-        <p:spPr>
-          <a:xfrm>
-            <a:off x="11704320" y="6492240"/>
-            <a:ext cx="365760" cy="274320"/>
-          </a:xfrm>
-          <a:prstGeom prst="rect">
-            <a:avLst/>
-          </a:prstGeom>
-          <a:noFill/>
-        </p:spPr>
-        <p:txBody>
-          <a:bodyPr wrap="square">
-            <a:spAutoFit/>
-          </a:bodyPr>
-          <a:lstStyle/>
-          <a:p>
-            <a:pPr algn="r"/>
-            <a:r>
-              <a:rPr sz="1000" b="0">
-                <a:solidFill>
-                  <a:srgbClr val="6B7280"/>
-                </a:solidFill>
-                <a:latin typeface="Arial"/>
-              </a:rPr>
-              <a:t>1</a:t>
+              <a:rPr sz="3600" b="1" i="0">
+                <a:solidFill>
+                  <a:srgbClr val="FFFFFF"/>
+                </a:solidFill>
+                <a:latin typeface="Arial"/>
+              </a:rPr>
+              <a:t>4.1 Theorie-Input 1: Was ist ein KMU? Definitionen, Typologien und volkswirtschaftliche Bedeutung</a:t>
             </a:r>
           </a:p>
         </p:txBody>
@@ -6418,8 +9512,8 @@
         </p:nvSpPr>
         <p:spPr>
           <a:xfrm>
-            <a:off x="365760" y="274320"/>
-            <a:ext cx="11430000" cy="822960"/>
+            <a:off x="228600" y="182880"/>
+            <a:ext cx="11430000" cy="320040"/>
           </a:xfrm>
           <a:prstGeom prst="rect">
             <a:avLst/>
@@ -6434,33 +9528,68 @@
           <a:p>
             <a:pPr algn="l"/>
             <a:r>
-              <a:rPr sz="2200" b="1">
+              <a:rPr sz="900" b="0" i="0">
+                <a:solidFill>
+                  <a:srgbClr val="556575"/>
+                </a:solidFill>
+                <a:latin typeface="Arial"/>
+              </a:rPr>
+              <a:t>M06 · Modulinhalte</a:t>
+            </a:r>
+          </a:p>
+        </p:txBody>
+      </p:sp>
+      <p:sp>
+        <p:nvSpPr>
+          <p:cNvPr id="4" name="TextBox 3"/>
+          <p:cNvSpPr txBox="1"/>
+          <p:nvPr/>
+        </p:nvSpPr>
+        <p:spPr>
+          <a:xfrm>
+            <a:off x="365760" y="274320"/>
+            <a:ext cx="11430000" cy="777240"/>
+          </a:xfrm>
+          <a:prstGeom prst="rect">
+            <a:avLst/>
+          </a:prstGeom>
+          <a:noFill/>
+        </p:spPr>
+        <p:txBody>
+          <a:bodyPr wrap="square">
+            <a:spAutoFit/>
+          </a:bodyPr>
+          <a:lstStyle/>
+          <a:p>
+            <a:pPr algn="l"/>
+            <a:r>
+              <a:rPr sz="2200" b="1" i="0">
                 <a:solidFill>
                   <a:srgbClr val="003DA5"/>
                 </a:solidFill>
                 <a:latin typeface="Arial"/>
               </a:rPr>
-              <a:t>Volkswirtschaftliche Bedeutung von KMU</a:t>
-            </a:r>
-          </a:p>
-        </p:txBody>
-      </p:sp>
-      <p:sp>
-        <p:nvSpPr>
-          <p:cNvPr id="4" name="Rectangle 3"/>
+              <a:t>Die zwei zentralen KMU-Definitionen</a:t>
+            </a:r>
+          </a:p>
+        </p:txBody>
+      </p:sp>
+      <p:sp>
+        <p:nvSpPr>
+          <p:cNvPr id="5" name="Rectangle 4"/>
           <p:cNvSpPr/>
           <p:nvPr/>
         </p:nvSpPr>
         <p:spPr>
           <a:xfrm>
-            <a:off x="365760" y="1051560"/>
+            <a:off x="365760" y="1005840"/>
             <a:ext cx="11430000" cy="27432"/>
           </a:xfrm>
           <a:prstGeom prst="rect">
             <a:avLst/>
           </a:prstGeom>
           <a:solidFill>
-            <a:srgbClr val="E5E7EB"/>
+            <a:srgbClr val="D1D5DB"/>
           </a:solidFill>
           <a:ln>
             <a:noFill/>
@@ -6488,164 +9617,754 @@
           </a:p>
         </p:txBody>
       </p:sp>
-      <p:sp>
-        <p:nvSpPr>
-          <p:cNvPr id="5" name="TextBox 4"/>
-          <p:cNvSpPr txBox="1"/>
+      <p:graphicFrame>
+        <p:nvGraphicFramePr>
+          <p:cNvPr id="6" name="Table 5"/>
+          <p:cNvGraphicFramePr>
+            <a:graphicFrameLocks noGrp="1"/>
+          </p:cNvGraphicFramePr>
           <p:nvPr/>
-        </p:nvSpPr>
-        <p:spPr>
-          <a:xfrm>
-            <a:off x="365760" y="1234440"/>
-            <a:ext cx="11430000" cy="5212080"/>
-          </a:xfrm>
-          <a:prstGeom prst="rect">
-            <a:avLst/>
-          </a:prstGeom>
-          <a:noFill/>
-        </p:spPr>
-        <p:txBody>
-          <a:bodyPr wrap="square">
-            <a:spAutoFit/>
-          </a:bodyPr>
-          <a:lstStyle/>
-          <a:p>
-            <a:pPr>
-              <a:spcBef>
-                <a:spcPts val="400"/>
-              </a:spcBef>
-            </a:pPr>
-            <a:r>
-              <a:rPr sz="1500">
-                <a:solidFill>
-                  <a:srgbClr val="003DA5"/>
-                </a:solidFill>
-                <a:latin typeface="Arial"/>
-              </a:rPr>
-              <a:t>▪  </a:t>
-            </a:r>
-            <a:r>
-              <a:rPr sz="1700">
-                <a:solidFill>
-                  <a:srgbClr val="1A1A1A"/>
-                </a:solidFill>
-                <a:latin typeface="Arial"/>
-              </a:rPr>
-              <a:t>99,4 % aller deutschen Unternehmen sind KMU (IfM Bonn, 2024)</a:t>
-            </a:r>
-          </a:p>
-          <a:p>
-            <a:pPr>
-              <a:spcBef>
-                <a:spcPts val="400"/>
-              </a:spcBef>
-            </a:pPr>
-            <a:r>
-              <a:rPr sz="1500">
-                <a:solidFill>
-                  <a:srgbClr val="003DA5"/>
-                </a:solidFill>
-                <a:latin typeface="Arial"/>
-              </a:rPr>
-              <a:t>▪  </a:t>
-            </a:r>
-            <a:r>
-              <a:rPr sz="1700">
-                <a:solidFill>
-                  <a:srgbClr val="1A1A1A"/>
-                </a:solidFill>
-                <a:latin typeface="Arial"/>
-              </a:rPr>
-              <a:t>KMU erwirtschaften rund 55 % der Nettowertschöpfung (IfM Bonn, 2024)</a:t>
-            </a:r>
-          </a:p>
-          <a:p>
-            <a:pPr>
-              <a:spcBef>
-                <a:spcPts val="400"/>
-              </a:spcBef>
-            </a:pPr>
-            <a:r>
-              <a:rPr sz="1500">
-                <a:solidFill>
-                  <a:srgbClr val="003DA5"/>
-                </a:solidFill>
-                <a:latin typeface="Arial"/>
-              </a:rPr>
-              <a:t>▪  </a:t>
-            </a:r>
-            <a:r>
-              <a:rPr sz="1700">
-                <a:solidFill>
-                  <a:srgbClr val="1A1A1A"/>
-                </a:solidFill>
-                <a:latin typeface="Arial"/>
-              </a:rPr>
-              <a:t>Sie stellen ca. 60 % der sozialversicherungspflichtigen Arbeitsplätze (IfM Bonn, 2024)</a:t>
-            </a:r>
-          </a:p>
-          <a:p>
-            <a:pPr>
-              <a:spcBef>
-                <a:spcPts val="400"/>
-              </a:spcBef>
-            </a:pPr>
-            <a:r>
-              <a:rPr sz="1500">
-                <a:solidFill>
-                  <a:srgbClr val="003DA5"/>
-                </a:solidFill>
-                <a:latin typeface="Arial"/>
-              </a:rPr>
-              <a:t>▪  </a:t>
-            </a:r>
-            <a:r>
-              <a:rPr sz="1700">
-                <a:solidFill>
-                  <a:srgbClr val="1A1A1A"/>
-                </a:solidFill>
-                <a:latin typeface="Arial"/>
-              </a:rPr>
-              <a:t>Sie bilden über 80 % aller Auszubildenden aus (IfM Bonn, 2024)</a:t>
-            </a:r>
-          </a:p>
-        </p:txBody>
-      </p:sp>
-      <p:sp>
-        <p:nvSpPr>
-          <p:cNvPr id="6" name="TextBox 5"/>
-          <p:cNvSpPr txBox="1"/>
-          <p:nvPr/>
-        </p:nvSpPr>
-        <p:spPr>
-          <a:xfrm>
-            <a:off x="11704320" y="6492240"/>
-            <a:ext cx="365760" cy="274320"/>
-          </a:xfrm>
-          <a:prstGeom prst="rect">
-            <a:avLst/>
-          </a:prstGeom>
-          <a:noFill/>
-        </p:spPr>
-        <p:txBody>
-          <a:bodyPr wrap="square">
-            <a:spAutoFit/>
-          </a:bodyPr>
-          <a:lstStyle/>
-          <a:p>
-            <a:pPr algn="r"/>
-            <a:r>
-              <a:rPr sz="1000" b="0">
-                <a:solidFill>
-                  <a:srgbClr val="6B7280"/>
-                </a:solidFill>
-                <a:latin typeface="Arial"/>
-              </a:rPr>
-              <a:t>2</a:t>
-            </a:r>
-          </a:p>
-        </p:txBody>
-      </p:sp>
+        </p:nvGraphicFramePr>
+        <p:xfrm>
+          <a:off x="365760" y="1143000"/>
+          <a:ext cx="11430000" cy="3803904"/>
+        </p:xfrm>
+        <a:graphic>
+          <a:graphicData uri="http://schemas.openxmlformats.org/drawingml/2006/table">
+            <a:tbl>
+              <a:tblPr firstRow="1" bandRow="1">
+                <a:tableStyleId>{5C22544A-7EE6-4342-B048-85BDC9FD1C3A}</a:tableStyleId>
+              </a:tblPr>
+              <a:tblGrid>
+                <a:gridCol w="2857500"/>
+                <a:gridCol w="2857500"/>
+                <a:gridCol w="2857500"/>
+                <a:gridCol w="2857500"/>
+              </a:tblGrid>
+              <a:tr h="475488">
+                <a:tc>
+                  <a:txBody>
+                    <a:bodyPr wrap="square"/>
+                    <a:lstStyle/>
+                    <a:p>
+                      <a:r>
+                        <a:rPr sz="1100" b="1">
+                          <a:solidFill>
+                            <a:srgbClr val="FFFFFF"/>
+                          </a:solidFill>
+                          <a:latin typeface="Arial"/>
+                        </a:rPr>
+                        <a:t>Kategorie</a:t>
+                      </a:r>
+                    </a:p>
+                  </a:txBody>
+                  <a:tcPr>
+                    <a:solidFill>
+                      <a:srgbClr val="003DA5"/>
+                    </a:solidFill>
+                  </a:tcPr>
+                </a:tc>
+                <a:tc>
+                  <a:txBody>
+                    <a:bodyPr wrap="square"/>
+                    <a:lstStyle/>
+                    <a:p>
+                      <a:r>
+                        <a:rPr sz="1100" b="1">
+                          <a:solidFill>
+                            <a:srgbClr val="FFFFFF"/>
+                          </a:solidFill>
+                          <a:latin typeface="Arial"/>
+                        </a:rPr>
+                        <a:t>Beschäftigte</a:t>
+                      </a:r>
+                    </a:p>
+                  </a:txBody>
+                  <a:tcPr>
+                    <a:solidFill>
+                      <a:srgbClr val="003DA5"/>
+                    </a:solidFill>
+                  </a:tcPr>
+                </a:tc>
+                <a:tc>
+                  <a:txBody>
+                    <a:bodyPr wrap="square"/>
+                    <a:lstStyle/>
+                    <a:p>
+                      <a:r>
+                        <a:rPr sz="1100" b="1">
+                          <a:solidFill>
+                            <a:srgbClr val="FFFFFF"/>
+                          </a:solidFill>
+                          <a:latin typeface="Arial"/>
+                        </a:rPr>
+                        <a:t>Jahresumsatz</a:t>
+                      </a:r>
+                    </a:p>
+                  </a:txBody>
+                  <a:tcPr>
+                    <a:solidFill>
+                      <a:srgbClr val="003DA5"/>
+                    </a:solidFill>
+                  </a:tcPr>
+                </a:tc>
+                <a:tc>
+                  <a:txBody>
+                    <a:bodyPr wrap="square"/>
+                    <a:lstStyle/>
+                    <a:p>
+                      <a:r>
+                        <a:rPr sz="1100" b="1">
+                          <a:solidFill>
+                            <a:srgbClr val="FFFFFF"/>
+                          </a:solidFill>
+                          <a:latin typeface="Arial"/>
+                        </a:rPr>
+                        <a:t/>
+                      </a:r>
+                    </a:p>
+                  </a:txBody>
+                  <a:tcPr>
+                    <a:solidFill>
+                      <a:srgbClr val="003DA5"/>
+                    </a:solidFill>
+                  </a:tcPr>
+                </a:tc>
+              </a:tr>
+              <a:tr h="475488">
+                <a:tc>
+                  <a:txBody>
+                    <a:bodyPr wrap="square"/>
+                    <a:lstStyle/>
+                    <a:p>
+                      <a:r>
+                        <a:rPr sz="1100" b="0">
+                          <a:solidFill>
+                            <a:srgbClr val="1A1A1A"/>
+                          </a:solidFill>
+                          <a:latin typeface="Arial"/>
+                        </a:rPr>
+                        <a:t>Kleine Unternehmen</a:t>
+                      </a:r>
+                    </a:p>
+                  </a:txBody>
+                  <a:tcPr>
+                    <a:solidFill>
+                      <a:srgbClr val="FFFFFF"/>
+                    </a:solidFill>
+                  </a:tcPr>
+                </a:tc>
+                <a:tc>
+                  <a:txBody>
+                    <a:bodyPr wrap="square"/>
+                    <a:lstStyle/>
+                    <a:p>
+                      <a:r>
+                        <a:rPr sz="1100" b="0">
+                          <a:solidFill>
+                            <a:srgbClr val="1A1A1A"/>
+                          </a:solidFill>
+                          <a:latin typeface="Arial"/>
+                        </a:rPr>
+                        <a:t>&lt; 10</a:t>
+                      </a:r>
+                    </a:p>
+                  </a:txBody>
+                  <a:tcPr>
+                    <a:solidFill>
+                      <a:srgbClr val="FFFFFF"/>
+                    </a:solidFill>
+                  </a:tcPr>
+                </a:tc>
+                <a:tc>
+                  <a:txBody>
+                    <a:bodyPr wrap="square"/>
+                    <a:lstStyle/>
+                    <a:p>
+                      <a:r>
+                        <a:rPr sz="1100" b="0">
+                          <a:solidFill>
+                            <a:srgbClr val="1A1A1A"/>
+                          </a:solidFill>
+                          <a:latin typeface="Arial"/>
+                        </a:rPr>
+                        <a:t>&lt; 2 Mio. EUR</a:t>
+                      </a:r>
+                    </a:p>
+                  </a:txBody>
+                  <a:tcPr>
+                    <a:solidFill>
+                      <a:srgbClr val="FFFFFF"/>
+                    </a:solidFill>
+                  </a:tcPr>
+                </a:tc>
+                <a:tc>
+                  <a:txBody>
+                    <a:bodyPr wrap="square"/>
+                    <a:lstStyle/>
+                    <a:p>
+                      <a:r>
+                        <a:rPr sz="1100" b="0">
+                          <a:solidFill>
+                            <a:srgbClr val="1A1A1A"/>
+                          </a:solidFill>
+                          <a:latin typeface="Arial"/>
+                        </a:rPr>
+                        <a:t/>
+                      </a:r>
+                    </a:p>
+                  </a:txBody>
+                  <a:tcPr>
+                    <a:solidFill>
+                      <a:srgbClr val="FFFFFF"/>
+                    </a:solidFill>
+                  </a:tcPr>
+                </a:tc>
+              </a:tr>
+              <a:tr h="475488">
+                <a:tc>
+                  <a:txBody>
+                    <a:bodyPr wrap="square"/>
+                    <a:lstStyle/>
+                    <a:p>
+                      <a:r>
+                        <a:rPr sz="1100" b="0">
+                          <a:solidFill>
+                            <a:srgbClr val="1A1A1A"/>
+                          </a:solidFill>
+                          <a:latin typeface="Arial"/>
+                        </a:rPr>
+                        <a:t>Mittlere Unternehmen</a:t>
+                      </a:r>
+                    </a:p>
+                  </a:txBody>
+                  <a:tcPr>
+                    <a:solidFill>
+                      <a:srgbClr val="F4F6FA"/>
+                    </a:solidFill>
+                  </a:tcPr>
+                </a:tc>
+                <a:tc>
+                  <a:txBody>
+                    <a:bodyPr wrap="square"/>
+                    <a:lstStyle/>
+                    <a:p>
+                      <a:r>
+                        <a:rPr sz="1100" b="0">
+                          <a:solidFill>
+                            <a:srgbClr val="1A1A1A"/>
+                          </a:solidFill>
+                          <a:latin typeface="Arial"/>
+                        </a:rPr>
+                        <a:t>10–499</a:t>
+                      </a:r>
+                    </a:p>
+                  </a:txBody>
+                  <a:tcPr>
+                    <a:solidFill>
+                      <a:srgbClr val="F4F6FA"/>
+                    </a:solidFill>
+                  </a:tcPr>
+                </a:tc>
+                <a:tc>
+                  <a:txBody>
+                    <a:bodyPr wrap="square"/>
+                    <a:lstStyle/>
+                    <a:p>
+                      <a:r>
+                        <a:rPr sz="1100" b="0">
+                          <a:solidFill>
+                            <a:srgbClr val="1A1A1A"/>
+                          </a:solidFill>
+                          <a:latin typeface="Arial"/>
+                        </a:rPr>
+                        <a:t>2–49,9 Mio. EUR</a:t>
+                      </a:r>
+                    </a:p>
+                  </a:txBody>
+                  <a:tcPr>
+                    <a:solidFill>
+                      <a:srgbClr val="F4F6FA"/>
+                    </a:solidFill>
+                  </a:tcPr>
+                </a:tc>
+                <a:tc>
+                  <a:txBody>
+                    <a:bodyPr wrap="square"/>
+                    <a:lstStyle/>
+                    <a:p>
+                      <a:r>
+                        <a:rPr sz="1100" b="0">
+                          <a:solidFill>
+                            <a:srgbClr val="1A1A1A"/>
+                          </a:solidFill>
+                          <a:latin typeface="Arial"/>
+                        </a:rPr>
+                        <a:t/>
+                      </a:r>
+                    </a:p>
+                  </a:txBody>
+                  <a:tcPr>
+                    <a:solidFill>
+                      <a:srgbClr val="F4F6FA"/>
+                    </a:solidFill>
+                  </a:tcPr>
+                </a:tc>
+              </a:tr>
+              <a:tr h="475488">
+                <a:tc>
+                  <a:txBody>
+                    <a:bodyPr wrap="square"/>
+                    <a:lstStyle/>
+                    <a:p>
+                      <a:r>
+                        <a:rPr sz="1100" b="0">
+                          <a:solidFill>
+                            <a:srgbClr val="1A1A1A"/>
+                          </a:solidFill>
+                          <a:latin typeface="Arial"/>
+                        </a:rPr>
+                        <a:t>KMU gesamt</a:t>
+                      </a:r>
+                    </a:p>
+                  </a:txBody>
+                  <a:tcPr>
+                    <a:solidFill>
+                      <a:srgbClr val="FFFFFF"/>
+                    </a:solidFill>
+                  </a:tcPr>
+                </a:tc>
+                <a:tc>
+                  <a:txBody>
+                    <a:bodyPr wrap="square"/>
+                    <a:lstStyle/>
+                    <a:p>
+                      <a:r>
+                        <a:rPr sz="1100" b="0">
+                          <a:solidFill>
+                            <a:srgbClr val="1A1A1A"/>
+                          </a:solidFill>
+                          <a:latin typeface="Arial"/>
+                        </a:rPr>
+                        <a:t>&lt; 500</a:t>
+                      </a:r>
+                    </a:p>
+                  </a:txBody>
+                  <a:tcPr>
+                    <a:solidFill>
+                      <a:srgbClr val="FFFFFF"/>
+                    </a:solidFill>
+                  </a:tcPr>
+                </a:tc>
+                <a:tc>
+                  <a:txBody>
+                    <a:bodyPr wrap="square"/>
+                    <a:lstStyle/>
+                    <a:p>
+                      <a:r>
+                        <a:rPr sz="1100" b="0">
+                          <a:solidFill>
+                            <a:srgbClr val="1A1A1A"/>
+                          </a:solidFill>
+                          <a:latin typeface="Arial"/>
+                        </a:rPr>
+                        <a:t>&lt; 50 Mio. EUR</a:t>
+                      </a:r>
+                    </a:p>
+                  </a:txBody>
+                  <a:tcPr>
+                    <a:solidFill>
+                      <a:srgbClr val="FFFFFF"/>
+                    </a:solidFill>
+                  </a:tcPr>
+                </a:tc>
+                <a:tc>
+                  <a:txBody>
+                    <a:bodyPr wrap="square"/>
+                    <a:lstStyle/>
+                    <a:p>
+                      <a:r>
+                        <a:rPr sz="1100" b="0">
+                          <a:solidFill>
+                            <a:srgbClr val="1A1A1A"/>
+                          </a:solidFill>
+                          <a:latin typeface="Arial"/>
+                        </a:rPr>
+                        <a:t/>
+                      </a:r>
+                    </a:p>
+                  </a:txBody>
+                  <a:tcPr>
+                    <a:solidFill>
+                      <a:srgbClr val="FFFFFF"/>
+                    </a:solidFill>
+                  </a:tcPr>
+                </a:tc>
+              </a:tr>
+              <a:tr h="475488">
+                <a:tc>
+                  <a:txBody>
+                    <a:bodyPr wrap="square"/>
+                    <a:lstStyle/>
+                    <a:p>
+                      <a:r>
+                        <a:rPr sz="1100" b="0">
+                          <a:solidFill>
+                            <a:srgbClr val="1A1A1A"/>
+                          </a:solidFill>
+                          <a:latin typeface="Arial"/>
+                        </a:rPr>
+                        <a:t>Kategorie</a:t>
+                      </a:r>
+                    </a:p>
+                  </a:txBody>
+                  <a:tcPr>
+                    <a:solidFill>
+                      <a:srgbClr val="F4F6FA"/>
+                    </a:solidFill>
+                  </a:tcPr>
+                </a:tc>
+                <a:tc>
+                  <a:txBody>
+                    <a:bodyPr wrap="square"/>
+                    <a:lstStyle/>
+                    <a:p>
+                      <a:r>
+                        <a:rPr sz="1100" b="0">
+                          <a:solidFill>
+                            <a:srgbClr val="1A1A1A"/>
+                          </a:solidFill>
+                          <a:latin typeface="Arial"/>
+                        </a:rPr>
+                        <a:t>Beschäftigte</a:t>
+                      </a:r>
+                    </a:p>
+                  </a:txBody>
+                  <a:tcPr>
+                    <a:solidFill>
+                      <a:srgbClr val="F4F6FA"/>
+                    </a:solidFill>
+                  </a:tcPr>
+                </a:tc>
+                <a:tc>
+                  <a:txBody>
+                    <a:bodyPr wrap="square"/>
+                    <a:lstStyle/>
+                    <a:p>
+                      <a:r>
+                        <a:rPr sz="1100" b="0">
+                          <a:solidFill>
+                            <a:srgbClr val="1A1A1A"/>
+                          </a:solidFill>
+                          <a:latin typeface="Arial"/>
+                        </a:rPr>
+                        <a:t>Jahresumsatz</a:t>
+                      </a:r>
+                    </a:p>
+                  </a:txBody>
+                  <a:tcPr>
+                    <a:solidFill>
+                      <a:srgbClr val="F4F6FA"/>
+                    </a:solidFill>
+                  </a:tcPr>
+                </a:tc>
+                <a:tc>
+                  <a:txBody>
+                    <a:bodyPr wrap="square"/>
+                    <a:lstStyle/>
+                    <a:p>
+                      <a:r>
+                        <a:rPr sz="1100" b="0">
+                          <a:solidFill>
+                            <a:srgbClr val="1A1A1A"/>
+                          </a:solidFill>
+                          <a:latin typeface="Arial"/>
+                        </a:rPr>
+                        <a:t>Bilanzsumme</a:t>
+                      </a:r>
+                    </a:p>
+                  </a:txBody>
+                  <a:tcPr>
+                    <a:solidFill>
+                      <a:srgbClr val="F4F6FA"/>
+                    </a:solidFill>
+                  </a:tcPr>
+                </a:tc>
+              </a:tr>
+              <a:tr h="475488">
+                <a:tc>
+                  <a:txBody>
+                    <a:bodyPr wrap="square"/>
+                    <a:lstStyle/>
+                    <a:p>
+                      <a:r>
+                        <a:rPr sz="1100" b="0">
+                          <a:solidFill>
+                            <a:srgbClr val="1A1A1A"/>
+                          </a:solidFill>
+                          <a:latin typeface="Arial"/>
+                        </a:rPr>
+                        <a:t>Kleinstunternehmen</a:t>
+                      </a:r>
+                    </a:p>
+                  </a:txBody>
+                  <a:tcPr>
+                    <a:solidFill>
+                      <a:srgbClr val="FFFFFF"/>
+                    </a:solidFill>
+                  </a:tcPr>
+                </a:tc>
+                <a:tc>
+                  <a:txBody>
+                    <a:bodyPr wrap="square"/>
+                    <a:lstStyle/>
+                    <a:p>
+                      <a:r>
+                        <a:rPr sz="1100" b="0">
+                          <a:solidFill>
+                            <a:srgbClr val="1A1A1A"/>
+                          </a:solidFill>
+                          <a:latin typeface="Arial"/>
+                        </a:rPr>
+                        <a:t>&lt; 10</a:t>
+                      </a:r>
+                    </a:p>
+                  </a:txBody>
+                  <a:tcPr>
+                    <a:solidFill>
+                      <a:srgbClr val="FFFFFF"/>
+                    </a:solidFill>
+                  </a:tcPr>
+                </a:tc>
+                <a:tc>
+                  <a:txBody>
+                    <a:bodyPr wrap="square"/>
+                    <a:lstStyle/>
+                    <a:p>
+                      <a:r>
+                        <a:rPr sz="1100" b="0">
+                          <a:solidFill>
+                            <a:srgbClr val="1A1A1A"/>
+                          </a:solidFill>
+                          <a:latin typeface="Arial"/>
+                        </a:rPr>
+                        <a:t>≤ 2 Mio. EUR</a:t>
+                      </a:r>
+                    </a:p>
+                  </a:txBody>
+                  <a:tcPr>
+                    <a:solidFill>
+                      <a:srgbClr val="FFFFFF"/>
+                    </a:solidFill>
+                  </a:tcPr>
+                </a:tc>
+                <a:tc>
+                  <a:txBody>
+                    <a:bodyPr wrap="square"/>
+                    <a:lstStyle/>
+                    <a:p>
+                      <a:r>
+                        <a:rPr sz="1100" b="0">
+                          <a:solidFill>
+                            <a:srgbClr val="1A1A1A"/>
+                          </a:solidFill>
+                          <a:latin typeface="Arial"/>
+                        </a:rPr>
+                        <a:t>≤ 2 Mio. EUR</a:t>
+                      </a:r>
+                    </a:p>
+                  </a:txBody>
+                  <a:tcPr>
+                    <a:solidFill>
+                      <a:srgbClr val="FFFFFF"/>
+                    </a:solidFill>
+                  </a:tcPr>
+                </a:tc>
+              </a:tr>
+              <a:tr h="475488">
+                <a:tc>
+                  <a:txBody>
+                    <a:bodyPr wrap="square"/>
+                    <a:lstStyle/>
+                    <a:p>
+                      <a:r>
+                        <a:rPr sz="1100" b="0">
+                          <a:solidFill>
+                            <a:srgbClr val="1A1A1A"/>
+                          </a:solidFill>
+                          <a:latin typeface="Arial"/>
+                        </a:rPr>
+                        <a:t>Kleinunternehmen</a:t>
+                      </a:r>
+                    </a:p>
+                  </a:txBody>
+                  <a:tcPr>
+                    <a:solidFill>
+                      <a:srgbClr val="F4F6FA"/>
+                    </a:solidFill>
+                  </a:tcPr>
+                </a:tc>
+                <a:tc>
+                  <a:txBody>
+                    <a:bodyPr wrap="square"/>
+                    <a:lstStyle/>
+                    <a:p>
+                      <a:r>
+                        <a:rPr sz="1100" b="0">
+                          <a:solidFill>
+                            <a:srgbClr val="1A1A1A"/>
+                          </a:solidFill>
+                          <a:latin typeface="Arial"/>
+                        </a:rPr>
+                        <a:t>&lt; 50</a:t>
+                      </a:r>
+                    </a:p>
+                  </a:txBody>
+                  <a:tcPr>
+                    <a:solidFill>
+                      <a:srgbClr val="F4F6FA"/>
+                    </a:solidFill>
+                  </a:tcPr>
+                </a:tc>
+                <a:tc>
+                  <a:txBody>
+                    <a:bodyPr wrap="square"/>
+                    <a:lstStyle/>
+                    <a:p>
+                      <a:r>
+                        <a:rPr sz="1100" b="0">
+                          <a:solidFill>
+                            <a:srgbClr val="1A1A1A"/>
+                          </a:solidFill>
+                          <a:latin typeface="Arial"/>
+                        </a:rPr>
+                        <a:t>≤ 10 Mio. EUR</a:t>
+                      </a:r>
+                    </a:p>
+                  </a:txBody>
+                  <a:tcPr>
+                    <a:solidFill>
+                      <a:srgbClr val="F4F6FA"/>
+                    </a:solidFill>
+                  </a:tcPr>
+                </a:tc>
+                <a:tc>
+                  <a:txBody>
+                    <a:bodyPr wrap="square"/>
+                    <a:lstStyle/>
+                    <a:p>
+                      <a:r>
+                        <a:rPr sz="1100" b="0">
+                          <a:solidFill>
+                            <a:srgbClr val="1A1A1A"/>
+                          </a:solidFill>
+                          <a:latin typeface="Arial"/>
+                        </a:rPr>
+                        <a:t>≤ 10 Mio. EUR</a:t>
+                      </a:r>
+                    </a:p>
+                  </a:txBody>
+                  <a:tcPr>
+                    <a:solidFill>
+                      <a:srgbClr val="F4F6FA"/>
+                    </a:solidFill>
+                  </a:tcPr>
+                </a:tc>
+              </a:tr>
+              <a:tr h="475488">
+                <a:tc>
+                  <a:txBody>
+                    <a:bodyPr wrap="square"/>
+                    <a:lstStyle/>
+                    <a:p>
+                      <a:r>
+                        <a:rPr sz="1100" b="0">
+                          <a:solidFill>
+                            <a:srgbClr val="1A1A1A"/>
+                          </a:solidFill>
+                          <a:latin typeface="Arial"/>
+                        </a:rPr>
+                        <a:t>Mittleres Unternehmen</a:t>
+                      </a:r>
+                    </a:p>
+                  </a:txBody>
+                  <a:tcPr>
+                    <a:solidFill>
+                      <a:srgbClr val="FFFFFF"/>
+                    </a:solidFill>
+                  </a:tcPr>
+                </a:tc>
+                <a:tc>
+                  <a:txBody>
+                    <a:bodyPr wrap="square"/>
+                    <a:lstStyle/>
+                    <a:p>
+                      <a:r>
+                        <a:rPr sz="1100" b="0">
+                          <a:solidFill>
+                            <a:srgbClr val="1A1A1A"/>
+                          </a:solidFill>
+                          <a:latin typeface="Arial"/>
+                        </a:rPr>
+                        <a:t>&lt; 250</a:t>
+                      </a:r>
+                    </a:p>
+                  </a:txBody>
+                  <a:tcPr>
+                    <a:solidFill>
+                      <a:srgbClr val="FFFFFF"/>
+                    </a:solidFill>
+                  </a:tcPr>
+                </a:tc>
+                <a:tc>
+                  <a:txBody>
+                    <a:bodyPr wrap="square"/>
+                    <a:lstStyle/>
+                    <a:p>
+                      <a:r>
+                        <a:rPr sz="1100" b="0">
+                          <a:solidFill>
+                            <a:srgbClr val="1A1A1A"/>
+                          </a:solidFill>
+                          <a:latin typeface="Arial"/>
+                        </a:rPr>
+                        <a:t>≤ 50 Mio. EUR</a:t>
+                      </a:r>
+                    </a:p>
+                  </a:txBody>
+                  <a:tcPr>
+                    <a:solidFill>
+                      <a:srgbClr val="FFFFFF"/>
+                    </a:solidFill>
+                  </a:tcPr>
+                </a:tc>
+                <a:tc>
+                  <a:txBody>
+                    <a:bodyPr wrap="square"/>
+                    <a:lstStyle/>
+                    <a:p>
+                      <a:r>
+                        <a:rPr sz="1100" b="0">
+                          <a:solidFill>
+                            <a:srgbClr val="1A1A1A"/>
+                          </a:solidFill>
+                          <a:latin typeface="Arial"/>
+                        </a:rPr>
+                        <a:t>≤ 43 Mio. EUR</a:t>
+                      </a:r>
+                    </a:p>
+                  </a:txBody>
+                  <a:tcPr>
+                    <a:solidFill>
+                      <a:srgbClr val="FFFFFF"/>
+                    </a:solidFill>
+                  </a:tcPr>
+                </a:tc>
+              </a:tr>
+            </a:tbl>
+          </a:graphicData>
+        </a:graphic>
+      </p:graphicFrame>
     </p:spTree>
   </p:cSld>
   <p:clrMapOvr>
@@ -6723,8 +10442,8 @@
         </p:nvSpPr>
         <p:spPr>
           <a:xfrm>
-            <a:off x="365760" y="274320"/>
-            <a:ext cx="11430000" cy="822960"/>
+            <a:off x="228600" y="182880"/>
+            <a:ext cx="11430000" cy="320040"/>
           </a:xfrm>
           <a:prstGeom prst="rect">
             <a:avLst/>
@@ -6739,33 +10458,68 @@
           <a:p>
             <a:pPr algn="l"/>
             <a:r>
-              <a:rPr sz="2200" b="1">
+              <a:rPr sz="900" b="0" i="0">
+                <a:solidFill>
+                  <a:srgbClr val="556575"/>
+                </a:solidFill>
+                <a:latin typeface="Arial"/>
+              </a:rPr>
+              <a:t>M06 · Modulinhalte</a:t>
+            </a:r>
+          </a:p>
+        </p:txBody>
+      </p:sp>
+      <p:sp>
+        <p:nvSpPr>
+          <p:cNvPr id="4" name="TextBox 3"/>
+          <p:cNvSpPr txBox="1"/>
+          <p:nvPr/>
+        </p:nvSpPr>
+        <p:spPr>
+          <a:xfrm>
+            <a:off x="365760" y="274320"/>
+            <a:ext cx="11430000" cy="777240"/>
+          </a:xfrm>
+          <a:prstGeom prst="rect">
+            <a:avLst/>
+          </a:prstGeom>
+          <a:noFill/>
+        </p:spPr>
+        <p:txBody>
+          <a:bodyPr wrap="square">
+            <a:spAutoFit/>
+          </a:bodyPr>
+          <a:lstStyle/>
+          <a:p>
+            <a:pPr algn="l"/>
+            <a:r>
+              <a:rPr sz="2200" b="1" i="0">
                 <a:solidFill>
                   <a:srgbClr val="003DA5"/>
                 </a:solidFill>
                 <a:latin typeface="Arial"/>
               </a:rPr>
-              <a:t>KMU-Typologien: Die fünf Grundkategorien</a:t>
-            </a:r>
-          </a:p>
-        </p:txBody>
-      </p:sp>
-      <p:sp>
-        <p:nvSpPr>
-          <p:cNvPr id="4" name="Rectangle 3"/>
+              <a:t>Volkswirtschaftliche Bedeutung von KMU</a:t>
+            </a:r>
+          </a:p>
+        </p:txBody>
+      </p:sp>
+      <p:sp>
+        <p:nvSpPr>
+          <p:cNvPr id="5" name="Rectangle 4"/>
           <p:cNvSpPr/>
           <p:nvPr/>
         </p:nvSpPr>
         <p:spPr>
           <a:xfrm>
-            <a:off x="365760" y="1051560"/>
+            <a:off x="365760" y="1005840"/>
             <a:ext cx="11430000" cy="27432"/>
           </a:xfrm>
           <a:prstGeom prst="rect">
             <a:avLst/>
           </a:prstGeom>
           <a:solidFill>
-            <a:srgbClr val="E5E7EB"/>
+            <a:srgbClr val="D1D5DB"/>
           </a:solidFill>
           <a:ln>
             <a:noFill/>
@@ -6795,13 +10549,13 @@
       </p:sp>
       <p:sp>
         <p:nvSpPr>
-          <p:cNvPr id="5" name="TextBox 4"/>
+          <p:cNvPr id="6" name="TextBox 5"/>
           <p:cNvSpPr txBox="1"/>
           <p:nvPr/>
         </p:nvSpPr>
         <p:spPr>
           <a:xfrm>
-            <a:off x="365760" y="1234440"/>
+            <a:off x="365760" y="1143000"/>
             <a:ext cx="11430000" cy="5212080"/>
           </a:xfrm>
           <a:prstGeom prst="rect">
@@ -6817,7 +10571,7 @@
           <a:p>
             <a:pPr>
               <a:spcBef>
-                <a:spcPts val="400"/>
+                <a:spcPts val="500"/>
               </a:spcBef>
             </a:pPr>
             <a:r>
@@ -6830,19 +10584,28 @@
               <a:t>▪  </a:t>
             </a:r>
             <a:r>
+              <a:rPr sz="1700" b="1">
+                <a:solidFill>
+                  <a:srgbClr val="003DA5"/>
+                </a:solidFill>
+                <a:latin typeface="Arial"/>
+              </a:rPr>
+              <a:t>99,4 %: </a:t>
+            </a:r>
+            <a:r>
               <a:rPr sz="1700">
                 <a:solidFill>
                   <a:srgbClr val="1A1A1A"/>
                 </a:solidFill>
                 <a:latin typeface="Arial"/>
               </a:rPr>
-              <a:t>Nicht alle KMU sind gleich. Die Branchenzugehörigkeit prägt Finanzierungsstruktur, Risikoprofil und Gesprächsthemen so…</a:t>
+              <a:t>aller deutschen Unternehmen sind KMU (IfM Bonn, 2024) - KMU erwirtschaften rund</a:t>
             </a:r>
           </a:p>
           <a:p>
             <a:pPr>
               <a:spcBef>
-                <a:spcPts val="400"/>
+                <a:spcPts val="500"/>
               </a:spcBef>
             </a:pPr>
             <a:r>
@@ -6855,48 +10618,90 @@
               <a:t>▪  </a:t>
             </a:r>
             <a:r>
+              <a:rPr sz="1700" b="1">
+                <a:solidFill>
+                  <a:srgbClr val="003DA5"/>
+                </a:solidFill>
+                <a:latin typeface="Arial"/>
+              </a:rPr>
+              <a:t>55 %: </a:t>
+            </a:r>
+            <a:r>
               <a:rPr sz="1700">
                 <a:solidFill>
                   <a:srgbClr val="1A1A1A"/>
                 </a:solidFill>
                 <a:latin typeface="Arial"/>
               </a:rPr>
-              <a:t>Fünf Grundtypen sind im VR-Kundenbestand dominant:</a:t>
-            </a:r>
-          </a:p>
-        </p:txBody>
-      </p:sp>
-      <p:sp>
-        <p:nvSpPr>
-          <p:cNvPr id="6" name="TextBox 5"/>
-          <p:cNvSpPr txBox="1"/>
-          <p:nvPr/>
-        </p:nvSpPr>
-        <p:spPr>
-          <a:xfrm>
-            <a:off x="11704320" y="6492240"/>
-            <a:ext cx="365760" cy="274320"/>
-          </a:xfrm>
-          <a:prstGeom prst="rect">
-            <a:avLst/>
-          </a:prstGeom>
-          <a:noFill/>
-        </p:spPr>
-        <p:txBody>
-          <a:bodyPr wrap="square">
-            <a:spAutoFit/>
-          </a:bodyPr>
-          <a:lstStyle/>
-          <a:p>
-            <a:pPr algn="r"/>
-            <a:r>
-              <a:rPr sz="1000" b="0">
-                <a:solidFill>
-                  <a:srgbClr val="6B7280"/>
-                </a:solidFill>
-                <a:latin typeface="Arial"/>
-              </a:rPr>
-              <a:t>3</a:t>
+              <a:t>der Nettowertschöpfung (IfM Bonn, 2024) - Sie stellen ca.</a:t>
+            </a:r>
+          </a:p>
+          <a:p>
+            <a:pPr>
+              <a:spcBef>
+                <a:spcPts val="500"/>
+              </a:spcBef>
+            </a:pPr>
+            <a:r>
+              <a:rPr sz="1500">
+                <a:solidFill>
+                  <a:srgbClr val="003DA5"/>
+                </a:solidFill>
+                <a:latin typeface="Arial"/>
+              </a:rPr>
+              <a:t>▪  </a:t>
+            </a:r>
+            <a:r>
+              <a:rPr sz="1700" b="1">
+                <a:solidFill>
+                  <a:srgbClr val="003DA5"/>
+                </a:solidFill>
+                <a:latin typeface="Arial"/>
+              </a:rPr>
+              <a:t>60 %: </a:t>
+            </a:r>
+            <a:r>
+              <a:rPr sz="1700">
+                <a:solidFill>
+                  <a:srgbClr val="1A1A1A"/>
+                </a:solidFill>
+                <a:latin typeface="Arial"/>
+              </a:rPr>
+              <a:t>der sozialversicherungspflichtigen Arbeitsplätze (IfM Bonn, 2024) - Sie bilden über</a:t>
+            </a:r>
+          </a:p>
+          <a:p>
+            <a:pPr>
+              <a:spcBef>
+                <a:spcPts val="500"/>
+              </a:spcBef>
+            </a:pPr>
+            <a:r>
+              <a:rPr sz="1500">
+                <a:solidFill>
+                  <a:srgbClr val="003DA5"/>
+                </a:solidFill>
+                <a:latin typeface="Arial"/>
+              </a:rPr>
+              <a:t>▪  </a:t>
+            </a:r>
+            <a:r>
+              <a:rPr sz="1700" b="1">
+                <a:solidFill>
+                  <a:srgbClr val="003DA5"/>
+                </a:solidFill>
+                <a:latin typeface="Arial"/>
+              </a:rPr>
+              <a:t>80 %: </a:t>
+            </a:r>
+            <a:r>
+              <a:rPr sz="1700">
+                <a:solidFill>
+                  <a:srgbClr val="1A1A1A"/>
+                </a:solidFill>
+                <a:latin typeface="Arial"/>
+              </a:rPr>
+              <a:t>aller Auszubildenden aus (IfM Bonn, 2024)</a:t>
             </a:r>
           </a:p>
         </p:txBody>
@@ -6978,8 +10783,8 @@
         </p:nvSpPr>
         <p:spPr>
           <a:xfrm>
-            <a:off x="365760" y="274320"/>
-            <a:ext cx="11430000" cy="822960"/>
+            <a:off x="228600" y="182880"/>
+            <a:ext cx="11430000" cy="320040"/>
           </a:xfrm>
           <a:prstGeom prst="rect">
             <a:avLst/>
@@ -6994,33 +10799,68 @@
           <a:p>
             <a:pPr algn="l"/>
             <a:r>
-              <a:rPr sz="2200" b="1">
+              <a:rPr sz="900" b="0" i="0">
+                <a:solidFill>
+                  <a:srgbClr val="556575"/>
+                </a:solidFill>
+                <a:latin typeface="Arial"/>
+              </a:rPr>
+              <a:t>M06 · Modulinhalte</a:t>
+            </a:r>
+          </a:p>
+        </p:txBody>
+      </p:sp>
+      <p:sp>
+        <p:nvSpPr>
+          <p:cNvPr id="4" name="TextBox 3"/>
+          <p:cNvSpPr txBox="1"/>
+          <p:nvPr/>
+        </p:nvSpPr>
+        <p:spPr>
+          <a:xfrm>
+            <a:off x="365760" y="274320"/>
+            <a:ext cx="11430000" cy="777240"/>
+          </a:xfrm>
+          <a:prstGeom prst="rect">
+            <a:avLst/>
+          </a:prstGeom>
+          <a:noFill/>
+        </p:spPr>
+        <p:txBody>
+          <a:bodyPr wrap="square">
+            <a:spAutoFit/>
+          </a:bodyPr>
+          <a:lstStyle/>
+          <a:p>
+            <a:pPr algn="l"/>
+            <a:r>
+              <a:rPr sz="2200" b="1" i="0">
                 <a:solidFill>
                   <a:srgbClr val="003DA5"/>
                 </a:solidFill>
                 <a:latin typeface="Arial"/>
               </a:rPr>
-              <a:t>Das Hausbank-Prinzip: Vertrauen als Geschäftsmodell</a:t>
-            </a:r>
-          </a:p>
-        </p:txBody>
-      </p:sp>
-      <p:sp>
-        <p:nvSpPr>
-          <p:cNvPr id="4" name="Rectangle 3"/>
+              <a:t>KMU-Typologien: Die fünf Grundkategorien</a:t>
+            </a:r>
+          </a:p>
+        </p:txBody>
+      </p:sp>
+      <p:sp>
+        <p:nvSpPr>
+          <p:cNvPr id="5" name="Rectangle 4"/>
           <p:cNvSpPr/>
           <p:nvPr/>
         </p:nvSpPr>
         <p:spPr>
           <a:xfrm>
-            <a:off x="365760" y="1051560"/>
+            <a:off x="365760" y="1005840"/>
             <a:ext cx="11430000" cy="27432"/>
           </a:xfrm>
           <a:prstGeom prst="rect">
             <a:avLst/>
           </a:prstGeom>
           <a:solidFill>
-            <a:srgbClr val="E5E7EB"/>
+            <a:srgbClr val="D1D5DB"/>
           </a:solidFill>
           <a:ln>
             <a:noFill/>
@@ -7048,164 +10888,441 @@
           </a:p>
         </p:txBody>
       </p:sp>
-      <p:sp>
-        <p:nvSpPr>
-          <p:cNvPr id="5" name="TextBox 4"/>
-          <p:cNvSpPr txBox="1"/>
+      <p:graphicFrame>
+        <p:nvGraphicFramePr>
+          <p:cNvPr id="6" name="Table 5"/>
+          <p:cNvGraphicFramePr>
+            <a:graphicFrameLocks noGrp="1"/>
+          </p:cNvGraphicFramePr>
           <p:nvPr/>
-        </p:nvSpPr>
-        <p:spPr>
-          <a:xfrm>
-            <a:off x="365760" y="1234440"/>
-            <a:ext cx="11430000" cy="5212080"/>
-          </a:xfrm>
-          <a:prstGeom prst="rect">
-            <a:avLst/>
-          </a:prstGeom>
-          <a:noFill/>
-        </p:spPr>
-        <p:txBody>
-          <a:bodyPr wrap="square">
-            <a:spAutoFit/>
-          </a:bodyPr>
-          <a:lstStyle/>
-          <a:p>
-            <a:pPr>
-              <a:spcBef>
-                <a:spcPts val="400"/>
-              </a:spcBef>
-            </a:pPr>
-            <a:r>
-              <a:rPr sz="1500">
-                <a:solidFill>
-                  <a:srgbClr val="003DA5"/>
-                </a:solidFill>
-                <a:latin typeface="Arial"/>
-              </a:rPr>
-              <a:t>▪  </a:t>
-            </a:r>
-            <a:r>
-              <a:rPr sz="1700">
-                <a:solidFill>
-                  <a:srgbClr val="1A1A1A"/>
-                </a:solidFill>
-                <a:latin typeface="Arial"/>
-              </a:rPr>
-              <a:t>KMU unterscheiden sich von Großunternehmen fundamental in ihrer Bankbeziehung. Während ein DAX-Konzern mit 20+ Banken…</a:t>
-            </a:r>
-          </a:p>
-          <a:p>
-            <a:pPr>
-              <a:spcBef>
-                <a:spcPts val="400"/>
-              </a:spcBef>
-            </a:pPr>
-            <a:r>
-              <a:rPr sz="1500">
-                <a:solidFill>
-                  <a:srgbClr val="003DA5"/>
-                </a:solidFill>
-                <a:latin typeface="Arial"/>
-              </a:rPr>
-              <a:t>▪  </a:t>
-            </a:r>
-            <a:r>
-              <a:rPr sz="1700">
-                <a:solidFill>
-                  <a:srgbClr val="1A1A1A"/>
-                </a:solidFill>
-                <a:latin typeface="Arial"/>
-              </a:rPr>
-              <a:t>Das Hausbank-Prinzip basiert auf:</a:t>
-            </a:r>
-          </a:p>
-          <a:p>
-            <a:pPr>
-              <a:spcBef>
-                <a:spcPts val="400"/>
-              </a:spcBef>
-            </a:pPr>
-            <a:r>
-              <a:rPr sz="1500">
-                <a:solidFill>
-                  <a:srgbClr val="003DA5"/>
-                </a:solidFill>
-                <a:latin typeface="Arial"/>
-              </a:rPr>
-              <a:t>▪  </a:t>
-            </a:r>
-            <a:r>
-              <a:rPr sz="1700">
-                <a:solidFill>
-                  <a:srgbClr val="1A1A1A"/>
-                </a:solidFill>
-                <a:latin typeface="Arial"/>
-              </a:rPr>
-              <a:t>1. Informationsvorsprung: Die Hausbank kennt den Kunden über Jahre, oft über Generationen. Sie hat Zugang zu…</a:t>
-            </a:r>
-          </a:p>
-          <a:p>
-            <a:pPr>
-              <a:spcBef>
-                <a:spcPts val="400"/>
-              </a:spcBef>
-            </a:pPr>
-            <a:r>
-              <a:rPr sz="1500">
-                <a:solidFill>
-                  <a:srgbClr val="003DA5"/>
-                </a:solidFill>
-                <a:latin typeface="Arial"/>
-              </a:rPr>
-              <a:t>▪  </a:t>
-            </a:r>
-            <a:r>
-              <a:rPr sz="1700">
-                <a:solidFill>
-                  <a:srgbClr val="1A1A1A"/>
-                </a:solidFill>
-                <a:latin typeface="Arial"/>
-              </a:rPr>
-              <a:t>Roland Berger (2024) zeigt, dass 78 % der KMU ihre Hauptbank als "strategischen Partner" bezeichnen – das schafft eine…</a:t>
-            </a:r>
-          </a:p>
-        </p:txBody>
-      </p:sp>
-      <p:sp>
-        <p:nvSpPr>
-          <p:cNvPr id="6" name="TextBox 5"/>
-          <p:cNvSpPr txBox="1"/>
-          <p:nvPr/>
-        </p:nvSpPr>
-        <p:spPr>
-          <a:xfrm>
-            <a:off x="11704320" y="6492240"/>
-            <a:ext cx="365760" cy="274320"/>
-          </a:xfrm>
-          <a:prstGeom prst="rect">
-            <a:avLst/>
-          </a:prstGeom>
-          <a:noFill/>
-        </p:spPr>
-        <p:txBody>
-          <a:bodyPr wrap="square">
-            <a:spAutoFit/>
-          </a:bodyPr>
-          <a:lstStyle/>
-          <a:p>
-            <a:pPr algn="r"/>
-            <a:r>
-              <a:rPr sz="1000" b="0">
-                <a:solidFill>
-                  <a:srgbClr val="6B7280"/>
-                </a:solidFill>
-                <a:latin typeface="Arial"/>
-              </a:rPr>
-              <a:t>4</a:t>
-            </a:r>
-          </a:p>
-        </p:txBody>
-      </p:sp>
+        </p:nvGraphicFramePr>
+        <p:xfrm>
+          <a:off x="365760" y="1143000"/>
+          <a:ext cx="11430000" cy="2852928"/>
+        </p:xfrm>
+        <a:graphic>
+          <a:graphicData uri="http://schemas.openxmlformats.org/drawingml/2006/table">
+            <a:tbl>
+              <a:tblPr firstRow="1" bandRow="1">
+                <a:tableStyleId>{5C22544A-7EE6-4342-B048-85BDC9FD1C3A}</a:tableStyleId>
+              </a:tblPr>
+              <a:tblGrid>
+                <a:gridCol w="3810000"/>
+                <a:gridCol w="3810000"/>
+                <a:gridCol w="3810000"/>
+              </a:tblGrid>
+              <a:tr h="475488">
+                <a:tc>
+                  <a:txBody>
+                    <a:bodyPr wrap="square"/>
+                    <a:lstStyle/>
+                    <a:p>
+                      <a:r>
+                        <a:rPr sz="1100" b="1">
+                          <a:solidFill>
+                            <a:srgbClr val="FFFFFF"/>
+                          </a:solidFill>
+                          <a:latin typeface="Arial"/>
+                        </a:rPr>
+                        <a:t>Typ</a:t>
+                      </a:r>
+                    </a:p>
+                  </a:txBody>
+                  <a:tcPr>
+                    <a:solidFill>
+                      <a:srgbClr val="003DA5"/>
+                    </a:solidFill>
+                  </a:tcPr>
+                </a:tc>
+                <a:tc>
+                  <a:txBody>
+                    <a:bodyPr wrap="square"/>
+                    <a:lstStyle/>
+                    <a:p>
+                      <a:r>
+                        <a:rPr sz="1100" b="1">
+                          <a:solidFill>
+                            <a:srgbClr val="FFFFFF"/>
+                          </a:solidFill>
+                          <a:latin typeface="Arial"/>
+                        </a:rPr>
+                        <a:t>Beispiele</a:t>
+                      </a:r>
+                    </a:p>
+                  </a:txBody>
+                  <a:tcPr>
+                    <a:solidFill>
+                      <a:srgbClr val="003DA5"/>
+                    </a:solidFill>
+                  </a:tcPr>
+                </a:tc>
+                <a:tc>
+                  <a:txBody>
+                    <a:bodyPr wrap="square"/>
+                    <a:lstStyle/>
+                    <a:p>
+                      <a:r>
+                        <a:rPr sz="1100" b="1">
+                          <a:solidFill>
+                            <a:srgbClr val="FFFFFF"/>
+                          </a:solidFill>
+                          <a:latin typeface="Arial"/>
+                        </a:rPr>
+                        <a:t>Besonderheiten</a:t>
+                      </a:r>
+                    </a:p>
+                  </a:txBody>
+                  <a:tcPr>
+                    <a:solidFill>
+                      <a:srgbClr val="003DA5"/>
+                    </a:solidFill>
+                  </a:tcPr>
+                </a:tc>
+              </a:tr>
+              <a:tr h="475488">
+                <a:tc>
+                  <a:txBody>
+                    <a:bodyPr wrap="square"/>
+                    <a:lstStyle/>
+                    <a:p>
+                      <a:r>
+                        <a:rPr sz="1100" b="0">
+                          <a:solidFill>
+                            <a:srgbClr val="1A1A1A"/>
+                          </a:solidFill>
+                          <a:latin typeface="Arial"/>
+                        </a:rPr>
+                        <a:t>Handwerk</a:t>
+                      </a:r>
+                    </a:p>
+                  </a:txBody>
+                  <a:tcPr>
+                    <a:solidFill>
+                      <a:srgbClr val="FFFFFF"/>
+                    </a:solidFill>
+                  </a:tcPr>
+                </a:tc>
+                <a:tc>
+                  <a:txBody>
+                    <a:bodyPr wrap="square"/>
+                    <a:lstStyle/>
+                    <a:p>
+                      <a:r>
+                        <a:rPr sz="1100" b="0">
+                          <a:solidFill>
+                            <a:srgbClr val="1A1A1A"/>
+                          </a:solidFill>
+                          <a:latin typeface="Arial"/>
+                        </a:rPr>
+                        <a:t>Schreiner, Maler, Sanitär, Bäcker</a:t>
+                      </a:r>
+                    </a:p>
+                  </a:txBody>
+                  <a:tcPr>
+                    <a:solidFill>
+                      <a:srgbClr val="FFFFFF"/>
+                    </a:solidFill>
+                  </a:tcPr>
+                </a:tc>
+                <a:tc>
+                  <a:txBody>
+                    <a:bodyPr wrap="square"/>
+                    <a:lstStyle/>
+                    <a:p>
+                      <a:r>
+                        <a:rPr sz="1100" b="0">
+                          <a:solidFill>
+                            <a:srgbClr val="1A1A1A"/>
+                          </a:solidFill>
+                          <a:latin typeface="Arial"/>
+                        </a:rPr>
+                        <a:t>Saisonale Schwankungen, Fachkräftemangel, geringe EK-Quoten</a:t>
+                      </a:r>
+                    </a:p>
+                  </a:txBody>
+                  <a:tcPr>
+                    <a:solidFill>
+                      <a:srgbClr val="FFFFFF"/>
+                    </a:solidFill>
+                  </a:tcPr>
+                </a:tc>
+              </a:tr>
+              <a:tr h="475488">
+                <a:tc>
+                  <a:txBody>
+                    <a:bodyPr wrap="square"/>
+                    <a:lstStyle/>
+                    <a:p>
+                      <a:r>
+                        <a:rPr sz="1100" b="0">
+                          <a:solidFill>
+                            <a:srgbClr val="1A1A1A"/>
+                          </a:solidFill>
+                          <a:latin typeface="Arial"/>
+                        </a:rPr>
+                        <a:t>Produzierendes Gewerbe</a:t>
+                      </a:r>
+                    </a:p>
+                  </a:txBody>
+                  <a:tcPr>
+                    <a:solidFill>
+                      <a:srgbClr val="F4F6FA"/>
+                    </a:solidFill>
+                  </a:tcPr>
+                </a:tc>
+                <a:tc>
+                  <a:txBody>
+                    <a:bodyPr wrap="square"/>
+                    <a:lstStyle/>
+                    <a:p>
+                      <a:r>
+                        <a:rPr sz="1100" b="0">
+                          <a:solidFill>
+                            <a:srgbClr val="1A1A1A"/>
+                          </a:solidFill>
+                          <a:latin typeface="Arial"/>
+                        </a:rPr>
+                        <a:t>Maschinenbau, Metallverarbeitung, Kunststoff</a:t>
+                      </a:r>
+                    </a:p>
+                  </a:txBody>
+                  <a:tcPr>
+                    <a:solidFill>
+                      <a:srgbClr val="F4F6FA"/>
+                    </a:solidFill>
+                  </a:tcPr>
+                </a:tc>
+                <a:tc>
+                  <a:txBody>
+                    <a:bodyPr wrap="square"/>
+                    <a:lstStyle/>
+                    <a:p>
+                      <a:r>
+                        <a:rPr sz="1100" b="0">
+                          <a:solidFill>
+                            <a:srgbClr val="1A1A1A"/>
+                          </a:solidFill>
+                          <a:latin typeface="Arial"/>
+                        </a:rPr>
+                        <a:t>Hohe Anlageintensität, Export, Lieferkettenrisiken</a:t>
+                      </a:r>
+                    </a:p>
+                  </a:txBody>
+                  <a:tcPr>
+                    <a:solidFill>
+                      <a:srgbClr val="F4F6FA"/>
+                    </a:solidFill>
+                  </a:tcPr>
+                </a:tc>
+              </a:tr>
+              <a:tr h="475488">
+                <a:tc>
+                  <a:txBody>
+                    <a:bodyPr wrap="square"/>
+                    <a:lstStyle/>
+                    <a:p>
+                      <a:r>
+                        <a:rPr sz="1100" b="0">
+                          <a:solidFill>
+                            <a:srgbClr val="1A1A1A"/>
+                          </a:solidFill>
+                          <a:latin typeface="Arial"/>
+                        </a:rPr>
+                        <a:t>Handel</a:t>
+                      </a:r>
+                    </a:p>
+                  </a:txBody>
+                  <a:tcPr>
+                    <a:solidFill>
+                      <a:srgbClr val="FFFFFF"/>
+                    </a:solidFill>
+                  </a:tcPr>
+                </a:tc>
+                <a:tc>
+                  <a:txBody>
+                    <a:bodyPr wrap="square"/>
+                    <a:lstStyle/>
+                    <a:p>
+                      <a:r>
+                        <a:rPr sz="1100" b="0">
+                          <a:solidFill>
+                            <a:srgbClr val="1A1A1A"/>
+                          </a:solidFill>
+                          <a:latin typeface="Arial"/>
+                        </a:rPr>
+                        <a:t>Einzelhandel, Großhandel, Fachhandel</a:t>
+                      </a:r>
+                    </a:p>
+                  </a:txBody>
+                  <a:tcPr>
+                    <a:solidFill>
+                      <a:srgbClr val="FFFFFF"/>
+                    </a:solidFill>
+                  </a:tcPr>
+                </a:tc>
+                <a:tc>
+                  <a:txBody>
+                    <a:bodyPr wrap="square"/>
+                    <a:lstStyle/>
+                    <a:p>
+                      <a:r>
+                        <a:rPr sz="1100" b="0">
+                          <a:solidFill>
+                            <a:srgbClr val="1A1A1A"/>
+                          </a:solidFill>
+                          <a:latin typeface="Arial"/>
+                        </a:rPr>
+                        <a:t>Lagerbindung, Working-Capital-intensiv, E-Commerce-Druck</a:t>
+                      </a:r>
+                    </a:p>
+                  </a:txBody>
+                  <a:tcPr>
+                    <a:solidFill>
+                      <a:srgbClr val="FFFFFF"/>
+                    </a:solidFill>
+                  </a:tcPr>
+                </a:tc>
+              </a:tr>
+              <a:tr h="475488">
+                <a:tc>
+                  <a:txBody>
+                    <a:bodyPr wrap="square"/>
+                    <a:lstStyle/>
+                    <a:p>
+                      <a:r>
+                        <a:rPr sz="1100" b="0">
+                          <a:solidFill>
+                            <a:srgbClr val="1A1A1A"/>
+                          </a:solidFill>
+                          <a:latin typeface="Arial"/>
+                        </a:rPr>
+                        <a:t>Dienstleistungen</a:t>
+                      </a:r>
+                    </a:p>
+                  </a:txBody>
+                  <a:tcPr>
+                    <a:solidFill>
+                      <a:srgbClr val="F4F6FA"/>
+                    </a:solidFill>
+                  </a:tcPr>
+                </a:tc>
+                <a:tc>
+                  <a:txBody>
+                    <a:bodyPr wrap="square"/>
+                    <a:lstStyle/>
+                    <a:p>
+                      <a:r>
+                        <a:rPr sz="1100" b="0">
+                          <a:solidFill>
+                            <a:srgbClr val="1A1A1A"/>
+                          </a:solidFill>
+                          <a:latin typeface="Arial"/>
+                        </a:rPr>
+                        <a:t>IT, Logistik, Gebäudeservice, Tourismus</a:t>
+                      </a:r>
+                    </a:p>
+                  </a:txBody>
+                  <a:tcPr>
+                    <a:solidFill>
+                      <a:srgbClr val="F4F6FA"/>
+                    </a:solidFill>
+                  </a:tcPr>
+                </a:tc>
+                <a:tc>
+                  <a:txBody>
+                    <a:bodyPr wrap="square"/>
+                    <a:lstStyle/>
+                    <a:p>
+                      <a:r>
+                        <a:rPr sz="1100" b="0">
+                          <a:solidFill>
+                            <a:srgbClr val="1A1A1A"/>
+                          </a:solidFill>
+                          <a:latin typeface="Arial"/>
+                        </a:rPr>
+                        <a:t>Humankapital-abhängig, skalierbar, wenig Sachsicherheiten</a:t>
+                      </a:r>
+                    </a:p>
+                  </a:txBody>
+                  <a:tcPr>
+                    <a:solidFill>
+                      <a:srgbClr val="F4F6FA"/>
+                    </a:solidFill>
+                  </a:tcPr>
+                </a:tc>
+              </a:tr>
+              <a:tr h="475488">
+                <a:tc>
+                  <a:txBody>
+                    <a:bodyPr wrap="square"/>
+                    <a:lstStyle/>
+                    <a:p>
+                      <a:r>
+                        <a:rPr sz="1100" b="0">
+                          <a:solidFill>
+                            <a:srgbClr val="1A1A1A"/>
+                          </a:solidFill>
+                          <a:latin typeface="Arial"/>
+                        </a:rPr>
+                        <a:t>Freie Berufe</a:t>
+                      </a:r>
+                    </a:p>
+                  </a:txBody>
+                  <a:tcPr>
+                    <a:solidFill>
+                      <a:srgbClr val="FFFFFF"/>
+                    </a:solidFill>
+                  </a:tcPr>
+                </a:tc>
+                <a:tc>
+                  <a:txBody>
+                    <a:bodyPr wrap="square"/>
+                    <a:lstStyle/>
+                    <a:p>
+                      <a:r>
+                        <a:rPr sz="1100" b="0">
+                          <a:solidFill>
+                            <a:srgbClr val="1A1A1A"/>
+                          </a:solidFill>
+                          <a:latin typeface="Arial"/>
+                        </a:rPr>
+                        <a:t>Ärzte, Zahnärzte, Steuerberater, Rechtsanwälte</a:t>
+                      </a:r>
+                    </a:p>
+                  </a:txBody>
+                  <a:tcPr>
+                    <a:solidFill>
+                      <a:srgbClr val="FFFFFF"/>
+                    </a:solidFill>
+                  </a:tcPr>
+                </a:tc>
+                <a:tc>
+                  <a:txBody>
+                    <a:bodyPr wrap="square"/>
+                    <a:lstStyle/>
+                    <a:p>
+                      <a:r>
+                        <a:rPr sz="1100" b="0">
+                          <a:solidFill>
+                            <a:srgbClr val="1A1A1A"/>
+                          </a:solidFill>
+                          <a:latin typeface="Arial"/>
+                        </a:rPr>
+                        <a:t>Zulassungsgebunden, Schlüsselperson = Inhaber, Nachfolge komplex</a:t>
+                      </a:r>
+                    </a:p>
+                  </a:txBody>
+                  <a:tcPr>
+                    <a:solidFill>
+                      <a:srgbClr val="FFFFFF"/>
+                    </a:solidFill>
+                  </a:tcPr>
+                </a:tc>
+              </a:tr>
+            </a:tbl>
+          </a:graphicData>
+        </a:graphic>
+      </p:graphicFrame>
     </p:spTree>
   </p:cSld>
   <p:clrMapOvr>
@@ -7283,8 +11400,8 @@
         </p:nvSpPr>
         <p:spPr>
           <a:xfrm>
-            <a:off x="365760" y="274320"/>
-            <a:ext cx="11430000" cy="822960"/>
+            <a:off x="228600" y="182880"/>
+            <a:ext cx="11430000" cy="320040"/>
           </a:xfrm>
           <a:prstGeom prst="rect">
             <a:avLst/>
@@ -7299,33 +11416,68 @@
           <a:p>
             <a:pPr algn="l"/>
             <a:r>
-              <a:rPr sz="2200" b="1">
+              <a:rPr sz="900" b="0" i="0">
+                <a:solidFill>
+                  <a:srgbClr val="556575"/>
+                </a:solidFill>
+                <a:latin typeface="Arial"/>
+              </a:rPr>
+              <a:t>M06 · Modulinhalte</a:t>
+            </a:r>
+          </a:p>
+        </p:txBody>
+      </p:sp>
+      <p:sp>
+        <p:nvSpPr>
+          <p:cNvPr id="4" name="TextBox 3"/>
+          <p:cNvSpPr txBox="1"/>
+          <p:nvPr/>
+        </p:nvSpPr>
+        <p:spPr>
+          <a:xfrm>
+            <a:off x="365760" y="274320"/>
+            <a:ext cx="11430000" cy="777240"/>
+          </a:xfrm>
+          <a:prstGeom prst="rect">
+            <a:avLst/>
+          </a:prstGeom>
+          <a:noFill/>
+        </p:spPr>
+        <p:txBody>
+          <a:bodyPr wrap="square">
+            <a:spAutoFit/>
+          </a:bodyPr>
+          <a:lstStyle/>
+          <a:p>
+            <a:pPr algn="l"/>
+            <a:r>
+              <a:rPr sz="2200" b="1" i="0">
                 <a:solidFill>
                   <a:srgbClr val="003DA5"/>
                 </a:solidFill>
                 <a:latin typeface="Arial"/>
               </a:rPr>
-              <a:t>Finanzierungsstruktur: KMU vs. Großunternehmen</a:t>
-            </a:r>
-          </a:p>
-        </p:txBody>
-      </p:sp>
-      <p:sp>
-        <p:nvSpPr>
-          <p:cNvPr id="4" name="Rectangle 3"/>
+              <a:t>Das Hausbank-Prinzip: Vertrauen als Geschäftsmodell</a:t>
+            </a:r>
+          </a:p>
+        </p:txBody>
+      </p:sp>
+      <p:sp>
+        <p:nvSpPr>
+          <p:cNvPr id="5" name="Rectangle 4"/>
           <p:cNvSpPr/>
           <p:nvPr/>
         </p:nvSpPr>
         <p:spPr>
           <a:xfrm>
-            <a:off x="365760" y="1051560"/>
+            <a:off x="365760" y="1005840"/>
             <a:ext cx="11430000" cy="27432"/>
           </a:xfrm>
           <a:prstGeom prst="rect">
             <a:avLst/>
           </a:prstGeom>
           <a:solidFill>
-            <a:srgbClr val="E5E7EB"/>
+            <a:srgbClr val="D1D5DB"/>
           </a:solidFill>
           <a:ln>
             <a:noFill/>
@@ -7355,13 +11507,13 @@
       </p:sp>
       <p:sp>
         <p:nvSpPr>
-          <p:cNvPr id="5" name="TextBox 4"/>
+          <p:cNvPr id="6" name="TextBox 5"/>
           <p:cNvSpPr txBox="1"/>
           <p:nvPr/>
         </p:nvSpPr>
         <p:spPr>
           <a:xfrm>
-            <a:off x="365760" y="1234440"/>
+            <a:off x="365760" y="1143000"/>
             <a:ext cx="11430000" cy="5212080"/>
           </a:xfrm>
           <a:prstGeom prst="rect">
@@ -7377,7 +11529,7 @@
           <a:p>
             <a:pPr>
               <a:spcBef>
-                <a:spcPts val="400"/>
+                <a:spcPts val="500"/>
               </a:spcBef>
             </a:pPr>
             <a:r>
@@ -7390,19 +11542,28 @@
               <a:t>▪  </a:t>
             </a:r>
             <a:r>
+              <a:rPr sz="1700" b="1">
+                <a:solidFill>
+                  <a:srgbClr val="003DA5"/>
+                </a:solidFill>
+                <a:latin typeface="Arial"/>
+              </a:rPr>
+              <a:t>1–2 Bankverbindungen: </a:t>
+            </a:r>
+            <a:r>
               <a:rPr sz="1700">
                 <a:solidFill>
                   <a:srgbClr val="1A1A1A"/>
                 </a:solidFill>
                 <a:latin typeface="Arial"/>
               </a:rPr>
-              <a:t>Steuerliche Optimierung: KMU-Inhaber entnehmen Gewinne für den privaten Lebensunterhalt, statt sie im Betrieb zu thesaurieren</a:t>
+              <a:t>– und die Hauptbank ist die Hausbank.</a:t>
             </a:r>
           </a:p>
           <a:p>
             <a:pPr>
               <a:spcBef>
-                <a:spcPts val="400"/>
+                <a:spcPts val="500"/>
               </a:spcBef>
             </a:pPr>
             <a:r>
@@ -7415,19 +11576,28 @@
               <a:t>▪  </a:t>
             </a:r>
             <a:r>
+              <a:rPr sz="1700" b="1">
+                <a:solidFill>
+                  <a:srgbClr val="003DA5"/>
+                </a:solidFill>
+                <a:latin typeface="Arial"/>
+              </a:rPr>
+              <a:t>Informationsvorsprung: </a:t>
+            </a:r>
+            <a:r>
               <a:rPr sz="1700">
                 <a:solidFill>
                   <a:srgbClr val="1A1A1A"/>
                 </a:solidFill>
                 <a:latin typeface="Arial"/>
               </a:rPr>
-              <a:t>Verflechtung Privat/Betrieb: Privatliegenschaften des Inhabers erscheinen nicht in der Bilanz, sind aber reale Sicherheiten</a:t>
+              <a:t>Die Hausbank kennt den Kunden über Jahre, oft über Generationen. Sie hat Zugang zu Umsatzdaten, Zahlungsverhalten und Businesszyklen, die externe Banken nicht sehen. 2.</a:t>
             </a:r>
           </a:p>
           <a:p>
             <a:pPr>
               <a:spcBef>
-                <a:spcPts val="400"/>
+                <a:spcPts val="500"/>
               </a:spcBef>
             </a:pPr>
             <a:r>
@@ -7440,48 +11610,56 @@
               <a:t>▪  </a:t>
             </a:r>
             <a:r>
+              <a:rPr sz="1700" b="1">
+                <a:solidFill>
+                  <a:srgbClr val="003DA5"/>
+                </a:solidFill>
+                <a:latin typeface="Arial"/>
+              </a:rPr>
+              <a:t>Vertrauen auf Gegenseitigkeit: </a:t>
+            </a:r>
+            <a:r>
               <a:rPr sz="1700">
                 <a:solidFill>
                   <a:srgbClr val="1A1A1A"/>
                 </a:solidFill>
                 <a:latin typeface="Arial"/>
               </a:rPr>
-              <a:t>Vorsichtige Bilanzpolitik: Viele KMU nutzen steuerliche Abschreibungsmöglichkeiten maximal – die Bilanz ist dadurch "schlechter" als die wirtschaftliche Realität</a:t>
-            </a:r>
-          </a:p>
-        </p:txBody>
-      </p:sp>
-      <p:sp>
-        <p:nvSpPr>
-          <p:cNvPr id="6" name="TextBox 5"/>
-          <p:cNvSpPr txBox="1"/>
-          <p:nvPr/>
-        </p:nvSpPr>
-        <p:spPr>
-          <a:xfrm>
-            <a:off x="11704320" y="6492240"/>
-            <a:ext cx="365760" cy="274320"/>
-          </a:xfrm>
-          <a:prstGeom prst="rect">
-            <a:avLst/>
-          </a:prstGeom>
-          <a:noFill/>
-        </p:spPr>
-        <p:txBody>
-          <a:bodyPr wrap="square">
-            <a:spAutoFit/>
-          </a:bodyPr>
-          <a:lstStyle/>
-          <a:p>
-            <a:pPr algn="r"/>
-            <a:r>
-              <a:rPr sz="1000" b="0">
-                <a:solidFill>
-                  <a:srgbClr val="6B7280"/>
-                </a:solidFill>
-                <a:latin typeface="Arial"/>
-              </a:rPr>
-              <a:t>5</a:t>
+              <a:t>Gerade in Krisenmomenten (Liquiditätsengpass, Investitionsentscheidung) wenden sich KMU-Inhaber an ihre Hausbank – weil sie wissen, dass dort jemand ihr Geschäft kennt. 3.</a:t>
+            </a:r>
+          </a:p>
+          <a:p>
+            <a:pPr>
+              <a:spcBef>
+                <a:spcPts val="500"/>
+              </a:spcBef>
+            </a:pPr>
+            <a:r>
+              <a:rPr sz="1500">
+                <a:solidFill>
+                  <a:srgbClr val="003DA5"/>
+                </a:solidFill>
+                <a:latin typeface="Arial"/>
+              </a:rPr>
+              <a:t>▪  </a:t>
+            </a:r>
+            <a:r>
+              <a:rPr sz="1700" b="1">
+                <a:solidFill>
+                  <a:srgbClr val="003DA5"/>
+                </a:solidFill>
+                <a:latin typeface="Arial"/>
+              </a:rPr>
+              <a:t>Gesamtbeziehung: </a:t>
+            </a:r>
+            <a:r>
+              <a:rPr sz="1700">
+                <a:solidFill>
+                  <a:srgbClr val="1A1A1A"/>
+                </a:solidFill>
+                <a:latin typeface="Arial"/>
+              </a:rPr>
+              <a:t>Kontokorrent, Darlehen, Zahlungsverkehr, Mitarbeiterkonten, oft auch Privatkundengeschäft der Familie – alles aus einer Hand.</a:t>
             </a:r>
           </a:p>
         </p:txBody>
@@ -7500,7 +11678,7 @@
     <p:bg>
       <p:bgPr>
         <a:solidFill>
-          <a:srgbClr val="FFFFFF"/>
+          <a:srgbClr val="1A1A1A"/>
         </a:solidFill>
         <a:effectLst/>
       </p:bgPr>
@@ -7527,7 +11705,7 @@
             <a:avLst/>
           </a:prstGeom>
           <a:solidFill>
-            <a:srgbClr val="003DA5"/>
+            <a:srgbClr val="E05B00"/>
           </a:solidFill>
           <a:ln>
             <a:noFill/>
@@ -7563,8 +11741,8 @@
         </p:nvSpPr>
         <p:spPr>
           <a:xfrm>
-            <a:off x="365760" y="274320"/>
-            <a:ext cx="11430000" cy="822960"/>
+            <a:off x="365760" y="2011680"/>
+            <a:ext cx="11430000" cy="2011680"/>
           </a:xfrm>
           <a:prstGeom prst="rect">
             <a:avLst/>
@@ -7579,189 +11757,13 @@
           <a:p>
             <a:pPr algn="l"/>
             <a:r>
-              <a:rPr sz="2200" b="1">
-                <a:solidFill>
-                  <a:srgbClr val="003DA5"/>
-                </a:solidFill>
-                <a:latin typeface="Arial"/>
-              </a:rPr>
-              <a:t>Die vier zentralen Risikofelder</a:t>
-            </a:r>
-          </a:p>
-        </p:txBody>
-      </p:sp>
-      <p:sp>
-        <p:nvSpPr>
-          <p:cNvPr id="4" name="Rectangle 3"/>
-          <p:cNvSpPr/>
-          <p:nvPr/>
-        </p:nvSpPr>
-        <p:spPr>
-          <a:xfrm>
-            <a:off x="365760" y="1051560"/>
-            <a:ext cx="11430000" cy="27432"/>
-          </a:xfrm>
-          <a:prstGeom prst="rect">
-            <a:avLst/>
-          </a:prstGeom>
-          <a:solidFill>
-            <a:srgbClr val="E5E7EB"/>
-          </a:solidFill>
-          <a:ln>
-            <a:noFill/>
-          </a:ln>
-        </p:spPr>
-        <p:style>
-          <a:lnRef idx="1">
-            <a:schemeClr val="accent1"/>
-          </a:lnRef>
-          <a:fillRef idx="3">
-            <a:schemeClr val="accent1"/>
-          </a:fillRef>
-          <a:effectRef idx="2">
-            <a:schemeClr val="accent1"/>
-          </a:effectRef>
-          <a:fontRef idx="minor">
-            <a:schemeClr val="lt1"/>
-          </a:fontRef>
-        </p:style>
-        <p:txBody>
-          <a:bodyPr rtlCol="0" anchor="ctr"/>
-          <a:lstStyle/>
-          <a:p>
-            <a:pPr algn="ctr"/>
-          </a:p>
-        </p:txBody>
-      </p:sp>
-      <p:sp>
-        <p:nvSpPr>
-          <p:cNvPr id="5" name="TextBox 4"/>
-          <p:cNvSpPr txBox="1"/>
-          <p:nvPr/>
-        </p:nvSpPr>
-        <p:spPr>
-          <a:xfrm>
-            <a:off x="365760" y="1234440"/>
-            <a:ext cx="11430000" cy="5212080"/>
-          </a:xfrm>
-          <a:prstGeom prst="rect">
-            <a:avLst/>
-          </a:prstGeom>
-          <a:noFill/>
-        </p:spPr>
-        <p:txBody>
-          <a:bodyPr wrap="square">
-            <a:spAutoFit/>
-          </a:bodyPr>
-          <a:lstStyle/>
-          <a:p>
-            <a:pPr>
-              <a:spcBef>
-                <a:spcPts val="400"/>
-              </a:spcBef>
-            </a:pPr>
-            <a:r>
-              <a:rPr sz="1500">
-                <a:solidFill>
-                  <a:srgbClr val="003DA5"/>
-                </a:solidFill>
-                <a:latin typeface="Arial"/>
-              </a:rPr>
-              <a:t>▪  </a:t>
-            </a:r>
-            <a:r>
-              <a:rPr sz="1700">
-                <a:solidFill>
-                  <a:srgbClr val="1A1A1A"/>
-                </a:solidFill>
-                <a:latin typeface="Arial"/>
-              </a:rPr>
-              <a:t>Die Vertriebskompetenz (Kundenbeziehungen, die am Inhaber hängen)</a:t>
-            </a:r>
-          </a:p>
-          <a:p>
-            <a:pPr>
-              <a:spcBef>
-                <a:spcPts val="400"/>
-              </a:spcBef>
-            </a:pPr>
-            <a:r>
-              <a:rPr sz="1500">
-                <a:solidFill>
-                  <a:srgbClr val="003DA5"/>
-                </a:solidFill>
-                <a:latin typeface="Arial"/>
-              </a:rPr>
-              <a:t>▪  </a:t>
-            </a:r>
-            <a:r>
-              <a:rPr sz="1700">
-                <a:solidFill>
-                  <a:srgbClr val="1A1A1A"/>
-                </a:solidFill>
-                <a:latin typeface="Arial"/>
-              </a:rPr>
-              <a:t>Das operative Know-how (Spezialwissen, das nirgendwo dokumentiert ist)</a:t>
-            </a:r>
-          </a:p>
-          <a:p>
-            <a:pPr>
-              <a:spcBef>
-                <a:spcPts val="400"/>
-              </a:spcBef>
-            </a:pPr>
-            <a:r>
-              <a:rPr sz="1500">
-                <a:solidFill>
-                  <a:srgbClr val="003DA5"/>
-                </a:solidFill>
-                <a:latin typeface="Arial"/>
-              </a:rPr>
-              <a:t>▪  </a:t>
-            </a:r>
-            <a:r>
-              <a:rPr sz="1700">
-                <a:solidFill>
-                  <a:srgbClr val="1A1A1A"/>
-                </a:solidFill>
-                <a:latin typeface="Arial"/>
-              </a:rPr>
-              <a:t>Die Entscheidungsfähigkeit (wer unterschreibt Verträge, Kreditanträge?)</a:t>
-            </a:r>
-          </a:p>
-        </p:txBody>
-      </p:sp>
-      <p:sp>
-        <p:nvSpPr>
-          <p:cNvPr id="6" name="TextBox 5"/>
-          <p:cNvSpPr txBox="1"/>
-          <p:nvPr/>
-        </p:nvSpPr>
-        <p:spPr>
-          <a:xfrm>
-            <a:off x="11704320" y="6492240"/>
-            <a:ext cx="365760" cy="274320"/>
-          </a:xfrm>
-          <a:prstGeom prst="rect">
-            <a:avLst/>
-          </a:prstGeom>
-          <a:noFill/>
-        </p:spPr>
-        <p:txBody>
-          <a:bodyPr wrap="square">
-            <a:spAutoFit/>
-          </a:bodyPr>
-          <a:lstStyle/>
-          <a:p>
-            <a:pPr algn="r"/>
-            <a:r>
-              <a:rPr sz="1000" b="0">
-                <a:solidFill>
-                  <a:srgbClr val="6B7280"/>
-                </a:solidFill>
-                <a:latin typeface="Arial"/>
-              </a:rPr>
-              <a:t>6</a:t>
+              <a:rPr sz="3600" b="1" i="0">
+                <a:solidFill>
+                  <a:srgbClr val="FFFFFF"/>
+                </a:solidFill>
+                <a:latin typeface="Arial"/>
+              </a:rPr>
+              <a:t>4.2 Theorie-Input 2: Finanzierungsmuster und typische Risikofelder</a:t>
             </a:r>
           </a:p>
         </p:txBody>
@@ -7843,8 +11845,8 @@
         </p:nvSpPr>
         <p:spPr>
           <a:xfrm>
-            <a:off x="365760" y="274320"/>
-            <a:ext cx="11430000" cy="822960"/>
+            <a:off x="228600" y="182880"/>
+            <a:ext cx="11430000" cy="320040"/>
           </a:xfrm>
           <a:prstGeom prst="rect">
             <a:avLst/>
@@ -7859,33 +11861,68 @@
           <a:p>
             <a:pPr algn="l"/>
             <a:r>
-              <a:rPr sz="2200" b="1">
+              <a:rPr sz="900" b="0" i="0">
+                <a:solidFill>
+                  <a:srgbClr val="556575"/>
+                </a:solidFill>
+                <a:latin typeface="Arial"/>
+              </a:rPr>
+              <a:t>M06 · Modulinhalte</a:t>
+            </a:r>
+          </a:p>
+        </p:txBody>
+      </p:sp>
+      <p:sp>
+        <p:nvSpPr>
+          <p:cNvPr id="4" name="TextBox 3"/>
+          <p:cNvSpPr txBox="1"/>
+          <p:nvPr/>
+        </p:nvSpPr>
+        <p:spPr>
+          <a:xfrm>
+            <a:off x="365760" y="274320"/>
+            <a:ext cx="11430000" cy="777240"/>
+          </a:xfrm>
+          <a:prstGeom prst="rect">
+            <a:avLst/>
+          </a:prstGeom>
+          <a:noFill/>
+        </p:spPr>
+        <p:txBody>
+          <a:bodyPr wrap="square">
+            <a:spAutoFit/>
+          </a:bodyPr>
+          <a:lstStyle/>
+          <a:p>
+            <a:pPr algn="l"/>
+            <a:r>
+              <a:rPr sz="2200" b="1" i="0">
                 <a:solidFill>
                   <a:srgbClr val="003DA5"/>
                 </a:solidFill>
                 <a:latin typeface="Arial"/>
               </a:rPr>
-              <a:t>Das Grundprinzip: Zahlen brauchen Kontext</a:t>
-            </a:r>
-          </a:p>
-        </p:txBody>
-      </p:sp>
-      <p:sp>
-        <p:nvSpPr>
-          <p:cNvPr id="4" name="Rectangle 3"/>
+              <a:t>Finanzierungsstruktur: KMU vs. Großunternehmen</a:t>
+            </a:r>
+          </a:p>
+        </p:txBody>
+      </p:sp>
+      <p:sp>
+        <p:nvSpPr>
+          <p:cNvPr id="5" name="Rectangle 4"/>
           <p:cNvSpPr/>
           <p:nvPr/>
         </p:nvSpPr>
         <p:spPr>
           <a:xfrm>
-            <a:off x="365760" y="1051560"/>
+            <a:off x="365760" y="1005840"/>
             <a:ext cx="11430000" cy="27432"/>
           </a:xfrm>
           <a:prstGeom prst="rect">
             <a:avLst/>
           </a:prstGeom>
           <a:solidFill>
-            <a:srgbClr val="E5E7EB"/>
+            <a:srgbClr val="D1D5DB"/>
           </a:solidFill>
           <a:ln>
             <a:noFill/>
@@ -7913,139 +11950,305 @@
           </a:p>
         </p:txBody>
       </p:sp>
-      <p:sp>
-        <p:nvSpPr>
-          <p:cNvPr id="5" name="TextBox 4"/>
-          <p:cNvSpPr txBox="1"/>
+      <p:graphicFrame>
+        <p:nvGraphicFramePr>
+          <p:cNvPr id="6" name="Table 5"/>
+          <p:cNvGraphicFramePr>
+            <a:graphicFrameLocks noGrp="1"/>
+          </p:cNvGraphicFramePr>
           <p:nvPr/>
-        </p:nvSpPr>
-        <p:spPr>
-          <a:xfrm>
-            <a:off x="365760" y="1234440"/>
-            <a:ext cx="11430000" cy="5212080"/>
-          </a:xfrm>
-          <a:prstGeom prst="rect">
-            <a:avLst/>
-          </a:prstGeom>
-          <a:noFill/>
-        </p:spPr>
-        <p:txBody>
-          <a:bodyPr wrap="square">
-            <a:spAutoFit/>
-          </a:bodyPr>
-          <a:lstStyle/>
-          <a:p>
-            <a:pPr>
-              <a:spcBef>
-                <a:spcPts val="400"/>
-              </a:spcBef>
-            </a:pPr>
-            <a:r>
-              <a:rPr sz="1500">
-                <a:solidFill>
-                  <a:srgbClr val="003DA5"/>
-                </a:solidFill>
-                <a:latin typeface="Arial"/>
-              </a:rPr>
-              <a:t>▪  </a:t>
-            </a:r>
-            <a:r>
-              <a:rPr sz="1700">
-                <a:solidFill>
-                  <a:srgbClr val="1A1A1A"/>
-                </a:solidFill>
-                <a:latin typeface="Arial"/>
-              </a:rPr>
-              <a:t>Eine Eigenkapitalquote von 20 % sagt nichts, solange man nicht weiß, was in der jeweiligen Branche üblich ist. Der…</a:t>
-            </a:r>
-          </a:p>
-          <a:p>
-            <a:pPr>
-              <a:spcBef>
-                <a:spcPts val="400"/>
-              </a:spcBef>
-            </a:pPr>
-            <a:r>
-              <a:rPr sz="1500">
-                <a:solidFill>
-                  <a:srgbClr val="003DA5"/>
-                </a:solidFill>
-                <a:latin typeface="Arial"/>
-              </a:rPr>
-              <a:t>▪  </a:t>
-            </a:r>
-            <a:r>
-              <a:rPr sz="1700">
-                <a:solidFill>
-                  <a:srgbClr val="1A1A1A"/>
-                </a:solidFill>
-                <a:latin typeface="Arial"/>
-              </a:rPr>
-              <a:t>Das wichtigste kostenfreie Instrument für Branchenvergleiche ist die Unternehmensabschlussstatistik der Deutschen…</a:t>
-            </a:r>
-          </a:p>
-          <a:p>
-            <a:pPr>
-              <a:spcBef>
-                <a:spcPts val="400"/>
-              </a:spcBef>
-            </a:pPr>
-            <a:r>
-              <a:rPr sz="1500">
-                <a:solidFill>
-                  <a:srgbClr val="003DA5"/>
-                </a:solidFill>
-                <a:latin typeface="Arial"/>
-              </a:rPr>
-              <a:t>▪  </a:t>
-            </a:r>
-            <a:r>
-              <a:rPr sz="1700">
-                <a:solidFill>
-                  <a:srgbClr val="1A1A1A"/>
-                </a:solidFill>
-                <a:latin typeface="Arial"/>
-              </a:rPr>
-              <a:t>Praxistipp: Die WZ-Klassifikation (Wirtschaftszweigklassifikation des Statistischen Bundesamts) ist das…</a:t>
-            </a:r>
-          </a:p>
-        </p:txBody>
-      </p:sp>
-      <p:sp>
-        <p:nvSpPr>
-          <p:cNvPr id="6" name="TextBox 5"/>
-          <p:cNvSpPr txBox="1"/>
-          <p:nvPr/>
-        </p:nvSpPr>
-        <p:spPr>
-          <a:xfrm>
-            <a:off x="11704320" y="6492240"/>
-            <a:ext cx="365760" cy="274320"/>
-          </a:xfrm>
-          <a:prstGeom prst="rect">
-            <a:avLst/>
-          </a:prstGeom>
-          <a:noFill/>
-        </p:spPr>
-        <p:txBody>
-          <a:bodyPr wrap="square">
-            <a:spAutoFit/>
-          </a:bodyPr>
-          <a:lstStyle/>
-          <a:p>
-            <a:pPr algn="r"/>
-            <a:r>
-              <a:rPr sz="1000" b="0">
-                <a:solidFill>
-                  <a:srgbClr val="6B7280"/>
-                </a:solidFill>
-                <a:latin typeface="Arial"/>
-              </a:rPr>
-              <a:t>7</a:t>
-            </a:r>
-          </a:p>
-        </p:txBody>
-      </p:sp>
+        </p:nvGraphicFramePr>
+        <p:xfrm>
+          <a:off x="365760" y="1143000"/>
+          <a:ext cx="11430000" cy="1901952"/>
+        </p:xfrm>
+        <a:graphic>
+          <a:graphicData uri="http://schemas.openxmlformats.org/drawingml/2006/table">
+            <a:tbl>
+              <a:tblPr firstRow="1" bandRow="1">
+                <a:tableStyleId>{5C22544A-7EE6-4342-B048-85BDC9FD1C3A}</a:tableStyleId>
+              </a:tblPr>
+              <a:tblGrid>
+                <a:gridCol w="3810000"/>
+                <a:gridCol w="3810000"/>
+                <a:gridCol w="3810000"/>
+              </a:tblGrid>
+              <a:tr h="475488">
+                <a:tc>
+                  <a:txBody>
+                    <a:bodyPr wrap="square"/>
+                    <a:lstStyle/>
+                    <a:p>
+                      <a:r>
+                        <a:rPr sz="1100" b="1">
+                          <a:solidFill>
+                            <a:srgbClr val="FFFFFF"/>
+                          </a:solidFill>
+                          <a:latin typeface="Arial"/>
+                        </a:rPr>
+                        <a:t>Programm</a:t>
+                      </a:r>
+                    </a:p>
+                  </a:txBody>
+                  <a:tcPr>
+                    <a:solidFill>
+                      <a:srgbClr val="003DA5"/>
+                    </a:solidFill>
+                  </a:tcPr>
+                </a:tc>
+                <a:tc>
+                  <a:txBody>
+                    <a:bodyPr wrap="square"/>
+                    <a:lstStyle/>
+                    <a:p>
+                      <a:r>
+                        <a:rPr sz="1100" b="1">
+                          <a:solidFill>
+                            <a:srgbClr val="FFFFFF"/>
+                          </a:solidFill>
+                          <a:latin typeface="Arial"/>
+                        </a:rPr>
+                        <a:t>Zweck</a:t>
+                      </a:r>
+                    </a:p>
+                  </a:txBody>
+                  <a:tcPr>
+                    <a:solidFill>
+                      <a:srgbClr val="003DA5"/>
+                    </a:solidFill>
+                  </a:tcPr>
+                </a:tc>
+                <a:tc>
+                  <a:txBody>
+                    <a:bodyPr wrap="square"/>
+                    <a:lstStyle/>
+                    <a:p>
+                      <a:r>
+                        <a:rPr sz="1100" b="1">
+                          <a:solidFill>
+                            <a:srgbClr val="FFFFFF"/>
+                          </a:solidFill>
+                          <a:latin typeface="Arial"/>
+                        </a:rPr>
+                        <a:t>Typische Konditionen</a:t>
+                      </a:r>
+                    </a:p>
+                  </a:txBody>
+                  <a:tcPr>
+                    <a:solidFill>
+                      <a:srgbClr val="003DA5"/>
+                    </a:solidFill>
+                  </a:tcPr>
+                </a:tc>
+              </a:tr>
+              <a:tr h="475488">
+                <a:tc>
+                  <a:txBody>
+                    <a:bodyPr wrap="square"/>
+                    <a:lstStyle/>
+                    <a:p>
+                      <a:r>
+                        <a:rPr sz="1100" b="0">
+                          <a:solidFill>
+                            <a:srgbClr val="1A1A1A"/>
+                          </a:solidFill>
+                          <a:latin typeface="Arial"/>
+                        </a:rPr>
+                        <a:t>KfW-Unternehmerkredit (ERP 037/047)</a:t>
+                      </a:r>
+                    </a:p>
+                  </a:txBody>
+                  <a:tcPr>
+                    <a:solidFill>
+                      <a:srgbClr val="FFFFFF"/>
+                    </a:solidFill>
+                  </a:tcPr>
+                </a:tc>
+                <a:tc>
+                  <a:txBody>
+                    <a:bodyPr wrap="square"/>
+                    <a:lstStyle/>
+                    <a:p>
+                      <a:r>
+                        <a:rPr sz="1100" b="0">
+                          <a:solidFill>
+                            <a:srgbClr val="1A1A1A"/>
+                          </a:solidFill>
+                          <a:latin typeface="Arial"/>
+                        </a:rPr>
+                        <a:t>Investitionen und Betriebsmittel ab 25 TEUR; für alle KMU und Mittelstand</a:t>
+                      </a:r>
+                    </a:p>
+                  </a:txBody>
+                  <a:tcPr>
+                    <a:solidFill>
+                      <a:srgbClr val="FFFFFF"/>
+                    </a:solidFill>
+                  </a:tcPr>
+                </a:tc>
+                <a:tc>
+                  <a:txBody>
+                    <a:bodyPr wrap="square"/>
+                    <a:lstStyle/>
+                    <a:p>
+                      <a:r>
+                        <a:rPr sz="1100" b="0">
+                          <a:solidFill>
+                            <a:srgbClr val="1A1A1A"/>
+                          </a:solidFill>
+                          <a:latin typeface="Arial"/>
+                        </a:rPr>
+                        <a:t>Zinsgünstig, bis 25 Mio. EUR, variabel oder fest, Haftungsfreistellung möglich</a:t>
+                      </a:r>
+                    </a:p>
+                  </a:txBody>
+                  <a:tcPr>
+                    <a:solidFill>
+                      <a:srgbClr val="FFFFFF"/>
+                    </a:solidFill>
+                  </a:tcPr>
+                </a:tc>
+              </a:tr>
+              <a:tr h="475488">
+                <a:tc>
+                  <a:txBody>
+                    <a:bodyPr wrap="square"/>
+                    <a:lstStyle/>
+                    <a:p>
+                      <a:r>
+                        <a:rPr sz="1100" b="0">
+                          <a:solidFill>
+                            <a:srgbClr val="1A1A1A"/>
+                          </a:solidFill>
+                          <a:latin typeface="Arial"/>
+                        </a:rPr>
+                        <a:t>KfW-Unternehmerkapital / ERP-Kapital für Gründung</a:t>
+                      </a:r>
+                    </a:p>
+                  </a:txBody>
+                  <a:tcPr>
+                    <a:solidFill>
+                      <a:srgbClr val="F4F6FA"/>
+                    </a:solidFill>
+                  </a:tcPr>
+                </a:tc>
+                <a:tc>
+                  <a:txBody>
+                    <a:bodyPr wrap="square"/>
+                    <a:lstStyle/>
+                    <a:p>
+                      <a:r>
+                        <a:rPr sz="1100" b="0">
+                          <a:solidFill>
+                            <a:srgbClr val="1A1A1A"/>
+                          </a:solidFill>
+                          <a:latin typeface="Arial"/>
+                        </a:rPr>
+                        <a:t>Neugründung, Unternehmensnachfolge, Beteiligungsfinanzierung</a:t>
+                      </a:r>
+                    </a:p>
+                  </a:txBody>
+                  <a:tcPr>
+                    <a:solidFill>
+                      <a:srgbClr val="F4F6FA"/>
+                    </a:solidFill>
+                  </a:tcPr>
+                </a:tc>
+                <a:tc>
+                  <a:txBody>
+                    <a:bodyPr wrap="square"/>
+                    <a:lstStyle/>
+                    <a:p>
+                      <a:r>
+                        <a:rPr sz="1100" b="0">
+                          <a:solidFill>
+                            <a:srgbClr val="1A1A1A"/>
+                          </a:solidFill>
+                          <a:latin typeface="Arial"/>
+                        </a:rPr>
+                        <a:t>Nachrangdarlehen mit Eigenkapitalwirkung; Laufzeit bis 15 Jahre; tilgungsfreie Anlaufjahre</a:t>
+                      </a:r>
+                    </a:p>
+                  </a:txBody>
+                  <a:tcPr>
+                    <a:solidFill>
+                      <a:srgbClr val="F4F6FA"/>
+                    </a:solidFill>
+                  </a:tcPr>
+                </a:tc>
+              </a:tr>
+              <a:tr h="475488">
+                <a:tc>
+                  <a:txBody>
+                    <a:bodyPr wrap="square"/>
+                    <a:lstStyle/>
+                    <a:p>
+                      <a:r>
+                        <a:rPr sz="1100" b="0">
+                          <a:solidFill>
+                            <a:srgbClr val="1A1A1A"/>
+                          </a:solidFill>
+                          <a:latin typeface="Arial"/>
+                        </a:rPr>
+                        <a:t>L-Bank (Baden-Württemberg) / LfA (Bayern)</a:t>
+                      </a:r>
+                    </a:p>
+                  </a:txBody>
+                  <a:tcPr>
+                    <a:solidFill>
+                      <a:srgbClr val="FFFFFF"/>
+                    </a:solidFill>
+                  </a:tcPr>
+                </a:tc>
+                <a:tc>
+                  <a:txBody>
+                    <a:bodyPr wrap="square"/>
+                    <a:lstStyle/>
+                    <a:p>
+                      <a:r>
+                        <a:rPr sz="1100" b="0">
+                          <a:solidFill>
+                            <a:srgbClr val="1A1A1A"/>
+                          </a:solidFill>
+                          <a:latin typeface="Arial"/>
+                        </a:rPr>
+                        <a:t>Länderspezifische Investitions- und Innovationsförderung; Energieeffizienz; Digitalisierung</a:t>
+                      </a:r>
+                    </a:p>
+                  </a:txBody>
+                  <a:tcPr>
+                    <a:solidFill>
+                      <a:srgbClr val="FFFFFF"/>
+                    </a:solidFill>
+                  </a:tcPr>
+                </a:tc>
+                <a:tc>
+                  <a:txBody>
+                    <a:bodyPr wrap="square"/>
+                    <a:lstStyle/>
+                    <a:p>
+                      <a:r>
+                        <a:rPr sz="1100" b="0">
+                          <a:solidFill>
+                            <a:srgbClr val="1A1A1A"/>
+                          </a:solidFill>
+                          <a:latin typeface="Arial"/>
+                        </a:rPr>
+                        <a:t>Kombinierbar mit KfW-Programmen; oft günstigere Konditionen als Hausbank-Markt</a:t>
+                      </a:r>
+                    </a:p>
+                  </a:txBody>
+                  <a:tcPr>
+                    <a:solidFill>
+                      <a:srgbClr val="FFFFFF"/>
+                    </a:solidFill>
+                  </a:tcPr>
+                </a:tc>
+              </a:tr>
+            </a:tbl>
+          </a:graphicData>
+        </a:graphic>
+      </p:graphicFrame>
     </p:spTree>
   </p:cSld>
   <p:clrMapOvr>

--- a/public/downloads/praesentation/M06.pptx
+++ b/public/downloads/praesentation/M06.pptx
@@ -4915,7 +4915,7 @@
                   </a:txBody>
                   <a:tcPr>
                     <a:solidFill>
-                      <a:srgbClr val="191D2E"/>
+                      <a:srgbClr val="1F2B56"/>
                     </a:solidFill>
                   </a:tcPr>
                 </a:tc>
@@ -4937,7 +4937,7 @@
                   </a:txBody>
                   <a:tcPr>
                     <a:solidFill>
-                      <a:srgbClr val="191D2E"/>
+                      <a:srgbClr val="1F2B56"/>
                     </a:solidFill>
                   </a:tcPr>
                 </a:tc>
@@ -4959,7 +4959,7 @@
                   </a:txBody>
                   <a:tcPr>
                     <a:solidFill>
-                      <a:srgbClr val="191D2E"/>
+                      <a:srgbClr val="1F2B56"/>
                     </a:solidFill>
                   </a:tcPr>
                 </a:tc>
@@ -7706,7 +7706,7 @@
                   </a:txBody>
                   <a:tcPr>
                     <a:solidFill>
-                      <a:srgbClr val="191D2E"/>
+                      <a:srgbClr val="1F2B56"/>
                     </a:solidFill>
                   </a:tcPr>
                 </a:tc>
@@ -7728,7 +7728,7 @@
                   </a:txBody>
                   <a:tcPr>
                     <a:solidFill>
-                      <a:srgbClr val="191D2E"/>
+                      <a:srgbClr val="1F2B56"/>
                     </a:solidFill>
                   </a:tcPr>
                 </a:tc>
@@ -7750,7 +7750,7 @@
                   </a:txBody>
                   <a:tcPr>
                     <a:solidFill>
-                      <a:srgbClr val="191D2E"/>
+                      <a:srgbClr val="1F2B56"/>
                     </a:solidFill>
                   </a:tcPr>
                 </a:tc>
@@ -9906,29 +9906,29 @@
         </p:nvSpPr>
         <p:spPr>
           <a:xfrm>
-            <a:off x="4064000" y="927100"/>
-            <a:ext cx="508000" cy="647700"/>
-          </a:xfrm>
-          <a:prstGeom prst="rect">
-            <a:avLst/>
-          </a:prstGeom>
-          <a:noFill/>
-        </p:spPr>
-        <p:txBody>
-          <a:bodyPr wrap="square">
+            <a:off x="4064000" y="939799"/>
+            <a:ext cx="762000" cy="647700"/>
+          </a:xfrm>
+          <a:prstGeom prst="rect">
+            <a:avLst/>
+          </a:prstGeom>
+          <a:noFill/>
+        </p:spPr>
+        <p:txBody>
+          <a:bodyPr wrap="none">
             <a:normAutofit/>
           </a:bodyPr>
           <a:lstStyle/>
           <a:p>
             <a:pPr algn="l"/>
             <a:r>
-              <a:rPr sz="2600" b="0" i="1">
+              <a:rPr sz="2400" b="0" i="1">
                 <a:solidFill>
                   <a:srgbClr val="1F2B56"/>
                 </a:solidFill>
                 <a:latin typeface="Georgia"/>
               </a:rPr>
-              <a:t>I.</a:t>
+              <a:t>I</a:t>
             </a:r>
           </a:p>
         </p:txBody>
@@ -9941,8 +9941,8 @@
         </p:nvSpPr>
         <p:spPr>
           <a:xfrm>
-            <a:off x="4699000" y="952500"/>
-            <a:ext cx="6858000" cy="622300"/>
+            <a:off x="4953000" y="952500"/>
+            <a:ext cx="6629400" cy="635000"/>
           </a:xfrm>
           <a:prstGeom prst="rect">
             <a:avLst/>
@@ -9976,7 +9976,7 @@
         </p:nvSpPr>
         <p:spPr>
           <a:xfrm>
-            <a:off x="4064000" y="1574800"/>
+            <a:off x="4064000" y="1587500"/>
             <a:ext cx="7518399" cy="6350"/>
           </a:xfrm>
           <a:prstGeom prst="rect">
@@ -10019,29 +10019,29 @@
         </p:nvSpPr>
         <p:spPr>
           <a:xfrm>
-            <a:off x="4064000" y="1612900"/>
-            <a:ext cx="508000" cy="647700"/>
-          </a:xfrm>
-          <a:prstGeom prst="rect">
-            <a:avLst/>
-          </a:prstGeom>
-          <a:noFill/>
-        </p:spPr>
-        <p:txBody>
-          <a:bodyPr wrap="square">
+            <a:off x="4064000" y="1638300"/>
+            <a:ext cx="762000" cy="647700"/>
+          </a:xfrm>
+          <a:prstGeom prst="rect">
+            <a:avLst/>
+          </a:prstGeom>
+          <a:noFill/>
+        </p:spPr>
+        <p:txBody>
+          <a:bodyPr wrap="none">
             <a:normAutofit/>
           </a:bodyPr>
           <a:lstStyle/>
           <a:p>
             <a:pPr algn="l"/>
             <a:r>
-              <a:rPr sz="2600" b="0" i="1">
+              <a:rPr sz="2400" b="0" i="1">
                 <a:solidFill>
                   <a:srgbClr val="1F2B56"/>
                 </a:solidFill>
                 <a:latin typeface="Georgia"/>
               </a:rPr>
-              <a:t>II.</a:t>
+              <a:t>II</a:t>
             </a:r>
           </a:p>
         </p:txBody>
@@ -10054,8 +10054,8 @@
         </p:nvSpPr>
         <p:spPr>
           <a:xfrm>
-            <a:off x="4699000" y="1638300"/>
-            <a:ext cx="6858000" cy="622300"/>
+            <a:off x="4953000" y="1651000"/>
+            <a:ext cx="6629400" cy="635000"/>
           </a:xfrm>
           <a:prstGeom prst="rect">
             <a:avLst/>
@@ -10089,7 +10089,7 @@
         </p:nvSpPr>
         <p:spPr>
           <a:xfrm>
-            <a:off x="4064000" y="2260600"/>
+            <a:off x="4064000" y="2286000"/>
             <a:ext cx="7518399" cy="6350"/>
           </a:xfrm>
           <a:prstGeom prst="rect">
@@ -10132,29 +10132,29 @@
         </p:nvSpPr>
         <p:spPr>
           <a:xfrm>
-            <a:off x="4064000" y="2298700"/>
-            <a:ext cx="508000" cy="647700"/>
-          </a:xfrm>
-          <a:prstGeom prst="rect">
-            <a:avLst/>
-          </a:prstGeom>
-          <a:noFill/>
-        </p:spPr>
-        <p:txBody>
-          <a:bodyPr wrap="square">
+            <a:off x="4064000" y="2336800"/>
+            <a:ext cx="762000" cy="647700"/>
+          </a:xfrm>
+          <a:prstGeom prst="rect">
+            <a:avLst/>
+          </a:prstGeom>
+          <a:noFill/>
+        </p:spPr>
+        <p:txBody>
+          <a:bodyPr wrap="none">
             <a:normAutofit/>
           </a:bodyPr>
           <a:lstStyle/>
           <a:p>
             <a:pPr algn="l"/>
             <a:r>
-              <a:rPr sz="2600" b="0" i="1">
+              <a:rPr sz="2400" b="0" i="1">
                 <a:solidFill>
                   <a:srgbClr val="1F2B56"/>
                 </a:solidFill>
                 <a:latin typeface="Georgia"/>
               </a:rPr>
-              <a:t>III.</a:t>
+              <a:t>III</a:t>
             </a:r>
           </a:p>
         </p:txBody>
@@ -10167,8 +10167,8 @@
         </p:nvSpPr>
         <p:spPr>
           <a:xfrm>
-            <a:off x="4699000" y="2324100"/>
-            <a:ext cx="6858000" cy="622300"/>
+            <a:off x="4953000" y="2349500"/>
+            <a:ext cx="6629400" cy="635000"/>
           </a:xfrm>
           <a:prstGeom prst="rect">
             <a:avLst/>
@@ -10202,7 +10202,7 @@
         </p:nvSpPr>
         <p:spPr>
           <a:xfrm>
-            <a:off x="4064000" y="2946400"/>
+            <a:off x="4064000" y="2984500"/>
             <a:ext cx="7518399" cy="6350"/>
           </a:xfrm>
           <a:prstGeom prst="rect">
@@ -10245,29 +10245,29 @@
         </p:nvSpPr>
         <p:spPr>
           <a:xfrm>
-            <a:off x="4064000" y="2984500"/>
-            <a:ext cx="508000" cy="647700"/>
-          </a:xfrm>
-          <a:prstGeom prst="rect">
-            <a:avLst/>
-          </a:prstGeom>
-          <a:noFill/>
-        </p:spPr>
-        <p:txBody>
-          <a:bodyPr wrap="square">
+            <a:off x="4064000" y="3035300"/>
+            <a:ext cx="762000" cy="647700"/>
+          </a:xfrm>
+          <a:prstGeom prst="rect">
+            <a:avLst/>
+          </a:prstGeom>
+          <a:noFill/>
+        </p:spPr>
+        <p:txBody>
+          <a:bodyPr wrap="none">
             <a:normAutofit/>
           </a:bodyPr>
           <a:lstStyle/>
           <a:p>
             <a:pPr algn="l"/>
             <a:r>
-              <a:rPr sz="2600" b="0" i="1">
+              <a:rPr sz="2400" b="0" i="1">
                 <a:solidFill>
                   <a:srgbClr val="1F2B56"/>
                 </a:solidFill>
                 <a:latin typeface="Georgia"/>
               </a:rPr>
-              <a:t>IV.</a:t>
+              <a:t>IV</a:t>
             </a:r>
           </a:p>
         </p:txBody>
@@ -10280,8 +10280,8 @@
         </p:nvSpPr>
         <p:spPr>
           <a:xfrm>
-            <a:off x="4699000" y="3009900"/>
-            <a:ext cx="6858000" cy="622300"/>
+            <a:off x="4953000" y="3048000"/>
+            <a:ext cx="6629400" cy="635000"/>
           </a:xfrm>
           <a:prstGeom prst="rect">
             <a:avLst/>
@@ -10912,7 +10912,7 @@
     <p:bg>
       <p:bgPr>
         <a:solidFill>
-          <a:srgbClr val="191D2E"/>
+          <a:srgbClr val="1F2B56"/>
         </a:solidFill>
         <a:effectLst/>
       </p:bgPr>
@@ -11421,7 +11421,7 @@
                   </a:txBody>
                   <a:tcPr>
                     <a:solidFill>
-                      <a:srgbClr val="191D2E"/>
+                      <a:srgbClr val="1F2B56"/>
                     </a:solidFill>
                   </a:tcPr>
                 </a:tc>
@@ -11443,7 +11443,7 @@
                   </a:txBody>
                   <a:tcPr>
                     <a:solidFill>
-                      <a:srgbClr val="191D2E"/>
+                      <a:srgbClr val="1F2B56"/>
                     </a:solidFill>
                   </a:tcPr>
                 </a:tc>
@@ -11465,7 +11465,7 @@
                   </a:txBody>
                   <a:tcPr>
                     <a:solidFill>
-                      <a:srgbClr val="191D2E"/>
+                      <a:srgbClr val="1F2B56"/>
                     </a:solidFill>
                   </a:tcPr>
                 </a:tc>
@@ -11487,7 +11487,7 @@
                   </a:txBody>
                   <a:tcPr>
                     <a:solidFill>
-                      <a:srgbClr val="191D2E"/>
+                      <a:srgbClr val="1F2B56"/>
                     </a:solidFill>
                   </a:tcPr>
                 </a:tc>
@@ -12759,7 +12759,7 @@
         <p:spPr>
           <a:xfrm>
             <a:off x="609600" y="920750"/>
-            <a:ext cx="10972800" cy="1778000"/>
+            <a:ext cx="4826000" cy="1778000"/>
           </a:xfrm>
           <a:prstGeom prst="rect">
             <a:avLst/>
@@ -12787,57 +12787,14 @@
       </p:sp>
       <p:sp>
         <p:nvSpPr>
-          <p:cNvPr id="7" name="Rectangle 6"/>
-          <p:cNvSpPr/>
-          <p:nvPr/>
-        </p:nvSpPr>
-        <p:spPr>
-          <a:xfrm>
-            <a:off x="609600" y="2762250"/>
-            <a:ext cx="10972800" cy="6350"/>
-          </a:xfrm>
-          <a:prstGeom prst="rect">
-            <a:avLst/>
-          </a:prstGeom>
-          <a:solidFill>
-            <a:srgbClr val="E0E0E8"/>
-          </a:solidFill>
-          <a:ln>
-            <a:noFill/>
-          </a:ln>
-        </p:spPr>
-        <p:style>
-          <a:lnRef idx="1">
-            <a:schemeClr val="accent1"/>
-          </a:lnRef>
-          <a:fillRef idx="3">
-            <a:schemeClr val="accent1"/>
-          </a:fillRef>
-          <a:effectRef idx="2">
-            <a:schemeClr val="accent1"/>
-          </a:effectRef>
-          <a:fontRef idx="minor">
-            <a:schemeClr val="lt1"/>
-          </a:fontRef>
-        </p:style>
-        <p:txBody>
-          <a:bodyPr rtlCol="0" anchor="ctr"/>
-          <a:lstStyle/>
-          <a:p>
-            <a:pPr algn="ctr"/>
-          </a:p>
-        </p:txBody>
-      </p:sp>
-      <p:sp>
-        <p:nvSpPr>
-          <p:cNvPr id="8" name="TextBox 7"/>
-          <p:cNvSpPr txBox="1"/>
-          <p:nvPr/>
-        </p:nvSpPr>
-        <p:spPr>
-          <a:xfrm>
-            <a:off x="609600" y="2876550"/>
-            <a:ext cx="254000" cy="355600"/>
+          <p:cNvPr id="7" name="TextBox 6"/>
+          <p:cNvSpPr txBox="1"/>
+          <p:nvPr/>
+        </p:nvSpPr>
+        <p:spPr>
+          <a:xfrm>
+            <a:off x="609600" y="2825750"/>
+            <a:ext cx="4826000" cy="1016000"/>
           </a:xfrm>
           <a:prstGeom prst="rect">
             <a:avLst/>
@@ -12852,321 +12809,1764 @@
           <a:p>
             <a:pPr algn="l"/>
             <a:r>
-              <a:rPr sz="2200" b="0" i="0">
-                <a:solidFill>
-                  <a:srgbClr val="1F2B56"/>
+              <a:rPr sz="1400" b="0" i="0">
+                <a:solidFill>
+                  <a:srgbClr val="4D5270"/>
                 </a:solidFill>
                 <a:latin typeface="Georgia"/>
               </a:rPr>
-              <a:t>–</a:t>
-            </a:r>
-          </a:p>
-        </p:txBody>
-      </p:sp>
-      <p:sp>
-        <p:nvSpPr>
-          <p:cNvPr id="9" name="TextBox 8"/>
-          <p:cNvSpPr txBox="1"/>
-          <p:nvPr/>
-        </p:nvSpPr>
-        <p:spPr>
-          <a:xfrm>
-            <a:off x="939799" y="2851150"/>
-            <a:ext cx="10642600" cy="508000"/>
-          </a:xfrm>
-          <a:prstGeom prst="rect">
-            <a:avLst/>
-          </a:prstGeom>
-          <a:noFill/>
-        </p:spPr>
-        <p:txBody>
-          <a:bodyPr wrap="square">
-            <a:normAutofit/>
-          </a:bodyPr>
-          <a:lstStyle/>
-          <a:p>
-            <a:pPr algn="l"/>
-            <a:r>
-              <a:rPr sz="1400" b="0" i="0">
-                <a:solidFill>
-                  <a:srgbClr val="191D2E"/>
-                </a:solidFill>
-                <a:latin typeface="Georgia"/>
-              </a:rPr>
-              <a:t>Ø 4,0–5,0: Solide Grundlagen gelegt. Bereit für Vertiefungsmodule M07 (Heilberufe) oder M08 (Immobilien).</a:t>
-            </a:r>
-          </a:p>
-        </p:txBody>
-      </p:sp>
-      <p:sp>
-        <p:nvSpPr>
-          <p:cNvPr id="10" name="Rectangle 9"/>
-          <p:cNvSpPr/>
-          <p:nvPr/>
-        </p:nvSpPr>
-        <p:spPr>
-          <a:xfrm>
-            <a:off x="939799" y="3333750"/>
-            <a:ext cx="10642600" cy="6350"/>
-          </a:xfrm>
-          <a:prstGeom prst="rect">
-            <a:avLst/>
-          </a:prstGeom>
-          <a:solidFill>
-            <a:srgbClr val="E0E0E8"/>
-          </a:solidFill>
-          <a:ln>
-            <a:noFill/>
-          </a:ln>
-        </p:spPr>
-        <p:style>
-          <a:lnRef idx="1">
-            <a:schemeClr val="accent1"/>
-          </a:lnRef>
-          <a:fillRef idx="3">
-            <a:schemeClr val="accent1"/>
-          </a:fillRef>
-          <a:effectRef idx="2">
-            <a:schemeClr val="accent1"/>
-          </a:effectRef>
-          <a:fontRef idx="minor">
-            <a:schemeClr val="lt1"/>
-          </a:fontRef>
-        </p:style>
-        <p:txBody>
-          <a:bodyPr rtlCol="0" anchor="ctr"/>
-          <a:lstStyle/>
-          <a:p>
-            <a:pPr algn="ctr"/>
-          </a:p>
-        </p:txBody>
-      </p:sp>
-      <p:sp>
-        <p:nvSpPr>
-          <p:cNvPr id="11" name="TextBox 10"/>
-          <p:cNvSpPr txBox="1"/>
-          <p:nvPr/>
-        </p:nvSpPr>
-        <p:spPr>
-          <a:xfrm>
-            <a:off x="609600" y="3409950"/>
-            <a:ext cx="254000" cy="355600"/>
-          </a:xfrm>
-          <a:prstGeom prst="rect">
-            <a:avLst/>
-          </a:prstGeom>
-          <a:noFill/>
-        </p:spPr>
-        <p:txBody>
-          <a:bodyPr wrap="square">
-            <a:normAutofit/>
-          </a:bodyPr>
-          <a:lstStyle/>
-          <a:p>
-            <a:pPr algn="l"/>
-            <a:r>
-              <a:rPr sz="2200" b="0" i="0">
-                <a:solidFill>
-                  <a:srgbClr val="1F2B56"/>
-                </a:solidFill>
-                <a:latin typeface="Georgia"/>
-              </a:rPr>
-              <a:t>–</a:t>
-            </a:r>
-          </a:p>
-        </p:txBody>
-      </p:sp>
-      <p:sp>
-        <p:nvSpPr>
-          <p:cNvPr id="12" name="TextBox 11"/>
-          <p:cNvSpPr txBox="1"/>
-          <p:nvPr/>
-        </p:nvSpPr>
-        <p:spPr>
-          <a:xfrm>
-            <a:off x="939799" y="3384550"/>
-            <a:ext cx="10642600" cy="508000"/>
-          </a:xfrm>
-          <a:prstGeom prst="rect">
-            <a:avLst/>
-          </a:prstGeom>
-          <a:noFill/>
-        </p:spPr>
-        <p:txBody>
-          <a:bodyPr wrap="square">
-            <a:normAutofit/>
-          </a:bodyPr>
-          <a:lstStyle/>
-          <a:p>
-            <a:pPr algn="l"/>
-            <a:r>
-              <a:rPr sz="1400" b="0" i="0">
-                <a:solidFill>
-                  <a:srgbClr val="191D2E"/>
-                </a:solidFill>
-                <a:latin typeface="Georgia"/>
-              </a:rPr>
-              <a:t>Ø 3,0–3,9: Auf dem richtigen Weg. Wo liegt Ihr größtes Entwicklungsfeld – Branchenwissen oder Risikofragen?</a:t>
-            </a:r>
-          </a:p>
-        </p:txBody>
-      </p:sp>
-      <p:sp>
-        <p:nvSpPr>
-          <p:cNvPr id="13" name="Rectangle 12"/>
-          <p:cNvSpPr/>
-          <p:nvPr/>
-        </p:nvSpPr>
-        <p:spPr>
-          <a:xfrm>
-            <a:off x="939799" y="3867150"/>
-            <a:ext cx="10642600" cy="6350"/>
-          </a:xfrm>
-          <a:prstGeom prst="rect">
-            <a:avLst/>
-          </a:prstGeom>
-          <a:solidFill>
-            <a:srgbClr val="E0E0E8"/>
-          </a:solidFill>
-          <a:ln>
-            <a:noFill/>
-          </a:ln>
-        </p:spPr>
-        <p:style>
-          <a:lnRef idx="1">
-            <a:schemeClr val="accent1"/>
-          </a:lnRef>
-          <a:fillRef idx="3">
-            <a:schemeClr val="accent1"/>
-          </a:fillRef>
-          <a:effectRef idx="2">
-            <a:schemeClr val="accent1"/>
-          </a:effectRef>
-          <a:fontRef idx="minor">
-            <a:schemeClr val="lt1"/>
-          </a:fontRef>
-        </p:style>
-        <p:txBody>
-          <a:bodyPr rtlCol="0" anchor="ctr"/>
-          <a:lstStyle/>
-          <a:p>
-            <a:pPr algn="ctr"/>
-          </a:p>
-        </p:txBody>
-      </p:sp>
-      <p:sp>
-        <p:nvSpPr>
-          <p:cNvPr id="14" name="TextBox 13"/>
-          <p:cNvSpPr txBox="1"/>
-          <p:nvPr/>
-        </p:nvSpPr>
-        <p:spPr>
-          <a:xfrm>
-            <a:off x="609600" y="3943350"/>
-            <a:ext cx="254000" cy="355600"/>
-          </a:xfrm>
-          <a:prstGeom prst="rect">
-            <a:avLst/>
-          </a:prstGeom>
-          <a:noFill/>
-        </p:spPr>
-        <p:txBody>
-          <a:bodyPr wrap="square">
-            <a:normAutofit/>
-          </a:bodyPr>
-          <a:lstStyle/>
-          <a:p>
-            <a:pPr algn="l"/>
-            <a:r>
-              <a:rPr sz="2200" b="0" i="0">
-                <a:solidFill>
-                  <a:srgbClr val="1F2B56"/>
-                </a:solidFill>
-                <a:latin typeface="Georgia"/>
-              </a:rPr>
-              <a:t>–</a:t>
-            </a:r>
-          </a:p>
-        </p:txBody>
-      </p:sp>
-      <p:sp>
-        <p:nvSpPr>
-          <p:cNvPr id="15" name="TextBox 14"/>
-          <p:cNvSpPr txBox="1"/>
-          <p:nvPr/>
-        </p:nvSpPr>
-        <p:spPr>
-          <a:xfrm>
-            <a:off x="939799" y="3917950"/>
-            <a:ext cx="10642600" cy="508000"/>
-          </a:xfrm>
-          <a:prstGeom prst="rect">
-            <a:avLst/>
-          </a:prstGeom>
-          <a:noFill/>
-        </p:spPr>
-        <p:txBody>
-          <a:bodyPr wrap="square">
-            <a:normAutofit/>
-          </a:bodyPr>
-          <a:lstStyle/>
-          <a:p>
-            <a:pPr algn="l"/>
-            <a:r>
-              <a:rPr sz="1400" b="0" i="0">
-                <a:solidFill>
-                  <a:srgbClr val="191D2E"/>
-                </a:solidFill>
-                <a:latin typeface="Georgia"/>
-              </a:rPr>
-              <a:t>Ø &lt; 3,0: Theorie-Inputs 1–3 nochmals durcharbeiten, dann Selbstcheck wiederholen. Empfehlung: Profilbogen für 1 Bestandskunden sorgfältig ausfüllen.</a:t>
-            </a:r>
-          </a:p>
-        </p:txBody>
-      </p:sp>
-      <p:sp>
-        <p:nvSpPr>
-          <p:cNvPr id="16" name="Rectangle 15"/>
-          <p:cNvSpPr/>
-          <p:nvPr/>
-        </p:nvSpPr>
-        <p:spPr>
-          <a:xfrm>
-            <a:off x="939799" y="4400550"/>
-            <a:ext cx="10642600" cy="6350"/>
-          </a:xfrm>
-          <a:prstGeom prst="rect">
-            <a:avLst/>
-          </a:prstGeom>
-          <a:solidFill>
-            <a:srgbClr val="E0E0E8"/>
-          </a:solidFill>
-          <a:ln>
-            <a:noFill/>
-          </a:ln>
-        </p:spPr>
-        <p:style>
-          <a:lnRef idx="1">
-            <a:schemeClr val="accent1"/>
-          </a:lnRef>
-          <a:fillRef idx="3">
-            <a:schemeClr val="accent1"/>
-          </a:fillRef>
-          <a:effectRef idx="2">
-            <a:schemeClr val="accent1"/>
-          </a:effectRef>
-          <a:fontRef idx="minor">
-            <a:schemeClr val="lt1"/>
-          </a:fontRef>
-        </p:style>
-        <p:txBody>
-          <a:bodyPr rtlCol="0" anchor="ctr"/>
-          <a:lstStyle/>
-          <a:p>
-            <a:pPr algn="ctr"/>
-          </a:p>
-        </p:txBody>
-      </p:sp>
+              <a:t>Bewerten Sie sich selbst auf einer Skala von 1 (trifft nicht zu) bis 5 (trifft voll zu):</a:t>
+            </a:r>
+          </a:p>
+        </p:txBody>
+      </p:sp>
+      <p:graphicFrame>
+        <p:nvGraphicFramePr>
+          <p:cNvPr id="8" name="Table 7"/>
+          <p:cNvGraphicFramePr>
+            <a:graphicFrameLocks noGrp="1"/>
+          </p:cNvGraphicFramePr>
+          <p:nvPr/>
+        </p:nvGraphicFramePr>
+        <p:xfrm>
+          <a:off x="5715000" y="920750"/>
+          <a:ext cx="5867400" cy="4190999"/>
+        </p:xfrm>
+        <a:graphic>
+          <a:graphicData uri="http://schemas.openxmlformats.org/drawingml/2006/table">
+            <a:tbl>
+              <a:tblPr firstRow="1" bandRow="1">
+                <a:tableStyleId>{5C22544A-7EE6-4342-B048-85BDC9FD1C3A}</a:tableStyleId>
+              </a:tblPr>
+              <a:tblGrid>
+                <a:gridCol w="838200"/>
+                <a:gridCol w="838200"/>
+                <a:gridCol w="838200"/>
+                <a:gridCol w="838200"/>
+                <a:gridCol w="838200"/>
+                <a:gridCol w="838200"/>
+                <a:gridCol w="838200"/>
+              </a:tblGrid>
+              <a:tr h="380999">
+                <a:tc>
+                  <a:txBody>
+                    <a:bodyPr wrap="square"/>
+                    <a:lstStyle/>
+                    <a:p>
+                      <a:r>
+                        <a:rPr sz="1000" b="1">
+                          <a:solidFill>
+                            <a:srgbClr val="F8F8FA"/>
+                          </a:solidFill>
+                          <a:latin typeface="Courier New"/>
+                        </a:rPr>
+                        <a:t>Aussage</a:t>
+                      </a:r>
+                    </a:p>
+                  </a:txBody>
+                  <a:tcPr>
+                    <a:solidFill>
+                      <a:srgbClr val="1F2B56"/>
+                    </a:solidFill>
+                  </a:tcPr>
+                </a:tc>
+                <a:tc>
+                  <a:txBody>
+                    <a:bodyPr wrap="square"/>
+                    <a:lstStyle/>
+                    <a:p>
+                      <a:r>
+                        <a:rPr sz="1000" b="1">
+                          <a:solidFill>
+                            <a:srgbClr val="F8F8FA"/>
+                          </a:solidFill>
+                          <a:latin typeface="Courier New"/>
+                        </a:rPr>
+                        <a:t>1</a:t>
+                      </a:r>
+                    </a:p>
+                  </a:txBody>
+                  <a:tcPr>
+                    <a:solidFill>
+                      <a:srgbClr val="1F2B56"/>
+                    </a:solidFill>
+                  </a:tcPr>
+                </a:tc>
+                <a:tc>
+                  <a:txBody>
+                    <a:bodyPr wrap="square"/>
+                    <a:lstStyle/>
+                    <a:p>
+                      <a:r>
+                        <a:rPr sz="1000" b="1">
+                          <a:solidFill>
+                            <a:srgbClr val="F8F8FA"/>
+                          </a:solidFill>
+                          <a:latin typeface="Courier New"/>
+                        </a:rPr>
+                        <a:t>2</a:t>
+                      </a:r>
+                    </a:p>
+                  </a:txBody>
+                  <a:tcPr>
+                    <a:solidFill>
+                      <a:srgbClr val="1F2B56"/>
+                    </a:solidFill>
+                  </a:tcPr>
+                </a:tc>
+                <a:tc>
+                  <a:txBody>
+                    <a:bodyPr wrap="square"/>
+                    <a:lstStyle/>
+                    <a:p>
+                      <a:r>
+                        <a:rPr sz="1000" b="1">
+                          <a:solidFill>
+                            <a:srgbClr val="F8F8FA"/>
+                          </a:solidFill>
+                          <a:latin typeface="Courier New"/>
+                        </a:rPr>
+                        <a:t>3</a:t>
+                      </a:r>
+                    </a:p>
+                  </a:txBody>
+                  <a:tcPr>
+                    <a:solidFill>
+                      <a:srgbClr val="1F2B56"/>
+                    </a:solidFill>
+                  </a:tcPr>
+                </a:tc>
+                <a:tc>
+                  <a:txBody>
+                    <a:bodyPr wrap="square"/>
+                    <a:lstStyle/>
+                    <a:p>
+                      <a:r>
+                        <a:rPr sz="1000" b="1">
+                          <a:solidFill>
+                            <a:srgbClr val="F8F8FA"/>
+                          </a:solidFill>
+                          <a:latin typeface="Courier New"/>
+                        </a:rPr>
+                        <a:t>4</a:t>
+                      </a:r>
+                    </a:p>
+                  </a:txBody>
+                  <a:tcPr>
+                    <a:solidFill>
+                      <a:srgbClr val="1F2B56"/>
+                    </a:solidFill>
+                  </a:tcPr>
+                </a:tc>
+                <a:tc>
+                  <a:txBody>
+                    <a:bodyPr wrap="square"/>
+                    <a:lstStyle/>
+                    <a:p>
+                      <a:r>
+                        <a:rPr sz="1000" b="1">
+                          <a:solidFill>
+                            <a:srgbClr val="F8F8FA"/>
+                          </a:solidFill>
+                          <a:latin typeface="Courier New"/>
+                        </a:rPr>
+                        <a:t>5</a:t>
+                      </a:r>
+                    </a:p>
+                  </a:txBody>
+                  <a:tcPr>
+                    <a:solidFill>
+                      <a:srgbClr val="1F2B56"/>
+                    </a:solidFill>
+                  </a:tcPr>
+                </a:tc>
+                <a:tc>
+                  <a:txBody>
+                    <a:bodyPr wrap="square"/>
+                    <a:lstStyle/>
+                    <a:p>
+                      <a:r>
+                        <a:rPr sz="1000" b="1">
+                          <a:solidFill>
+                            <a:srgbClr val="F8F8FA"/>
+                          </a:solidFill>
+                          <a:latin typeface="Courier New"/>
+                        </a:rPr>
+                        <a:t>Notiz</a:t>
+                      </a:r>
+                    </a:p>
+                  </a:txBody>
+                  <a:tcPr>
+                    <a:solidFill>
+                      <a:srgbClr val="1F2B56"/>
+                    </a:solidFill>
+                  </a:tcPr>
+                </a:tc>
+              </a:tr>
+              <a:tr h="380999">
+                <a:tc>
+                  <a:txBody>
+                    <a:bodyPr wrap="square"/>
+                    <a:lstStyle/>
+                    <a:p>
+                      <a:r>
+                        <a:rPr sz="1000" b="0">
+                          <a:solidFill>
+                            <a:srgbClr val="191D2E"/>
+                          </a:solidFill>
+                          <a:latin typeface="Courier New"/>
+                        </a:rPr>
+                        <a:t>Ich kann KMU nach IfM und EU-Definition sofort korrekt einordnen.</a:t>
+                      </a:r>
+                    </a:p>
+                  </a:txBody>
+                  <a:tcPr>
+                    <a:solidFill>
+                      <a:srgbClr val="F8F8FA"/>
+                    </a:solidFill>
+                  </a:tcPr>
+                </a:tc>
+                <a:tc>
+                  <a:txBody>
+                    <a:bodyPr wrap="square"/>
+                    <a:lstStyle/>
+                    <a:p>
+                      <a:r>
+                        <a:rPr sz="1000" b="0">
+                          <a:solidFill>
+                            <a:srgbClr val="191D2E"/>
+                          </a:solidFill>
+                          <a:latin typeface="Courier New"/>
+                        </a:rPr>
+                        <a:t/>
+                      </a:r>
+                    </a:p>
+                  </a:txBody>
+                  <a:tcPr>
+                    <a:solidFill>
+                      <a:srgbClr val="F8F8FA"/>
+                    </a:solidFill>
+                  </a:tcPr>
+                </a:tc>
+                <a:tc>
+                  <a:txBody>
+                    <a:bodyPr wrap="square"/>
+                    <a:lstStyle/>
+                    <a:p>
+                      <a:r>
+                        <a:rPr sz="1000" b="0">
+                          <a:solidFill>
+                            <a:srgbClr val="191D2E"/>
+                          </a:solidFill>
+                          <a:latin typeface="Courier New"/>
+                        </a:rPr>
+                        <a:t/>
+                      </a:r>
+                    </a:p>
+                  </a:txBody>
+                  <a:tcPr>
+                    <a:solidFill>
+                      <a:srgbClr val="F8F8FA"/>
+                    </a:solidFill>
+                  </a:tcPr>
+                </a:tc>
+                <a:tc>
+                  <a:txBody>
+                    <a:bodyPr wrap="square"/>
+                    <a:lstStyle/>
+                    <a:p>
+                      <a:r>
+                        <a:rPr sz="1000" b="0">
+                          <a:solidFill>
+                            <a:srgbClr val="191D2E"/>
+                          </a:solidFill>
+                          <a:latin typeface="Courier New"/>
+                        </a:rPr>
+                        <a:t/>
+                      </a:r>
+                    </a:p>
+                  </a:txBody>
+                  <a:tcPr>
+                    <a:solidFill>
+                      <a:srgbClr val="F8F8FA"/>
+                    </a:solidFill>
+                  </a:tcPr>
+                </a:tc>
+                <a:tc>
+                  <a:txBody>
+                    <a:bodyPr wrap="square"/>
+                    <a:lstStyle/>
+                    <a:p>
+                      <a:r>
+                        <a:rPr sz="1000" b="0">
+                          <a:solidFill>
+                            <a:srgbClr val="191D2E"/>
+                          </a:solidFill>
+                          <a:latin typeface="Courier New"/>
+                        </a:rPr>
+                        <a:t/>
+                      </a:r>
+                    </a:p>
+                  </a:txBody>
+                  <a:tcPr>
+                    <a:solidFill>
+                      <a:srgbClr val="F8F8FA"/>
+                    </a:solidFill>
+                  </a:tcPr>
+                </a:tc>
+                <a:tc>
+                  <a:txBody>
+                    <a:bodyPr wrap="square"/>
+                    <a:lstStyle/>
+                    <a:p>
+                      <a:r>
+                        <a:rPr sz="1000" b="0">
+                          <a:solidFill>
+                            <a:srgbClr val="191D2E"/>
+                          </a:solidFill>
+                          <a:latin typeface="Courier New"/>
+                        </a:rPr>
+                        <a:t/>
+                      </a:r>
+                    </a:p>
+                  </a:txBody>
+                  <a:tcPr>
+                    <a:solidFill>
+                      <a:srgbClr val="F8F8FA"/>
+                    </a:solidFill>
+                  </a:tcPr>
+                </a:tc>
+                <a:tc>
+                  <a:txBody>
+                    <a:bodyPr wrap="square"/>
+                    <a:lstStyle/>
+                    <a:p>
+                      <a:r>
+                        <a:rPr sz="1000" b="0">
+                          <a:solidFill>
+                            <a:srgbClr val="191D2E"/>
+                          </a:solidFill>
+                          <a:latin typeface="Courier New"/>
+                        </a:rPr>
+                        <a:t/>
+                      </a:r>
+                    </a:p>
+                  </a:txBody>
+                  <a:tcPr>
+                    <a:solidFill>
+                      <a:srgbClr val="F8F8FA"/>
+                    </a:solidFill>
+                  </a:tcPr>
+                </a:tc>
+              </a:tr>
+              <a:tr h="380999">
+                <a:tc>
+                  <a:txBody>
+                    <a:bodyPr wrap="square"/>
+                    <a:lstStyle/>
+                    <a:p>
+                      <a:r>
+                        <a:rPr sz="1000" b="0">
+                          <a:solidFill>
+                            <a:srgbClr val="191D2E"/>
+                          </a:solidFill>
+                          <a:latin typeface="Courier New"/>
+                        </a:rPr>
+                        <a:t>Ich kenne die Branchenprofile Handwerk, Industrie, Handel und Freie Berufe und ihre typischen Finanzierungsmuster.</a:t>
+                      </a:r>
+                    </a:p>
+                  </a:txBody>
+                  <a:tcPr>
+                    <a:solidFill>
+                      <a:srgbClr val="F0F0F5"/>
+                    </a:solidFill>
+                  </a:tcPr>
+                </a:tc>
+                <a:tc>
+                  <a:txBody>
+                    <a:bodyPr wrap="square"/>
+                    <a:lstStyle/>
+                    <a:p>
+                      <a:r>
+                        <a:rPr sz="1000" b="0">
+                          <a:solidFill>
+                            <a:srgbClr val="191D2E"/>
+                          </a:solidFill>
+                          <a:latin typeface="Courier New"/>
+                        </a:rPr>
+                        <a:t/>
+                      </a:r>
+                    </a:p>
+                  </a:txBody>
+                  <a:tcPr>
+                    <a:solidFill>
+                      <a:srgbClr val="F0F0F5"/>
+                    </a:solidFill>
+                  </a:tcPr>
+                </a:tc>
+                <a:tc>
+                  <a:txBody>
+                    <a:bodyPr wrap="square"/>
+                    <a:lstStyle/>
+                    <a:p>
+                      <a:r>
+                        <a:rPr sz="1000" b="0">
+                          <a:solidFill>
+                            <a:srgbClr val="191D2E"/>
+                          </a:solidFill>
+                          <a:latin typeface="Courier New"/>
+                        </a:rPr>
+                        <a:t/>
+                      </a:r>
+                    </a:p>
+                  </a:txBody>
+                  <a:tcPr>
+                    <a:solidFill>
+                      <a:srgbClr val="F0F0F5"/>
+                    </a:solidFill>
+                  </a:tcPr>
+                </a:tc>
+                <a:tc>
+                  <a:txBody>
+                    <a:bodyPr wrap="square"/>
+                    <a:lstStyle/>
+                    <a:p>
+                      <a:r>
+                        <a:rPr sz="1000" b="0">
+                          <a:solidFill>
+                            <a:srgbClr val="191D2E"/>
+                          </a:solidFill>
+                          <a:latin typeface="Courier New"/>
+                        </a:rPr>
+                        <a:t/>
+                      </a:r>
+                    </a:p>
+                  </a:txBody>
+                  <a:tcPr>
+                    <a:solidFill>
+                      <a:srgbClr val="F0F0F5"/>
+                    </a:solidFill>
+                  </a:tcPr>
+                </a:tc>
+                <a:tc>
+                  <a:txBody>
+                    <a:bodyPr wrap="square"/>
+                    <a:lstStyle/>
+                    <a:p>
+                      <a:r>
+                        <a:rPr sz="1000" b="0">
+                          <a:solidFill>
+                            <a:srgbClr val="191D2E"/>
+                          </a:solidFill>
+                          <a:latin typeface="Courier New"/>
+                        </a:rPr>
+                        <a:t/>
+                      </a:r>
+                    </a:p>
+                  </a:txBody>
+                  <a:tcPr>
+                    <a:solidFill>
+                      <a:srgbClr val="F0F0F5"/>
+                    </a:solidFill>
+                  </a:tcPr>
+                </a:tc>
+                <a:tc>
+                  <a:txBody>
+                    <a:bodyPr wrap="square"/>
+                    <a:lstStyle/>
+                    <a:p>
+                      <a:r>
+                        <a:rPr sz="1000" b="0">
+                          <a:solidFill>
+                            <a:srgbClr val="191D2E"/>
+                          </a:solidFill>
+                          <a:latin typeface="Courier New"/>
+                        </a:rPr>
+                        <a:t/>
+                      </a:r>
+                    </a:p>
+                  </a:txBody>
+                  <a:tcPr>
+                    <a:solidFill>
+                      <a:srgbClr val="F0F0F5"/>
+                    </a:solidFill>
+                  </a:tcPr>
+                </a:tc>
+                <a:tc>
+                  <a:txBody>
+                    <a:bodyPr wrap="square"/>
+                    <a:lstStyle/>
+                    <a:p>
+                      <a:r>
+                        <a:rPr sz="1000" b="0">
+                          <a:solidFill>
+                            <a:srgbClr val="191D2E"/>
+                          </a:solidFill>
+                          <a:latin typeface="Courier New"/>
+                        </a:rPr>
+                        <a:t/>
+                      </a:r>
+                    </a:p>
+                  </a:txBody>
+                  <a:tcPr>
+                    <a:solidFill>
+                      <a:srgbClr val="F0F0F5"/>
+                    </a:solidFill>
+                  </a:tcPr>
+                </a:tc>
+              </a:tr>
+              <a:tr h="380999">
+                <a:tc>
+                  <a:txBody>
+                    <a:bodyPr wrap="square"/>
+                    <a:lstStyle/>
+                    <a:p>
+                      <a:r>
+                        <a:rPr sz="1000" b="0">
+                          <a:solidFill>
+                            <a:srgbClr val="191D2E"/>
+                          </a:solidFill>
+                          <a:latin typeface="Courier New"/>
+                        </a:rPr>
+                        <a:t>Ich nutze die Bundesbank-Unternehmensabschlussstatistik aktiv für Branchenvergleiche.</a:t>
+                      </a:r>
+                    </a:p>
+                  </a:txBody>
+                  <a:tcPr>
+                    <a:solidFill>
+                      <a:srgbClr val="F8F8FA"/>
+                    </a:solidFill>
+                  </a:tcPr>
+                </a:tc>
+                <a:tc>
+                  <a:txBody>
+                    <a:bodyPr wrap="square"/>
+                    <a:lstStyle/>
+                    <a:p>
+                      <a:r>
+                        <a:rPr sz="1000" b="0">
+                          <a:solidFill>
+                            <a:srgbClr val="191D2E"/>
+                          </a:solidFill>
+                          <a:latin typeface="Courier New"/>
+                        </a:rPr>
+                        <a:t/>
+                      </a:r>
+                    </a:p>
+                  </a:txBody>
+                  <a:tcPr>
+                    <a:solidFill>
+                      <a:srgbClr val="F8F8FA"/>
+                    </a:solidFill>
+                  </a:tcPr>
+                </a:tc>
+                <a:tc>
+                  <a:txBody>
+                    <a:bodyPr wrap="square"/>
+                    <a:lstStyle/>
+                    <a:p>
+                      <a:r>
+                        <a:rPr sz="1000" b="0">
+                          <a:solidFill>
+                            <a:srgbClr val="191D2E"/>
+                          </a:solidFill>
+                          <a:latin typeface="Courier New"/>
+                        </a:rPr>
+                        <a:t/>
+                      </a:r>
+                    </a:p>
+                  </a:txBody>
+                  <a:tcPr>
+                    <a:solidFill>
+                      <a:srgbClr val="F8F8FA"/>
+                    </a:solidFill>
+                  </a:tcPr>
+                </a:tc>
+                <a:tc>
+                  <a:txBody>
+                    <a:bodyPr wrap="square"/>
+                    <a:lstStyle/>
+                    <a:p>
+                      <a:r>
+                        <a:rPr sz="1000" b="0">
+                          <a:solidFill>
+                            <a:srgbClr val="191D2E"/>
+                          </a:solidFill>
+                          <a:latin typeface="Courier New"/>
+                        </a:rPr>
+                        <a:t/>
+                      </a:r>
+                    </a:p>
+                  </a:txBody>
+                  <a:tcPr>
+                    <a:solidFill>
+                      <a:srgbClr val="F8F8FA"/>
+                    </a:solidFill>
+                  </a:tcPr>
+                </a:tc>
+                <a:tc>
+                  <a:txBody>
+                    <a:bodyPr wrap="square"/>
+                    <a:lstStyle/>
+                    <a:p>
+                      <a:r>
+                        <a:rPr sz="1000" b="0">
+                          <a:solidFill>
+                            <a:srgbClr val="191D2E"/>
+                          </a:solidFill>
+                          <a:latin typeface="Courier New"/>
+                        </a:rPr>
+                        <a:t/>
+                      </a:r>
+                    </a:p>
+                  </a:txBody>
+                  <a:tcPr>
+                    <a:solidFill>
+                      <a:srgbClr val="F8F8FA"/>
+                    </a:solidFill>
+                  </a:tcPr>
+                </a:tc>
+                <a:tc>
+                  <a:txBody>
+                    <a:bodyPr wrap="square"/>
+                    <a:lstStyle/>
+                    <a:p>
+                      <a:r>
+                        <a:rPr sz="1000" b="0">
+                          <a:solidFill>
+                            <a:srgbClr val="191D2E"/>
+                          </a:solidFill>
+                          <a:latin typeface="Courier New"/>
+                        </a:rPr>
+                        <a:t/>
+                      </a:r>
+                    </a:p>
+                  </a:txBody>
+                  <a:tcPr>
+                    <a:solidFill>
+                      <a:srgbClr val="F8F8FA"/>
+                    </a:solidFill>
+                  </a:tcPr>
+                </a:tc>
+                <a:tc>
+                  <a:txBody>
+                    <a:bodyPr wrap="square"/>
+                    <a:lstStyle/>
+                    <a:p>
+                      <a:r>
+                        <a:rPr sz="1000" b="0">
+                          <a:solidFill>
+                            <a:srgbClr val="191D2E"/>
+                          </a:solidFill>
+                          <a:latin typeface="Courier New"/>
+                        </a:rPr>
+                        <a:t/>
+                      </a:r>
+                    </a:p>
+                  </a:txBody>
+                  <a:tcPr>
+                    <a:solidFill>
+                      <a:srgbClr val="F8F8FA"/>
+                    </a:solidFill>
+                  </a:tcPr>
+                </a:tc>
+              </a:tr>
+              <a:tr h="380999">
+                <a:tc>
+                  <a:txBody>
+                    <a:bodyPr wrap="square"/>
+                    <a:lstStyle/>
+                    <a:p>
+                      <a:r>
+                        <a:rPr sz="1000" b="0">
+                          <a:solidFill>
+                            <a:srgbClr val="191D2E"/>
+                          </a:solidFill>
+                          <a:latin typeface="Courier New"/>
+                        </a:rPr>
+                        <a:t>Ich frage bei Kunden systematisch nach dem Klumpenrisiko (Abhängigkeit von wenigen Kunden).</a:t>
+                      </a:r>
+                    </a:p>
+                  </a:txBody>
+                  <a:tcPr>
+                    <a:solidFill>
+                      <a:srgbClr val="F0F0F5"/>
+                    </a:solidFill>
+                  </a:tcPr>
+                </a:tc>
+                <a:tc>
+                  <a:txBody>
+                    <a:bodyPr wrap="square"/>
+                    <a:lstStyle/>
+                    <a:p>
+                      <a:r>
+                        <a:rPr sz="1000" b="0">
+                          <a:solidFill>
+                            <a:srgbClr val="191D2E"/>
+                          </a:solidFill>
+                          <a:latin typeface="Courier New"/>
+                        </a:rPr>
+                        <a:t/>
+                      </a:r>
+                    </a:p>
+                  </a:txBody>
+                  <a:tcPr>
+                    <a:solidFill>
+                      <a:srgbClr val="F0F0F5"/>
+                    </a:solidFill>
+                  </a:tcPr>
+                </a:tc>
+                <a:tc>
+                  <a:txBody>
+                    <a:bodyPr wrap="square"/>
+                    <a:lstStyle/>
+                    <a:p>
+                      <a:r>
+                        <a:rPr sz="1000" b="0">
+                          <a:solidFill>
+                            <a:srgbClr val="191D2E"/>
+                          </a:solidFill>
+                          <a:latin typeface="Courier New"/>
+                        </a:rPr>
+                        <a:t/>
+                      </a:r>
+                    </a:p>
+                  </a:txBody>
+                  <a:tcPr>
+                    <a:solidFill>
+                      <a:srgbClr val="F0F0F5"/>
+                    </a:solidFill>
+                  </a:tcPr>
+                </a:tc>
+                <a:tc>
+                  <a:txBody>
+                    <a:bodyPr wrap="square"/>
+                    <a:lstStyle/>
+                    <a:p>
+                      <a:r>
+                        <a:rPr sz="1000" b="0">
+                          <a:solidFill>
+                            <a:srgbClr val="191D2E"/>
+                          </a:solidFill>
+                          <a:latin typeface="Courier New"/>
+                        </a:rPr>
+                        <a:t/>
+                      </a:r>
+                    </a:p>
+                  </a:txBody>
+                  <a:tcPr>
+                    <a:solidFill>
+                      <a:srgbClr val="F0F0F5"/>
+                    </a:solidFill>
+                  </a:tcPr>
+                </a:tc>
+                <a:tc>
+                  <a:txBody>
+                    <a:bodyPr wrap="square"/>
+                    <a:lstStyle/>
+                    <a:p>
+                      <a:r>
+                        <a:rPr sz="1000" b="0">
+                          <a:solidFill>
+                            <a:srgbClr val="191D2E"/>
+                          </a:solidFill>
+                          <a:latin typeface="Courier New"/>
+                        </a:rPr>
+                        <a:t/>
+                      </a:r>
+                    </a:p>
+                  </a:txBody>
+                  <a:tcPr>
+                    <a:solidFill>
+                      <a:srgbClr val="F0F0F5"/>
+                    </a:solidFill>
+                  </a:tcPr>
+                </a:tc>
+                <a:tc>
+                  <a:txBody>
+                    <a:bodyPr wrap="square"/>
+                    <a:lstStyle/>
+                    <a:p>
+                      <a:r>
+                        <a:rPr sz="1000" b="0">
+                          <a:solidFill>
+                            <a:srgbClr val="191D2E"/>
+                          </a:solidFill>
+                          <a:latin typeface="Courier New"/>
+                        </a:rPr>
+                        <a:t/>
+                      </a:r>
+                    </a:p>
+                  </a:txBody>
+                  <a:tcPr>
+                    <a:solidFill>
+                      <a:srgbClr val="F0F0F5"/>
+                    </a:solidFill>
+                  </a:tcPr>
+                </a:tc>
+                <a:tc>
+                  <a:txBody>
+                    <a:bodyPr wrap="square"/>
+                    <a:lstStyle/>
+                    <a:p>
+                      <a:r>
+                        <a:rPr sz="1000" b="0">
+                          <a:solidFill>
+                            <a:srgbClr val="191D2E"/>
+                          </a:solidFill>
+                          <a:latin typeface="Courier New"/>
+                        </a:rPr>
+                        <a:t/>
+                      </a:r>
+                    </a:p>
+                  </a:txBody>
+                  <a:tcPr>
+                    <a:solidFill>
+                      <a:srgbClr val="F0F0F5"/>
+                    </a:solidFill>
+                  </a:tcPr>
+                </a:tc>
+              </a:tr>
+              <a:tr h="380999">
+                <a:tc>
+                  <a:txBody>
+                    <a:bodyPr wrap="square"/>
+                    <a:lstStyle/>
+                    <a:p>
+                      <a:r>
+                        <a:rPr sz="1000" b="0">
+                          <a:solidFill>
+                            <a:srgbClr val="191D2E"/>
+                          </a:solidFill>
+                          <a:latin typeface="Courier New"/>
+                        </a:rPr>
+                        <a:t>Ich habe das Schlüsselpersonenrisiko mit mindestens einem Kunden thematisiert.</a:t>
+                      </a:r>
+                    </a:p>
+                  </a:txBody>
+                  <a:tcPr>
+                    <a:solidFill>
+                      <a:srgbClr val="F8F8FA"/>
+                    </a:solidFill>
+                  </a:tcPr>
+                </a:tc>
+                <a:tc>
+                  <a:txBody>
+                    <a:bodyPr wrap="square"/>
+                    <a:lstStyle/>
+                    <a:p>
+                      <a:r>
+                        <a:rPr sz="1000" b="0">
+                          <a:solidFill>
+                            <a:srgbClr val="191D2E"/>
+                          </a:solidFill>
+                          <a:latin typeface="Courier New"/>
+                        </a:rPr>
+                        <a:t/>
+                      </a:r>
+                    </a:p>
+                  </a:txBody>
+                  <a:tcPr>
+                    <a:solidFill>
+                      <a:srgbClr val="F8F8FA"/>
+                    </a:solidFill>
+                  </a:tcPr>
+                </a:tc>
+                <a:tc>
+                  <a:txBody>
+                    <a:bodyPr wrap="square"/>
+                    <a:lstStyle/>
+                    <a:p>
+                      <a:r>
+                        <a:rPr sz="1000" b="0">
+                          <a:solidFill>
+                            <a:srgbClr val="191D2E"/>
+                          </a:solidFill>
+                          <a:latin typeface="Courier New"/>
+                        </a:rPr>
+                        <a:t/>
+                      </a:r>
+                    </a:p>
+                  </a:txBody>
+                  <a:tcPr>
+                    <a:solidFill>
+                      <a:srgbClr val="F8F8FA"/>
+                    </a:solidFill>
+                  </a:tcPr>
+                </a:tc>
+                <a:tc>
+                  <a:txBody>
+                    <a:bodyPr wrap="square"/>
+                    <a:lstStyle/>
+                    <a:p>
+                      <a:r>
+                        <a:rPr sz="1000" b="0">
+                          <a:solidFill>
+                            <a:srgbClr val="191D2E"/>
+                          </a:solidFill>
+                          <a:latin typeface="Courier New"/>
+                        </a:rPr>
+                        <a:t/>
+                      </a:r>
+                    </a:p>
+                  </a:txBody>
+                  <a:tcPr>
+                    <a:solidFill>
+                      <a:srgbClr val="F8F8FA"/>
+                    </a:solidFill>
+                  </a:tcPr>
+                </a:tc>
+                <a:tc>
+                  <a:txBody>
+                    <a:bodyPr wrap="square"/>
+                    <a:lstStyle/>
+                    <a:p>
+                      <a:r>
+                        <a:rPr sz="1000" b="0">
+                          <a:solidFill>
+                            <a:srgbClr val="191D2E"/>
+                          </a:solidFill>
+                          <a:latin typeface="Courier New"/>
+                        </a:rPr>
+                        <a:t/>
+                      </a:r>
+                    </a:p>
+                  </a:txBody>
+                  <a:tcPr>
+                    <a:solidFill>
+                      <a:srgbClr val="F8F8FA"/>
+                    </a:solidFill>
+                  </a:tcPr>
+                </a:tc>
+                <a:tc>
+                  <a:txBody>
+                    <a:bodyPr wrap="square"/>
+                    <a:lstStyle/>
+                    <a:p>
+                      <a:r>
+                        <a:rPr sz="1000" b="0">
+                          <a:solidFill>
+                            <a:srgbClr val="191D2E"/>
+                          </a:solidFill>
+                          <a:latin typeface="Courier New"/>
+                        </a:rPr>
+                        <a:t/>
+                      </a:r>
+                    </a:p>
+                  </a:txBody>
+                  <a:tcPr>
+                    <a:solidFill>
+                      <a:srgbClr val="F8F8FA"/>
+                    </a:solidFill>
+                  </a:tcPr>
+                </a:tc>
+                <a:tc>
+                  <a:txBody>
+                    <a:bodyPr wrap="square"/>
+                    <a:lstStyle/>
+                    <a:p>
+                      <a:r>
+                        <a:rPr sz="1000" b="0">
+                          <a:solidFill>
+                            <a:srgbClr val="191D2E"/>
+                          </a:solidFill>
+                          <a:latin typeface="Courier New"/>
+                        </a:rPr>
+                        <a:t/>
+                      </a:r>
+                    </a:p>
+                  </a:txBody>
+                  <a:tcPr>
+                    <a:solidFill>
+                      <a:srgbClr val="F8F8FA"/>
+                    </a:solidFill>
+                  </a:tcPr>
+                </a:tc>
+              </a:tr>
+              <a:tr h="380999">
+                <a:tc>
+                  <a:txBody>
+                    <a:bodyPr wrap="square"/>
+                    <a:lstStyle/>
+                    <a:p>
+                      <a:r>
+                        <a:rPr sz="1000" b="0">
+                          <a:solidFill>
+                            <a:srgbClr val="191D2E"/>
+                          </a:solidFill>
+                          <a:latin typeface="Courier New"/>
+                        </a:rPr>
+                        <a:t>Ich habe einen R+V-Beratungsansatz aus dem Schlüsselpersonenthema entwickelt.</a:t>
+                      </a:r>
+                    </a:p>
+                  </a:txBody>
+                  <a:tcPr>
+                    <a:solidFill>
+                      <a:srgbClr val="F0F0F5"/>
+                    </a:solidFill>
+                  </a:tcPr>
+                </a:tc>
+                <a:tc>
+                  <a:txBody>
+                    <a:bodyPr wrap="square"/>
+                    <a:lstStyle/>
+                    <a:p>
+                      <a:r>
+                        <a:rPr sz="1000" b="0">
+                          <a:solidFill>
+                            <a:srgbClr val="191D2E"/>
+                          </a:solidFill>
+                          <a:latin typeface="Courier New"/>
+                        </a:rPr>
+                        <a:t/>
+                      </a:r>
+                    </a:p>
+                  </a:txBody>
+                  <a:tcPr>
+                    <a:solidFill>
+                      <a:srgbClr val="F0F0F5"/>
+                    </a:solidFill>
+                  </a:tcPr>
+                </a:tc>
+                <a:tc>
+                  <a:txBody>
+                    <a:bodyPr wrap="square"/>
+                    <a:lstStyle/>
+                    <a:p>
+                      <a:r>
+                        <a:rPr sz="1000" b="0">
+                          <a:solidFill>
+                            <a:srgbClr val="191D2E"/>
+                          </a:solidFill>
+                          <a:latin typeface="Courier New"/>
+                        </a:rPr>
+                        <a:t/>
+                      </a:r>
+                    </a:p>
+                  </a:txBody>
+                  <a:tcPr>
+                    <a:solidFill>
+                      <a:srgbClr val="F0F0F5"/>
+                    </a:solidFill>
+                  </a:tcPr>
+                </a:tc>
+                <a:tc>
+                  <a:txBody>
+                    <a:bodyPr wrap="square"/>
+                    <a:lstStyle/>
+                    <a:p>
+                      <a:r>
+                        <a:rPr sz="1000" b="0">
+                          <a:solidFill>
+                            <a:srgbClr val="191D2E"/>
+                          </a:solidFill>
+                          <a:latin typeface="Courier New"/>
+                        </a:rPr>
+                        <a:t/>
+                      </a:r>
+                    </a:p>
+                  </a:txBody>
+                  <a:tcPr>
+                    <a:solidFill>
+                      <a:srgbClr val="F0F0F5"/>
+                    </a:solidFill>
+                  </a:tcPr>
+                </a:tc>
+                <a:tc>
+                  <a:txBody>
+                    <a:bodyPr wrap="square"/>
+                    <a:lstStyle/>
+                    <a:p>
+                      <a:r>
+                        <a:rPr sz="1000" b="0">
+                          <a:solidFill>
+                            <a:srgbClr val="191D2E"/>
+                          </a:solidFill>
+                          <a:latin typeface="Courier New"/>
+                        </a:rPr>
+                        <a:t/>
+                      </a:r>
+                    </a:p>
+                  </a:txBody>
+                  <a:tcPr>
+                    <a:solidFill>
+                      <a:srgbClr val="F0F0F5"/>
+                    </a:solidFill>
+                  </a:tcPr>
+                </a:tc>
+                <a:tc>
+                  <a:txBody>
+                    <a:bodyPr wrap="square"/>
+                    <a:lstStyle/>
+                    <a:p>
+                      <a:r>
+                        <a:rPr sz="1000" b="0">
+                          <a:solidFill>
+                            <a:srgbClr val="191D2E"/>
+                          </a:solidFill>
+                          <a:latin typeface="Courier New"/>
+                        </a:rPr>
+                        <a:t/>
+                      </a:r>
+                    </a:p>
+                  </a:txBody>
+                  <a:tcPr>
+                    <a:solidFill>
+                      <a:srgbClr val="F0F0F5"/>
+                    </a:solidFill>
+                  </a:tcPr>
+                </a:tc>
+                <a:tc>
+                  <a:txBody>
+                    <a:bodyPr wrap="square"/>
+                    <a:lstStyle/>
+                    <a:p>
+                      <a:r>
+                        <a:rPr sz="1000" b="0">
+                          <a:solidFill>
+                            <a:srgbClr val="191D2E"/>
+                          </a:solidFill>
+                          <a:latin typeface="Courier New"/>
+                        </a:rPr>
+                        <a:t/>
+                      </a:r>
+                    </a:p>
+                  </a:txBody>
+                  <a:tcPr>
+                    <a:solidFill>
+                      <a:srgbClr val="F0F0F5"/>
+                    </a:solidFill>
+                  </a:tcPr>
+                </a:tc>
+              </a:tr>
+              <a:tr h="380999">
+                <a:tc>
+                  <a:txBody>
+                    <a:bodyPr wrap="square"/>
+                    <a:lstStyle/>
+                    <a:p>
+                      <a:r>
+                        <a:rPr sz="1000" b="0">
+                          <a:solidFill>
+                            <a:srgbClr val="191D2E"/>
+                          </a:solidFill>
+                          <a:latin typeface="Courier New"/>
+                        </a:rPr>
+                        <a:t>Ich habe das 5-Fragen-Schema in einem echten Kundengespräch angewendet.</a:t>
+                      </a:r>
+                    </a:p>
+                  </a:txBody>
+                  <a:tcPr>
+                    <a:solidFill>
+                      <a:srgbClr val="F8F8FA"/>
+                    </a:solidFill>
+                  </a:tcPr>
+                </a:tc>
+                <a:tc>
+                  <a:txBody>
+                    <a:bodyPr wrap="square"/>
+                    <a:lstStyle/>
+                    <a:p>
+                      <a:r>
+                        <a:rPr sz="1000" b="0">
+                          <a:solidFill>
+                            <a:srgbClr val="191D2E"/>
+                          </a:solidFill>
+                          <a:latin typeface="Courier New"/>
+                        </a:rPr>
+                        <a:t/>
+                      </a:r>
+                    </a:p>
+                  </a:txBody>
+                  <a:tcPr>
+                    <a:solidFill>
+                      <a:srgbClr val="F8F8FA"/>
+                    </a:solidFill>
+                  </a:tcPr>
+                </a:tc>
+                <a:tc>
+                  <a:txBody>
+                    <a:bodyPr wrap="square"/>
+                    <a:lstStyle/>
+                    <a:p>
+                      <a:r>
+                        <a:rPr sz="1000" b="0">
+                          <a:solidFill>
+                            <a:srgbClr val="191D2E"/>
+                          </a:solidFill>
+                          <a:latin typeface="Courier New"/>
+                        </a:rPr>
+                        <a:t/>
+                      </a:r>
+                    </a:p>
+                  </a:txBody>
+                  <a:tcPr>
+                    <a:solidFill>
+                      <a:srgbClr val="F8F8FA"/>
+                    </a:solidFill>
+                  </a:tcPr>
+                </a:tc>
+                <a:tc>
+                  <a:txBody>
+                    <a:bodyPr wrap="square"/>
+                    <a:lstStyle/>
+                    <a:p>
+                      <a:r>
+                        <a:rPr sz="1000" b="0">
+                          <a:solidFill>
+                            <a:srgbClr val="191D2E"/>
+                          </a:solidFill>
+                          <a:latin typeface="Courier New"/>
+                        </a:rPr>
+                        <a:t/>
+                      </a:r>
+                    </a:p>
+                  </a:txBody>
+                  <a:tcPr>
+                    <a:solidFill>
+                      <a:srgbClr val="F8F8FA"/>
+                    </a:solidFill>
+                  </a:tcPr>
+                </a:tc>
+                <a:tc>
+                  <a:txBody>
+                    <a:bodyPr wrap="square"/>
+                    <a:lstStyle/>
+                    <a:p>
+                      <a:r>
+                        <a:rPr sz="1000" b="0">
+                          <a:solidFill>
+                            <a:srgbClr val="191D2E"/>
+                          </a:solidFill>
+                          <a:latin typeface="Courier New"/>
+                        </a:rPr>
+                        <a:t/>
+                      </a:r>
+                    </a:p>
+                  </a:txBody>
+                  <a:tcPr>
+                    <a:solidFill>
+                      <a:srgbClr val="F8F8FA"/>
+                    </a:solidFill>
+                  </a:tcPr>
+                </a:tc>
+                <a:tc>
+                  <a:txBody>
+                    <a:bodyPr wrap="square"/>
+                    <a:lstStyle/>
+                    <a:p>
+                      <a:r>
+                        <a:rPr sz="1000" b="0">
+                          <a:solidFill>
+                            <a:srgbClr val="191D2E"/>
+                          </a:solidFill>
+                          <a:latin typeface="Courier New"/>
+                        </a:rPr>
+                        <a:t/>
+                      </a:r>
+                    </a:p>
+                  </a:txBody>
+                  <a:tcPr>
+                    <a:solidFill>
+                      <a:srgbClr val="F8F8FA"/>
+                    </a:solidFill>
+                  </a:tcPr>
+                </a:tc>
+                <a:tc>
+                  <a:txBody>
+                    <a:bodyPr wrap="square"/>
+                    <a:lstStyle/>
+                    <a:p>
+                      <a:r>
+                        <a:rPr sz="1000" b="0">
+                          <a:solidFill>
+                            <a:srgbClr val="191D2E"/>
+                          </a:solidFill>
+                          <a:latin typeface="Courier New"/>
+                        </a:rPr>
+                        <a:t/>
+                      </a:r>
+                    </a:p>
+                  </a:txBody>
+                  <a:tcPr>
+                    <a:solidFill>
+                      <a:srgbClr val="F8F8FA"/>
+                    </a:solidFill>
+                  </a:tcPr>
+                </a:tc>
+              </a:tr>
+              <a:tr h="380999">
+                <a:tc>
+                  <a:txBody>
+                    <a:bodyPr wrap="square"/>
+                    <a:lstStyle/>
+                    <a:p>
+                      <a:r>
+                        <a:rPr sz="1000" b="0">
+                          <a:solidFill>
+                            <a:srgbClr val="191D2E"/>
+                          </a:solidFill>
+                          <a:latin typeface="Courier New"/>
+                        </a:rPr>
+                        <a:t>Ich fühle mich sicher dabei, einen unbekannten Betrieb einem Branchentyp zuzuordnen.</a:t>
+                      </a:r>
+                    </a:p>
+                  </a:txBody>
+                  <a:tcPr>
+                    <a:solidFill>
+                      <a:srgbClr val="F0F0F5"/>
+                    </a:solidFill>
+                  </a:tcPr>
+                </a:tc>
+                <a:tc>
+                  <a:txBody>
+                    <a:bodyPr wrap="square"/>
+                    <a:lstStyle/>
+                    <a:p>
+                      <a:r>
+                        <a:rPr sz="1000" b="0">
+                          <a:solidFill>
+                            <a:srgbClr val="191D2E"/>
+                          </a:solidFill>
+                          <a:latin typeface="Courier New"/>
+                        </a:rPr>
+                        <a:t/>
+                      </a:r>
+                    </a:p>
+                  </a:txBody>
+                  <a:tcPr>
+                    <a:solidFill>
+                      <a:srgbClr val="F0F0F5"/>
+                    </a:solidFill>
+                  </a:tcPr>
+                </a:tc>
+                <a:tc>
+                  <a:txBody>
+                    <a:bodyPr wrap="square"/>
+                    <a:lstStyle/>
+                    <a:p>
+                      <a:r>
+                        <a:rPr sz="1000" b="0">
+                          <a:solidFill>
+                            <a:srgbClr val="191D2E"/>
+                          </a:solidFill>
+                          <a:latin typeface="Courier New"/>
+                        </a:rPr>
+                        <a:t/>
+                      </a:r>
+                    </a:p>
+                  </a:txBody>
+                  <a:tcPr>
+                    <a:solidFill>
+                      <a:srgbClr val="F0F0F5"/>
+                    </a:solidFill>
+                  </a:tcPr>
+                </a:tc>
+                <a:tc>
+                  <a:txBody>
+                    <a:bodyPr wrap="square"/>
+                    <a:lstStyle/>
+                    <a:p>
+                      <a:r>
+                        <a:rPr sz="1000" b="0">
+                          <a:solidFill>
+                            <a:srgbClr val="191D2E"/>
+                          </a:solidFill>
+                          <a:latin typeface="Courier New"/>
+                        </a:rPr>
+                        <a:t/>
+                      </a:r>
+                    </a:p>
+                  </a:txBody>
+                  <a:tcPr>
+                    <a:solidFill>
+                      <a:srgbClr val="F0F0F5"/>
+                    </a:solidFill>
+                  </a:tcPr>
+                </a:tc>
+                <a:tc>
+                  <a:txBody>
+                    <a:bodyPr wrap="square"/>
+                    <a:lstStyle/>
+                    <a:p>
+                      <a:r>
+                        <a:rPr sz="1000" b="0">
+                          <a:solidFill>
+                            <a:srgbClr val="191D2E"/>
+                          </a:solidFill>
+                          <a:latin typeface="Courier New"/>
+                        </a:rPr>
+                        <a:t/>
+                      </a:r>
+                    </a:p>
+                  </a:txBody>
+                  <a:tcPr>
+                    <a:solidFill>
+                      <a:srgbClr val="F0F0F5"/>
+                    </a:solidFill>
+                  </a:tcPr>
+                </a:tc>
+                <a:tc>
+                  <a:txBody>
+                    <a:bodyPr wrap="square"/>
+                    <a:lstStyle/>
+                    <a:p>
+                      <a:r>
+                        <a:rPr sz="1000" b="0">
+                          <a:solidFill>
+                            <a:srgbClr val="191D2E"/>
+                          </a:solidFill>
+                          <a:latin typeface="Courier New"/>
+                        </a:rPr>
+                        <a:t/>
+                      </a:r>
+                    </a:p>
+                  </a:txBody>
+                  <a:tcPr>
+                    <a:solidFill>
+                      <a:srgbClr val="F0F0F5"/>
+                    </a:solidFill>
+                  </a:tcPr>
+                </a:tc>
+                <a:tc>
+                  <a:txBody>
+                    <a:bodyPr wrap="square"/>
+                    <a:lstStyle/>
+                    <a:p>
+                      <a:r>
+                        <a:rPr sz="1000" b="0">
+                          <a:solidFill>
+                            <a:srgbClr val="191D2E"/>
+                          </a:solidFill>
+                          <a:latin typeface="Courier New"/>
+                        </a:rPr>
+                        <a:t/>
+                      </a:r>
+                    </a:p>
+                  </a:txBody>
+                  <a:tcPr>
+                    <a:solidFill>
+                      <a:srgbClr val="F0F0F5"/>
+                    </a:solidFill>
+                  </a:tcPr>
+                </a:tc>
+              </a:tr>
+              <a:tr h="380999">
+                <a:tc>
+                  <a:txBody>
+                    <a:bodyPr wrap="square"/>
+                    <a:lstStyle/>
+                    <a:p>
+                      <a:r>
+                        <a:rPr sz="1000" b="0">
+                          <a:solidFill>
+                            <a:srgbClr val="191D2E"/>
+                          </a:solidFill>
+                          <a:latin typeface="Courier New"/>
+                        </a:rPr>
+                        <a:t>Ich erkenne, welche meiner Kunden ein erhöhtes Nachfolgerisiko haben.</a:t>
+                      </a:r>
+                    </a:p>
+                  </a:txBody>
+                  <a:tcPr>
+                    <a:solidFill>
+                      <a:srgbClr val="F8F8FA"/>
+                    </a:solidFill>
+                  </a:tcPr>
+                </a:tc>
+                <a:tc>
+                  <a:txBody>
+                    <a:bodyPr wrap="square"/>
+                    <a:lstStyle/>
+                    <a:p>
+                      <a:r>
+                        <a:rPr sz="1000" b="0">
+                          <a:solidFill>
+                            <a:srgbClr val="191D2E"/>
+                          </a:solidFill>
+                          <a:latin typeface="Courier New"/>
+                        </a:rPr>
+                        <a:t/>
+                      </a:r>
+                    </a:p>
+                  </a:txBody>
+                  <a:tcPr>
+                    <a:solidFill>
+                      <a:srgbClr val="F8F8FA"/>
+                    </a:solidFill>
+                  </a:tcPr>
+                </a:tc>
+                <a:tc>
+                  <a:txBody>
+                    <a:bodyPr wrap="square"/>
+                    <a:lstStyle/>
+                    <a:p>
+                      <a:r>
+                        <a:rPr sz="1000" b="0">
+                          <a:solidFill>
+                            <a:srgbClr val="191D2E"/>
+                          </a:solidFill>
+                          <a:latin typeface="Courier New"/>
+                        </a:rPr>
+                        <a:t/>
+                      </a:r>
+                    </a:p>
+                  </a:txBody>
+                  <a:tcPr>
+                    <a:solidFill>
+                      <a:srgbClr val="F8F8FA"/>
+                    </a:solidFill>
+                  </a:tcPr>
+                </a:tc>
+                <a:tc>
+                  <a:txBody>
+                    <a:bodyPr wrap="square"/>
+                    <a:lstStyle/>
+                    <a:p>
+                      <a:r>
+                        <a:rPr sz="1000" b="0">
+                          <a:solidFill>
+                            <a:srgbClr val="191D2E"/>
+                          </a:solidFill>
+                          <a:latin typeface="Courier New"/>
+                        </a:rPr>
+                        <a:t/>
+                      </a:r>
+                    </a:p>
+                  </a:txBody>
+                  <a:tcPr>
+                    <a:solidFill>
+                      <a:srgbClr val="F8F8FA"/>
+                    </a:solidFill>
+                  </a:tcPr>
+                </a:tc>
+                <a:tc>
+                  <a:txBody>
+                    <a:bodyPr wrap="square"/>
+                    <a:lstStyle/>
+                    <a:p>
+                      <a:r>
+                        <a:rPr sz="1000" b="0">
+                          <a:solidFill>
+                            <a:srgbClr val="191D2E"/>
+                          </a:solidFill>
+                          <a:latin typeface="Courier New"/>
+                        </a:rPr>
+                        <a:t/>
+                      </a:r>
+                    </a:p>
+                  </a:txBody>
+                  <a:tcPr>
+                    <a:solidFill>
+                      <a:srgbClr val="F8F8FA"/>
+                    </a:solidFill>
+                  </a:tcPr>
+                </a:tc>
+                <a:tc>
+                  <a:txBody>
+                    <a:bodyPr wrap="square"/>
+                    <a:lstStyle/>
+                    <a:p>
+                      <a:r>
+                        <a:rPr sz="1000" b="0">
+                          <a:solidFill>
+                            <a:srgbClr val="191D2E"/>
+                          </a:solidFill>
+                          <a:latin typeface="Courier New"/>
+                        </a:rPr>
+                        <a:t/>
+                      </a:r>
+                    </a:p>
+                  </a:txBody>
+                  <a:tcPr>
+                    <a:solidFill>
+                      <a:srgbClr val="F8F8FA"/>
+                    </a:solidFill>
+                  </a:tcPr>
+                </a:tc>
+                <a:tc>
+                  <a:txBody>
+                    <a:bodyPr wrap="square"/>
+                    <a:lstStyle/>
+                    <a:p>
+                      <a:r>
+                        <a:rPr sz="1000" b="0">
+                          <a:solidFill>
+                            <a:srgbClr val="191D2E"/>
+                          </a:solidFill>
+                          <a:latin typeface="Courier New"/>
+                        </a:rPr>
+                        <a:t/>
+                      </a:r>
+                    </a:p>
+                  </a:txBody>
+                  <a:tcPr>
+                    <a:solidFill>
+                      <a:srgbClr val="F8F8FA"/>
+                    </a:solidFill>
+                  </a:tcPr>
+                </a:tc>
+              </a:tr>
+              <a:tr h="381009">
+                <a:tc>
+                  <a:txBody>
+                    <a:bodyPr wrap="square"/>
+                    <a:lstStyle/>
+                    <a:p>
+                      <a:r>
+                        <a:rPr sz="1000" b="0">
+                          <a:solidFill>
+                            <a:srgbClr val="191D2E"/>
+                          </a:solidFill>
+                          <a:latin typeface="Courier New"/>
+                        </a:rPr>
+                        <a:t>Ich habe die Ergebnisse meines KMU-Profils in agree/VR-NetWorld dokumentiert.</a:t>
+                      </a:r>
+                    </a:p>
+                  </a:txBody>
+                  <a:tcPr>
+                    <a:solidFill>
+                      <a:srgbClr val="F0F0F5"/>
+                    </a:solidFill>
+                  </a:tcPr>
+                </a:tc>
+                <a:tc>
+                  <a:txBody>
+                    <a:bodyPr wrap="square"/>
+                    <a:lstStyle/>
+                    <a:p>
+                      <a:r>
+                        <a:rPr sz="1000" b="0">
+                          <a:solidFill>
+                            <a:srgbClr val="191D2E"/>
+                          </a:solidFill>
+                          <a:latin typeface="Courier New"/>
+                        </a:rPr>
+                        <a:t/>
+                      </a:r>
+                    </a:p>
+                  </a:txBody>
+                  <a:tcPr>
+                    <a:solidFill>
+                      <a:srgbClr val="F0F0F5"/>
+                    </a:solidFill>
+                  </a:tcPr>
+                </a:tc>
+                <a:tc>
+                  <a:txBody>
+                    <a:bodyPr wrap="square"/>
+                    <a:lstStyle/>
+                    <a:p>
+                      <a:r>
+                        <a:rPr sz="1000" b="0">
+                          <a:solidFill>
+                            <a:srgbClr val="191D2E"/>
+                          </a:solidFill>
+                          <a:latin typeface="Courier New"/>
+                        </a:rPr>
+                        <a:t/>
+                      </a:r>
+                    </a:p>
+                  </a:txBody>
+                  <a:tcPr>
+                    <a:solidFill>
+                      <a:srgbClr val="F0F0F5"/>
+                    </a:solidFill>
+                  </a:tcPr>
+                </a:tc>
+                <a:tc>
+                  <a:txBody>
+                    <a:bodyPr wrap="square"/>
+                    <a:lstStyle/>
+                    <a:p>
+                      <a:r>
+                        <a:rPr sz="1000" b="0">
+                          <a:solidFill>
+                            <a:srgbClr val="191D2E"/>
+                          </a:solidFill>
+                          <a:latin typeface="Courier New"/>
+                        </a:rPr>
+                        <a:t/>
+                      </a:r>
+                    </a:p>
+                  </a:txBody>
+                  <a:tcPr>
+                    <a:solidFill>
+                      <a:srgbClr val="F0F0F5"/>
+                    </a:solidFill>
+                  </a:tcPr>
+                </a:tc>
+                <a:tc>
+                  <a:txBody>
+                    <a:bodyPr wrap="square"/>
+                    <a:lstStyle/>
+                    <a:p>
+                      <a:r>
+                        <a:rPr sz="1000" b="0">
+                          <a:solidFill>
+                            <a:srgbClr val="191D2E"/>
+                          </a:solidFill>
+                          <a:latin typeface="Courier New"/>
+                        </a:rPr>
+                        <a:t/>
+                      </a:r>
+                    </a:p>
+                  </a:txBody>
+                  <a:tcPr>
+                    <a:solidFill>
+                      <a:srgbClr val="F0F0F5"/>
+                    </a:solidFill>
+                  </a:tcPr>
+                </a:tc>
+                <a:tc>
+                  <a:txBody>
+                    <a:bodyPr wrap="square"/>
+                    <a:lstStyle/>
+                    <a:p>
+                      <a:r>
+                        <a:rPr sz="1000" b="0">
+                          <a:solidFill>
+                            <a:srgbClr val="191D2E"/>
+                          </a:solidFill>
+                          <a:latin typeface="Courier New"/>
+                        </a:rPr>
+                        <a:t/>
+                      </a:r>
+                    </a:p>
+                  </a:txBody>
+                  <a:tcPr>
+                    <a:solidFill>
+                      <a:srgbClr val="F0F0F5"/>
+                    </a:solidFill>
+                  </a:tcPr>
+                </a:tc>
+                <a:tc>
+                  <a:txBody>
+                    <a:bodyPr wrap="square"/>
+                    <a:lstStyle/>
+                    <a:p>
+                      <a:r>
+                        <a:rPr sz="1000" b="0">
+                          <a:solidFill>
+                            <a:srgbClr val="191D2E"/>
+                          </a:solidFill>
+                          <a:latin typeface="Courier New"/>
+                        </a:rPr>
+                        <a:t/>
+                      </a:r>
+                    </a:p>
+                  </a:txBody>
+                  <a:tcPr>
+                    <a:solidFill>
+                      <a:srgbClr val="F0F0F5"/>
+                    </a:solidFill>
+                  </a:tcPr>
+                </a:tc>
+              </a:tr>
+            </a:tbl>
+          </a:graphicData>
+        </a:graphic>
+      </p:graphicFrame>
     </p:spTree>
   </p:cSld>
   <p:clrMapOvr>
@@ -13998,7 +15398,7 @@
     <p:bg>
       <p:bgPr>
         <a:solidFill>
-          <a:srgbClr val="191D2E"/>
+          <a:srgbClr val="1F2B56"/>
         </a:solidFill>
         <a:effectLst/>
       </p:bgPr>
@@ -16696,7 +18096,7 @@
     <p:bg>
       <p:bgPr>
         <a:solidFill>
-          <a:srgbClr val="191D2E"/>
+          <a:srgbClr val="1F2B56"/>
         </a:solidFill>
         <a:effectLst/>
       </p:bgPr>
@@ -17205,7 +18605,7 @@
                   </a:txBody>
                   <a:tcPr>
                     <a:solidFill>
-                      <a:srgbClr val="191D2E"/>
+                      <a:srgbClr val="1F2B56"/>
                     </a:solidFill>
                   </a:tcPr>
                 </a:tc>
@@ -17227,7 +18627,7 @@
                   </a:txBody>
                   <a:tcPr>
                     <a:solidFill>
-                      <a:srgbClr val="191D2E"/>
+                      <a:srgbClr val="1F2B56"/>
                     </a:solidFill>
                   </a:tcPr>
                 </a:tc>
@@ -17249,7 +18649,7 @@
                   </a:txBody>
                   <a:tcPr>
                     <a:solidFill>
-                      <a:srgbClr val="191D2E"/>
+                      <a:srgbClr val="1F2B56"/>
                     </a:solidFill>
                   </a:tcPr>
                 </a:tc>
@@ -17271,7 +18671,7 @@
                   </a:txBody>
                   <a:tcPr>
                     <a:solidFill>
-                      <a:srgbClr val="191D2E"/>
+                      <a:srgbClr val="1F2B56"/>
                     </a:solidFill>
                   </a:tcPr>
                 </a:tc>
@@ -21552,7 +22952,7 @@
                   </a:txBody>
                   <a:tcPr>
                     <a:solidFill>
-                      <a:srgbClr val="191D2E"/>
+                      <a:srgbClr val="1F2B56"/>
                     </a:solidFill>
                   </a:tcPr>
                 </a:tc>
@@ -21574,7 +22974,7 @@
                   </a:txBody>
                   <a:tcPr>
                     <a:solidFill>
-                      <a:srgbClr val="191D2E"/>
+                      <a:srgbClr val="1F2B56"/>
                     </a:solidFill>
                   </a:tcPr>
                 </a:tc>
@@ -21596,7 +22996,7 @@
                   </a:txBody>
                   <a:tcPr>
                     <a:solidFill>
-                      <a:srgbClr val="191D2E"/>
+                      <a:srgbClr val="1F2B56"/>
                     </a:solidFill>
                   </a:tcPr>
                 </a:tc>

--- a/public/downloads/praesentation/M06.pptx
+++ b/public/downloads/praesentation/M06.pptx
@@ -3254,7 +3254,42 @@
       </p:sp>
       <p:sp>
         <p:nvSpPr>
-          <p:cNvPr id="6" name="Rectangle 5"/>
+          <p:cNvPr id="6" name="TextBox 5"/>
+          <p:cNvSpPr txBox="1"/>
+          <p:nvPr/>
+        </p:nvSpPr>
+        <p:spPr>
+          <a:xfrm>
+            <a:off x="685800" y="3977639"/>
+            <a:ext cx="10817352" cy="731520"/>
+          </a:xfrm>
+          <a:prstGeom prst="rect">
+            <a:avLst/>
+          </a:prstGeom>
+          <a:noFill/>
+        </p:spPr>
+        <p:txBody>
+          <a:bodyPr wrap="square">
+            <a:spAutoFit/>
+          </a:bodyPr>
+          <a:lstStyle/>
+          <a:p>
+            <a:pPr algn="l"/>
+            <a:r>
+              <a:rPr sz="1900" b="0" i="1">
+                <a:solidFill>
+                  <a:srgbClr val="BECDE6"/>
+                </a:solidFill>
+                <a:latin typeface="Source Serif 4"/>
+              </a:rPr>
+              <a:t>Branchenwissen für den Firmenkundenberater</a:t>
+            </a:r>
+          </a:p>
+        </p:txBody>
+      </p:sp>
+      <p:sp>
+        <p:nvSpPr>
+          <p:cNvPr id="7" name="Rectangle 6"/>
           <p:cNvSpPr/>
           <p:nvPr/>
         </p:nvSpPr>
@@ -3297,14 +3332,14 @@
       </p:sp>
       <p:sp>
         <p:nvSpPr>
-          <p:cNvPr id="7" name="TextBox 6"/>
+          <p:cNvPr id="8" name="TextBox 7"/>
           <p:cNvSpPr txBox="1"/>
           <p:nvPr/>
         </p:nvSpPr>
         <p:spPr>
           <a:xfrm>
             <a:off x="685800" y="5193792"/>
-            <a:ext cx="5408676" cy="201168"/>
+            <a:ext cx="3605784" cy="201168"/>
           </a:xfrm>
           <a:prstGeom prst="rect">
             <a:avLst/>
@@ -3332,14 +3367,14 @@
       </p:sp>
       <p:sp>
         <p:nvSpPr>
-          <p:cNvPr id="8" name="TextBox 7"/>
+          <p:cNvPr id="9" name="TextBox 8"/>
           <p:cNvSpPr txBox="1"/>
           <p:nvPr/>
         </p:nvSpPr>
         <p:spPr>
           <a:xfrm>
             <a:off x="685800" y="5394960"/>
-            <a:ext cx="5408676" cy="320040"/>
+            <a:ext cx="3605784" cy="320040"/>
           </a:xfrm>
           <a:prstGeom prst="rect">
             <a:avLst/>
@@ -3367,14 +3402,14 @@
       </p:sp>
       <p:sp>
         <p:nvSpPr>
-          <p:cNvPr id="9" name="TextBox 8"/>
+          <p:cNvPr id="10" name="TextBox 9"/>
           <p:cNvSpPr txBox="1"/>
           <p:nvPr/>
         </p:nvSpPr>
         <p:spPr>
           <a:xfrm>
-            <a:off x="6094476" y="5193792"/>
-            <a:ext cx="5408676" cy="201168"/>
+            <a:off x="4291584" y="5193792"/>
+            <a:ext cx="3605784" cy="201168"/>
           </a:xfrm>
           <a:prstGeom prst="rect">
             <a:avLst/>
@@ -3395,21 +3430,21 @@
                 </a:solidFill>
                 <a:latin typeface="JetBrains Mono"/>
               </a:rPr>
-              <a:t>VERSION</a:t>
-            </a:r>
-          </a:p>
-        </p:txBody>
-      </p:sp>
-      <p:sp>
-        <p:nvSpPr>
-          <p:cNvPr id="10" name="TextBox 9"/>
+              <a:t>KOMPETENZSTUFE</a:t>
+            </a:r>
+          </a:p>
+        </p:txBody>
+      </p:sp>
+      <p:sp>
+        <p:nvSpPr>
+          <p:cNvPr id="11" name="TextBox 10"/>
           <p:cNvSpPr txBox="1"/>
           <p:nvPr/>
         </p:nvSpPr>
         <p:spPr>
           <a:xfrm>
-            <a:off x="6094476" y="5394960"/>
-            <a:ext cx="5408676" cy="320040"/>
+            <a:off x="4291584" y="5394960"/>
+            <a:ext cx="3605784" cy="320040"/>
           </a:xfrm>
           <a:prstGeom prst="rect">
             <a:avLst/>
@@ -3430,6 +3465,76 @@
                 </a:solidFill>
                 <a:latin typeface="Arial"/>
               </a:rPr>
+              <a:t>Berater</a:t>
+            </a:r>
+          </a:p>
+        </p:txBody>
+      </p:sp>
+      <p:sp>
+        <p:nvSpPr>
+          <p:cNvPr id="12" name="TextBox 11"/>
+          <p:cNvSpPr txBox="1"/>
+          <p:nvPr/>
+        </p:nvSpPr>
+        <p:spPr>
+          <a:xfrm>
+            <a:off x="7897368" y="5193792"/>
+            <a:ext cx="3605784" cy="201168"/>
+          </a:xfrm>
+          <a:prstGeom prst="rect">
+            <a:avLst/>
+          </a:prstGeom>
+          <a:noFill/>
+        </p:spPr>
+        <p:txBody>
+          <a:bodyPr wrap="none">
+            <a:spAutoFit/>
+          </a:bodyPr>
+          <a:lstStyle/>
+          <a:p>
+            <a:pPr algn="l"/>
+            <a:r>
+              <a:rPr sz="700">
+                <a:solidFill>
+                  <a:srgbClr val="A0B4D2"/>
+                </a:solidFill>
+                <a:latin typeface="JetBrains Mono"/>
+              </a:rPr>
+              <a:t>VERSION</a:t>
+            </a:r>
+          </a:p>
+        </p:txBody>
+      </p:sp>
+      <p:sp>
+        <p:nvSpPr>
+          <p:cNvPr id="13" name="TextBox 12"/>
+          <p:cNvSpPr txBox="1"/>
+          <p:nvPr/>
+        </p:nvSpPr>
+        <p:spPr>
+          <a:xfrm>
+            <a:off x="7897368" y="5394960"/>
+            <a:ext cx="3605784" cy="320040"/>
+          </a:xfrm>
+          <a:prstGeom prst="rect">
+            <a:avLst/>
+          </a:prstGeom>
+          <a:noFill/>
+        </p:spPr>
+        <p:txBody>
+          <a:bodyPr wrap="square">
+            <a:spAutoFit/>
+          </a:bodyPr>
+          <a:lstStyle/>
+          <a:p>
+            <a:pPr algn="l"/>
+            <a:r>
+              <a:rPr sz="1100" b="0" i="0">
+                <a:solidFill>
+                  <a:srgbClr val="FFFFFF"/>
+                </a:solidFill>
+                <a:latin typeface="Arial"/>
+              </a:rPr>
               <a:t>v0.4</a:t>
             </a:r>
           </a:p>
@@ -3437,7 +3542,7 @@
       </p:sp>
       <p:sp>
         <p:nvSpPr>
-          <p:cNvPr id="11" name="Rectangle 10"/>
+          <p:cNvPr id="14" name="Rectangle 13"/>
           <p:cNvSpPr/>
           <p:nvPr/>
         </p:nvSpPr>
@@ -3480,7 +3585,7 @@
       </p:sp>
       <p:sp>
         <p:nvSpPr>
-          <p:cNvPr id="12" name="TextBox 11"/>
+          <p:cNvPr id="15" name="TextBox 14"/>
           <p:cNvSpPr txBox="1"/>
           <p:nvPr/>
         </p:nvSpPr>
@@ -3515,7 +3620,7 @@
       </p:sp>
       <p:sp>
         <p:nvSpPr>
-          <p:cNvPr id="13" name="TextBox 12"/>
+          <p:cNvPr id="16" name="TextBox 15"/>
           <p:cNvSpPr txBox="1"/>
           <p:nvPr/>
         </p:nvSpPr>
